--- a/deck/incident-agent-ablation.pptx
+++ b/deck/incident-agent-ablation.pptx
@@ -119,33 +119,33 @@
   <p:extLst>
     <p:ext uri="{521415D9-36F7-43E2-AB2F-B90AF26B5E84}">
       <p14:sectionLst xmlns:p14="http://schemas.microsoft.com/office/powerpoint/2010/main">
-        <p14:section name="표지" id="{95a0ec16-01d5-9162-239a-efbeb7c1deca}">
+        <p14:section name="표지" id="{b6cd8255-b705-2025-f3d4-9430ab96d4bf}">
           <p14:sldIdLst>
             <p14:sldId id="256"/>
           </p14:sldIdLst>
         </p14:section>
-        <p14:section name="요약" id="{f3436df3-ba22-92e4-8bd0-aeaf34e648a2}">
+        <p14:section name="요약" id="{b74a74bc-acaa-c8b1-b39a-1fd407481576}">
           <p14:sldIdLst>
             <p14:sldId id="257"/>
           </p14:sldIdLst>
         </p14:section>
-        <p14:section name="문제" id="{e7351f29-6351-1c3d-d9c4-c6adcdbc7a1b}">
+        <p14:section name="문제" id="{b7075e04-b1a4-306c-7607-41031d73d257}">
           <p14:sldIdLst>
             <p14:sldId id="258"/>
             <p14:sldId id="259"/>
           </p14:sldIdLst>
         </p14:section>
-        <p14:section name="개선" id="{6af69a31-4d26-6900-9b84-288202b0a4d2}">
+        <p14:section name="개선" id="{09f02686-12c0-2def-8d1a-1af39d22e9d7}">
           <p14:sldIdLst>
             <p14:sldId id="260"/>
           </p14:sldIdLst>
         </p14:section>
-        <p14:section name="평가 설계" id="{620f5cfd-2082-622e-c593-6b0fd8f054aa}">
+        <p14:section name="평가 설계" id="{025c52fa-ab33-1ffe-c896-9145c26be7c8}">
           <p14:sldIdLst>
             <p14:sldId id="261"/>
           </p14:sldIdLst>
         </p14:section>
-        <p14:section name="Before/After" id="{d8641767-a4b4-ead4-2ed1-0b5fd09350ec}">
+        <p14:section name="Before/After" id="{649b8a05-ca88-e315-d63b-8417bdde0898}">
           <p14:sldIdLst>
             <p14:sldId id="262"/>
             <p14:sldId id="263"/>
@@ -154,12 +154,12 @@
             <p14:sldId id="266"/>
           </p14:sldIdLst>
         </p14:section>
-        <p14:section name="한계" id="{31a74a13-7a81-1f5e-1a3a-0790394dbd19}">
+        <p14:section name="한계" id="{ff7fbd6d-68f3-1ac9-8f99-7b81cd3f731b}">
           <p14:sldIdLst>
             <p14:sldId id="267"/>
           </p14:sldIdLst>
         </p14:section>
-        <p14:section name="마무리" id="{2c3b9e14-7a84-6808-41b4-da4fce9b3b2f}">
+        <p14:section name="마무리" id="{500f9063-ebdc-3d86-1b84-569c965d51c3}">
           <p14:sldIdLst>
             <p14:sldId id="268"/>
           </p14:sldIdLst>
@@ -2510,7 +2510,7 @@
           <a:p>
             <a:r>
               <a:rPr lang="en-US" dirty="0"/>
-              <a:t>Judge 기준에 '근거에 없으면 없다고 말하는 게 정답'이라는 조건이 빠져서 정직한 답을 오히려 반려했습니다.</a:t>
+              <a:t>Judge 기준의 완전성·도메인 지표가 '런북 절차를 반영하라'고 요구해서, 맞는 런북이 없는 질문에서는 무관한 절차를 섞도록 압력을 줬습니다.</a:t>
             </a:r>
             <a:endParaRPr lang="en-US" dirty="0"/>
           </a:p>
@@ -3214,7 +3214,7 @@
           <a:p>
             <a:r>
               <a:rPr lang="en-US" dirty="0"/>
-              <a:t>검색 품질과 답변 품질을 분리해서 재야 검색이 좋아져서 답이 좋아졌다는 인과를 말할 수 있습니다.</a:t>
+              <a:t>검색 품질과 답변 품질을 분리해서 재면, 검색이 좋아진 구성에서 답도 좋아졌는지를 따로 볼 수 있습니다. 다만 24건 1회 실행이라 인과를 단정하지는 않습니다.</a:t>
             </a:r>
             <a:endParaRPr lang="en-US" dirty="0"/>
           </a:p>
@@ -4357,7 +4357,7 @@
                   <a:schemeClr val="tx1"/>
                 </a:solidFill>
               </a:rPr>
-              <a:t>정상 질의 12건에서는 한 번도 반려하지 않았다.</a:t>
+              <a:t>+Judge에서 정상 질의 12건은 한 번도 반려되지 않았다.</a:t>
             </a:r>
             <a:endParaRPr lang="en-US" sz="1500" dirty="0"/>
           </a:p>
@@ -4375,7 +4375,7 @@
                   <a:schemeClr val="tx1"/>
                 </a:solidFill>
               </a:rPr>
-              <a:t>Kafka·SSL처럼 런북에 없는 문제에 "런북 절차를 반영하라"며 반려했다. 재작성으로는 채울 수 없는 요구다.</a:t>
+              <a:t>Kafka·SSL처럼 맞는 런북이 없는 문제에 "런북 절차를 반영하라"며 반려했다. 재작성된 답은 무관한 절차를 섞는 쪽으로 바뀌었다.</a:t>
             </a:r>
             <a:endParaRPr lang="en-US" sz="1500" dirty="0"/>
           </a:p>
@@ -4393,7 +4393,7 @@
                   <a:schemeClr val="tx1"/>
                 </a:solidFill>
               </a:rPr>
-              <a:t>Q21은 재시도 상한 2회에서 가드가 멈췄다. 무한 루프 가드가 실제로 작동했다.</a:t>
+              <a:t>Q21은 재시도 상한 2회에서 가드가 멈췄다 (무한 루프 가드 작동). Q20·Q22는 3회차에 통과했다.</a:t>
             </a:r>
             <a:endParaRPr lang="en-US" sz="1500" dirty="0"/>
           </a:p>
@@ -4411,7 +4411,7 @@
                   <a:schemeClr val="tx1"/>
                 </a:solidFill>
               </a:rPr>
-              <a:t>+RAG → +Judge의 어구 포함률 차이는 재작성 0회인 건에서 났다. Judge 효과가 아니라 실행 간 변동이다.</a:t>
+              <a:t>+RAG → +Judge의 어구 포함률 차이는 재작성 0회인 건에서 났다. Judge 효과가 아니라 실행 간 변동으로 본다.</a:t>
             </a:r>
             <a:endParaRPr lang="en-US" sz="1500" dirty="0"/>
           </a:p>
@@ -4474,7 +4474,7 @@
                   <a:srgbClr val="16202C"/>
                 </a:solidFill>
               </a:rPr>
-              <a:t>Q20 "Kafka 컨슈머 랙이 쌓입니다"</a:t>
+              <a:t>Q20 "Kafka 컨슈머 랙이 계속 쌓이고 있습니다"</a:t>
             </a:r>
             <a:endParaRPr lang="en-US" sz="1600" dirty="0"/>
           </a:p>
@@ -4558,7 +4558,7 @@
                   <a:schemeClr val="tx1"/>
                 </a:solidFill>
               </a:rPr>
-              <a:t>"Kafka 문제를 해결하기 위해 auth-service를 점검합니다"처럼 질문과 근거를 억지로 이어 붙임</a:t>
+              <a:t>"Kafka 컨슈머 랙 문제를 해결하기 위해 먼저 auth-service의 상태를 점검합니다"로 시작해 무관한 절차를 섞음</a:t>
             </a:r>
             <a:endParaRPr lang="en-US" sz="1600" dirty="0"/>
           </a:p>
@@ -4694,7 +4694,7 @@
                   <a:schemeClr val="tx2"/>
                 </a:solidFill>
               </a:rPr>
-              <a:t>캐시: 같은 질문이 반복될 때만 효과가 있다</a:t>
+              <a:t>캐시: 반복 질문의 지연을 줄인다, 비용 효과는 작다</a:t>
             </a:r>
             <a:endParaRPr lang="en-US" sz="3000" dirty="0"/>
           </a:p>
@@ -4870,7 +4870,7 @@
                   <a:schemeClr val="accent6"/>
                 </a:solidFill>
               </a:rPr>
-              <a:t>-31%</a:t>
+              <a:t>8%</a:t>
             </a:r>
             <a:endParaRPr lang="en-US" sz="4000" dirty="0"/>
           </a:p>
@@ -4906,7 +4906,7 @@
                   <a:schemeClr val="tx1"/>
                 </a:solidFill>
               </a:rPr>
-              <a:t>24건 비용, 1회차 → 2회차</a:t>
+              <a:t>캐시 대상 단계의 비용 비중</a:t>
             </a:r>
             <a:endParaRPr lang="en-US" sz="1400" dirty="0"/>
           </a:p>
@@ -4920,7 +4920,7 @@
                   <a:schemeClr val="tx1"/>
                 </a:solidFill>
               </a:rPr>
-              <a:t>$0.0204 → $0.0141</a:t>
+              <a:t>= 캐시로 줄일 수 있는 비용의 상한</a:t>
             </a:r>
             <a:endParaRPr lang="en-US" sz="1400" dirty="0"/>
           </a:p>
@@ -5092,6 +5092,24 @@
                 </a:solidFill>
               </a:rPr>
               <a:t>모니터링 값과 최종 답은 캐시하지 않는다. 장애 상황은 호출마다 바뀌기 때문이다.</a:t>
+            </a:r>
+            <a:endParaRPr lang="en-US" sz="1500" dirty="0"/>
+          </a:p>
+          <a:p>
+            <a:pPr marL="342900" indent="-342900">
+              <a:spcAft>
+                <a:spcPts val="800"/>
+              </a:spcAft>
+              <a:buSzPct val="100000"/>
+              <a:buChar char="•"/>
+            </a:pPr>
+            <a:r>
+              <a:rPr lang="en-US" sz="1500" dirty="0">
+                <a:solidFill>
+                  <a:schemeClr val="tx1"/>
+                </a:solidFill>
+              </a:rPr>
+              <a:t>총비용은 $0.0204 → $0.0141로 줄었지만, 재작성 횟수 차이가 섞여 있어 캐시 효과로 쓰지 않는다. 캐시의 효과는 지연이다.</a:t>
             </a:r>
             <a:endParaRPr lang="en-US" sz="1500" dirty="0"/>
           </a:p>
@@ -5573,7 +5591,7 @@
                   <a:schemeClr val="tx1"/>
                 </a:solidFill>
               </a:rPr>
-              <a:t>고칠 수 없는 반려로 재작성·비용만 늘었다</a:t>
+              <a:t>런북 없는 질의에서 재작성·비용만 늘고 답은 나빠졌다</a:t>
             </a:r>
             <a:endParaRPr lang="en-US" sz="1300" dirty="0"/>
           </a:p>
@@ -5965,7 +5983,7 @@
                   <a:schemeClr val="tx1"/>
                 </a:solidFill>
               </a:rPr>
-              <a:t>질의 1건 = 4.2%p. 실행 간 변동이 어구 기준 약 8%p</a:t>
+              <a:t>질의 1건 = 4.2%p. 반복 실행 없음 (변동은 간접 추정 8%p)</a:t>
             </a:r>
             <a:endParaRPr lang="en-US" sz="1300" dirty="0"/>
           </a:p>
@@ -6450,7 +6468,7 @@
                   <a:schemeClr val="tx1"/>
                 </a:solidFill>
               </a:rPr>
-              <a:t>$0.0647 → $0.0264, 품질은 더 높음</a:t>
+              <a:t>$0.0647 → $0.0264, 품질 상승은 RAG 몫</a:t>
             </a:r>
             <a:endParaRPr lang="en-US" sz="1400" dirty="0"/>
           </a:p>
@@ -11096,7 +11114,7 @@
                   <a:schemeClr val="tx1"/>
                 </a:solidFill>
               </a:rPr>
-              <a:t>Judge 자체도 틀릴 수 있어서 Judge와 무관한 결정적 지표(측정 전에 정해 둔 런북 핵심 어구 포함률)와 사람 라벨로 검증한다.</a:t>
+              <a:t>Judge 자체도 틀릴 수 있어서 Judge와 무관한 결정적 지표(측정 전에 정해 둔 런북 핵심 어구 포함률)를 함께 보고, 사람 라벨로 Judge 일치율을 잰다.</a:t>
             </a:r>
             <a:endParaRPr lang="en-US" sz="1400" dirty="0"/>
           </a:p>

--- a/deck/incident-agent-ablation.pptx
+++ b/deck/incident-agent-ablation.pptx
@@ -122,34 +122,34 @@
   <p:extLst>
     <p:ext uri="{521415D9-36F7-43E2-AB2F-B90AF26B5E84}">
       <p14:sectionLst xmlns:p14="http://schemas.microsoft.com/office/powerpoint/2010/main">
-        <p14:section name="표지" id="{b298add1-d512-cb68-a899-70e1d9917dc1}">
+        <p14:section name="표지" id="{eb3c290c-79c3-2e5a-7dbc-93fc9cb45568}">
           <p14:sldIdLst>
             <p14:sldId id="256"/>
           </p14:sldIdLst>
         </p14:section>
-        <p14:section name="요약" id="{a70a55a6-5ba9-8c3e-0b48-adfa878d981e}">
+        <p14:section name="요약" id="{7dfe0583-77fd-0abf-749b-87709ff8cd8f}">
           <p14:sldIdLst>
             <p14:sldId id="257"/>
           </p14:sldIdLst>
         </p14:section>
-        <p14:section name="문제" id="{33dd8732-7a2a-22a5-4d43-190f2c2677cb}">
+        <p14:section name="문제" id="{52bc9e6d-77c4-ba47-daa0-ab1f678ea901}">
           <p14:sldIdLst>
             <p14:sldId id="258"/>
             <p14:sldId id="259"/>
             <p14:sldId id="260"/>
           </p14:sldIdLst>
         </p14:section>
-        <p14:section name="개선" id="{8961d8f1-5670-2e05-2b10-3c3799724b6e}">
+        <p14:section name="개선" id="{ba9c7fdc-be71-f82f-139e-c50a51b26219}">
           <p14:sldIdLst>
             <p14:sldId id="261"/>
           </p14:sldIdLst>
         </p14:section>
-        <p14:section name="평가 설계" id="{abc32d3d-42b6-9f91-e0e8-af353992058a}">
+        <p14:section name="평가 설계" id="{9e0d93fd-e760-c522-0813-ba07d52d880d}">
           <p14:sldIdLst>
             <p14:sldId id="262"/>
           </p14:sldIdLst>
         </p14:section>
-        <p14:section name="Before/After" id="{76bf1d29-c937-5a3b-4109-1bffd1cedb7e}">
+        <p14:section name="Before/After" id="{b0c85e9a-774c-274b-903c-7c9a85423dc3}">
           <p14:sldIdLst>
             <p14:sldId id="263"/>
             <p14:sldId id="264"/>
@@ -158,22 +158,22 @@
             <p14:sldId id="267"/>
           </p14:sldIdLst>
         </p14:section>
-        <p14:section name="평가자 검증" id="{bb035e4a-58cc-985c-2eb9-910d0ee4970d}">
+        <p14:section name="평가자 검증" id="{43ea2c70-824e-26f5-612c-f1e3b31d0509}">
           <p14:sldIdLst>
             <p14:sldId id="268"/>
           </p14:sldIdLst>
         </p14:section>
-        <p14:section name="시연" id="{b6384401-c24d-11ae-18a0-a2db13f3a280}">
+        <p14:section name="시연" id="{e56fa438-bfe8-fb0b-cc69-fe9055246d98}">
           <p14:sldIdLst>
             <p14:sldId id="269"/>
           </p14:sldIdLst>
         </p14:section>
-        <p14:section name="한계" id="{575040a6-159c-a626-2dd4-8b8a6f31951c}">
+        <p14:section name="한계" id="{cb545b70-a16f-0a30-8879-ba583a6fe40f}">
           <p14:sldIdLst>
             <p14:sldId id="270"/>
           </p14:sldIdLst>
         </p14:section>
-        <p14:section name="마무리" id="{de75f089-9374-f663-ecb8-b233dd645d14}">
+        <p14:section name="마무리" id="{084adfbb-9db0-987b-08cd-d46433a35b83}">
           <p14:sldIdLst>
             <p14:sldId id="271"/>
           </p14:sldIdLst>
@@ -8937,7 +8937,7 @@
                   <a:schemeClr val="tx1"/>
                 </a:solidFill>
               </a:rPr>
-              <a:t>route·plan·임베딩만 캐시. 이 단계는 비용의 약 8%라 비용 효과는 작다. 모니터링·답변은 캐시하지 않음.</a:t>
+              <a:t>route·plan·임베딩만 캐시 (final 비용의 19%). 2회차 비용 $0.0272 → $0.0233. 모니터링·답변은 캐시하지 않음.</a:t>
             </a:r>
             <a:endParaRPr lang="en-US" sz="1400" dirty="0"/>
           </a:p>

--- a/deck/incident-agent-ablation.pptx
+++ b/deck/incident-agent-ablation.pptx
@@ -122,34 +122,34 @@
   <p:extLst>
     <p:ext uri="{521415D9-36F7-43E2-AB2F-B90AF26B5E84}">
       <p14:sectionLst xmlns:p14="http://schemas.microsoft.com/office/powerpoint/2010/main">
-        <p14:section name="표지" id="{eb3c290c-79c3-2e5a-7dbc-93fc9cb45568}">
+        <p14:section name="표지" id="{8078e257-acb0-2f09-42d3-b4421168a416}">
           <p14:sldIdLst>
             <p14:sldId id="256"/>
           </p14:sldIdLst>
         </p14:section>
-        <p14:section name="요약" id="{7dfe0583-77fd-0abf-749b-87709ff8cd8f}">
+        <p14:section name="요약" id="{e07c5b47-3f68-cf51-a8b8-9fac908e5a85}">
           <p14:sldIdLst>
             <p14:sldId id="257"/>
           </p14:sldIdLst>
         </p14:section>
-        <p14:section name="문제" id="{52bc9e6d-77c4-ba47-daa0-ab1f678ea901}">
+        <p14:section name="문제" id="{133d0be2-aa54-c7c4-dcf9-f467a3b87e2f}">
           <p14:sldIdLst>
             <p14:sldId id="258"/>
             <p14:sldId id="259"/>
             <p14:sldId id="260"/>
           </p14:sldIdLst>
         </p14:section>
-        <p14:section name="개선" id="{ba9c7fdc-be71-f82f-139e-c50a51b26219}">
+        <p14:section name="개선" id="{8ba578aa-fe49-0543-2538-5c67d03b9db0}">
           <p14:sldIdLst>
             <p14:sldId id="261"/>
           </p14:sldIdLst>
         </p14:section>
-        <p14:section name="평가 설계" id="{9e0d93fd-e760-c522-0813-ba07d52d880d}">
+        <p14:section name="평가 설계" id="{343ef3d7-1544-6f7c-5023-8537db6abcb9}">
           <p14:sldIdLst>
             <p14:sldId id="262"/>
           </p14:sldIdLst>
         </p14:section>
-        <p14:section name="Before/After" id="{b0c85e9a-774c-274b-903c-7c9a85423dc3}">
+        <p14:section name="Before/After" id="{2c15968b-7029-c279-2111-a7e6cd62f051}">
           <p14:sldIdLst>
             <p14:sldId id="263"/>
             <p14:sldId id="264"/>
@@ -158,22 +158,22 @@
             <p14:sldId id="267"/>
           </p14:sldIdLst>
         </p14:section>
-        <p14:section name="평가자 검증" id="{43ea2c70-824e-26f5-612c-f1e3b31d0509}">
+        <p14:section name="평가자 검증" id="{f47ac5a6-394a-6fb5-4cd9-4d5b324e9dea}">
           <p14:sldIdLst>
             <p14:sldId id="268"/>
           </p14:sldIdLst>
         </p14:section>
-        <p14:section name="시연" id="{e56fa438-bfe8-fb0b-cc69-fe9055246d98}">
+        <p14:section name="시연" id="{3379d332-cc7e-a759-4fd4-b5a0e64744cd}">
           <p14:sldIdLst>
             <p14:sldId id="269"/>
           </p14:sldIdLst>
         </p14:section>
-        <p14:section name="한계" id="{cb545b70-a16f-0a30-8879-ba583a6fe40f}">
+        <p14:section name="한계" id="{2b3e6d85-78fb-0120-81f7-f21a89daac52}">
           <p14:sldIdLst>
             <p14:sldId id="270"/>
           </p14:sldIdLst>
         </p14:section>
-        <p14:section name="마무리" id="{084adfbb-9db0-987b-08cd-d46433a35b83}">
+        <p14:section name="마무리" id="{91cea643-54f1-5582-026d-296fdda82e66}">
           <p14:sldIdLst>
             <p14:sldId id="271"/>
           </p14:sldIdLst>
@@ -8973,7 +8973,7 @@
                   <a:schemeClr val="accent3"/>
                 </a:solidFill>
               </a:rPr>
-              <a:t>동시성·장애 주입은 공용 키 한도 소진 뒤 API 없이 측정 (results/concurrency_bench_simulated_latest.json · fault_bench_fake_latest.json). 캐시는 실제 API (cache_bench_latest.json)</a:t>
+              <a:t>동시성·장애 주입은 API 지출 한도 소진 뒤 API 없이 측정 (results/concurrency_bench_simulated_latest.json · fault_bench_fake_latest.json). 캐시는 실제 API (cache_bench_latest.json)</a:t>
             </a:r>
             <a:endParaRPr lang="en-US" sz="1050" dirty="0"/>
           </a:p>

--- a/deck/incident-agent-ablation.pptx
+++ b/deck/incident-agent-ablation.pptx
@@ -122,34 +122,34 @@
   <p:extLst>
     <p:ext uri="{521415D9-36F7-43E2-AB2F-B90AF26B5E84}">
       <p14:sectionLst xmlns:p14="http://schemas.microsoft.com/office/powerpoint/2010/main">
-        <p14:section name="표지" id="{8078e257-acb0-2f09-42d3-b4421168a416}">
+        <p14:section name="표지" id="{39f0d290-2746-e491-754e-46bd1c5f28c0}">
           <p14:sldIdLst>
             <p14:sldId id="256"/>
           </p14:sldIdLst>
         </p14:section>
-        <p14:section name="요약" id="{e07c5b47-3f68-cf51-a8b8-9fac908e5a85}">
+        <p14:section name="요약" id="{4fb4c3d9-c0d4-af46-f535-645fe62ecac4}">
           <p14:sldIdLst>
             <p14:sldId id="257"/>
           </p14:sldIdLst>
         </p14:section>
-        <p14:section name="문제" id="{133d0be2-aa54-c7c4-dcf9-f467a3b87e2f}">
+        <p14:section name="문제" id="{d263d991-5229-fae4-1d91-b2c17c5b1a1f}">
           <p14:sldIdLst>
             <p14:sldId id="258"/>
             <p14:sldId id="259"/>
             <p14:sldId id="260"/>
           </p14:sldIdLst>
         </p14:section>
-        <p14:section name="개선" id="{8ba578aa-fe49-0543-2538-5c67d03b9db0}">
+        <p14:section name="개선" id="{e4005159-baed-e4ad-bac9-aee7625a0758}">
           <p14:sldIdLst>
             <p14:sldId id="261"/>
           </p14:sldIdLst>
         </p14:section>
-        <p14:section name="평가 설계" id="{343ef3d7-1544-6f7c-5023-8537db6abcb9}">
+        <p14:section name="평가 설계" id="{8745e439-1d82-bc38-cfef-15cd532f66b5}">
           <p14:sldIdLst>
             <p14:sldId id="262"/>
           </p14:sldIdLst>
         </p14:section>
-        <p14:section name="Before/After" id="{2c15968b-7029-c279-2111-a7e6cd62f051}">
+        <p14:section name="Before/After" id="{66e9ccd1-906a-2a95-d2a9-0e98d8b8b959}">
           <p14:sldIdLst>
             <p14:sldId id="263"/>
             <p14:sldId id="264"/>
@@ -158,22 +158,22 @@
             <p14:sldId id="267"/>
           </p14:sldIdLst>
         </p14:section>
-        <p14:section name="평가자 검증" id="{f47ac5a6-394a-6fb5-4cd9-4d5b324e9dea}">
+        <p14:section name="평가자 검증" id="{dcf30ba7-ebdf-1b25-3e57-a1ea916f1028}">
           <p14:sldIdLst>
             <p14:sldId id="268"/>
           </p14:sldIdLst>
         </p14:section>
-        <p14:section name="시연" id="{3379d332-cc7e-a759-4fd4-b5a0e64744cd}">
+        <p14:section name="시연" id="{c550c466-1901-da9b-a19d-0f6d83a8d389}">
           <p14:sldIdLst>
             <p14:sldId id="269"/>
           </p14:sldIdLst>
         </p14:section>
-        <p14:section name="한계" id="{2b3e6d85-78fb-0120-81f7-f21a89daac52}">
+        <p14:section name="한계" id="{c9380120-79a9-4270-c09a-3a369fd61e96}">
           <p14:sldIdLst>
             <p14:sldId id="270"/>
           </p14:sldIdLst>
         </p14:section>
-        <p14:section name="마무리" id="{91cea643-54f1-5582-026d-296fdda82e66}">
+        <p14:section name="마무리" id="{2b019719-e693-802a-5c6c-2f0e9b20bdd2}">
           <p14:sldIdLst>
             <p14:sldId id="271"/>
           </p14:sldIdLst>
@@ -400,13 +400,13 @@
                   <c:v>0.08695652173913043</c:v>
                 </c:pt>
                 <c:pt idx="4">
-                  <c:v>0.08514492753623187</c:v>
+                  <c:v>0.08695652173913043</c:v>
                 </c:pt>
                 <c:pt idx="5">
                   <c:v>0.09842995169082125</c:v>
                 </c:pt>
                 <c:pt idx="6">
-                  <c:v>0.08514492753623187</c:v>
+                  <c:v>0.0857487922705314</c:v>
                 </c:pt>
               </c:numCache>
             </c:numRef>
@@ -760,13 +760,13 @@
                   <c:v>0.5862068965517241</c:v>
                 </c:pt>
                 <c:pt idx="4">
-                  <c:v>0.5764367816091953</c:v>
+                  <c:v>0.5862068965517241</c:v>
                 </c:pt>
                 <c:pt idx="5">
                   <c:v>0.3482758620689655</c:v>
                 </c:pt>
                 <c:pt idx="6">
-                  <c:v>0.3390804597701149</c:v>
+                  <c:v>0.35249042145593873</c:v>
                 </c:pt>
               </c:numCache>
             </c:numRef>
@@ -933,7 +933,7 @@
                 </a:solidFill>
                 <a:latin typeface="Arial"/>
               </a:rPr>
-              <a:t>동시 N건 처리 시간 (초) — 모의 LLM, 호출당 0.5초 동기 지연</a:t>
+              <a:t>동시 N건 처리에 걸린 시간 (초)</a:t>
             </a:r>
           </a:p>
         </c:rich>
@@ -1022,16 +1022,16 @@
                 <c:formatCode>General</c:formatCode>
                 <c:ptCount val="4"/>
                 <c:pt idx="0">
-                  <c:v>4.67237358399143</c:v>
+                  <c:v>7.3300546660029795</c:v>
                 </c:pt>
                 <c:pt idx="1">
-                  <c:v>9.704944583005272</c:v>
+                  <c:v>19.806008041996392</c:v>
                 </c:pt>
                 <c:pt idx="2">
-                  <c:v>14.82982220800477</c:v>
+                  <c:v>32.5987327920011</c:v>
                 </c:pt>
                 <c:pt idx="3">
-                  <c:v>19.930124874998</c:v>
+                  <c:v>62.78695033300028</c:v>
                 </c:pt>
               </c:numCache>
             </c:numRef>
@@ -1111,16 +1111,16 @@
                 <c:formatCode>General</c:formatCode>
                 <c:ptCount val="4"/>
                 <c:pt idx="0">
-                  <c:v>4.6389495830080705</c:v>
+                  <c:v>7.124661374997231</c:v>
                 </c:pt>
                 <c:pt idx="1">
-                  <c:v>4.754600499989465</c:v>
+                  <c:v>6.839099584001815</c:v>
                 </c:pt>
                 <c:pt idx="2">
-                  <c:v>4.675857917012763</c:v>
+                  <c:v>8.139553832996171</c:v>
                 </c:pt>
                 <c:pt idx="3">
-                  <c:v>4.699182333002682</c:v>
+                  <c:v>9.153589582987479</c:v>
                 </c:pt>
               </c:numCache>
             </c:numRef>
@@ -1491,13 +1491,13 @@
                   <c:v>0.9722222222222222</c:v>
                 </c:pt>
                 <c:pt idx="4">
-                  <c:v>0.9305555555555556</c:v>
+                  <c:v>0.9537037037037037</c:v>
                 </c:pt>
                 <c:pt idx="5">
                   <c:v>0.9907407407407408</c:v>
                 </c:pt>
                 <c:pt idx="6">
-                  <c:v>0.9861111111111112</c:v>
+                  <c:v>0.9814814814814815</c:v>
                 </c:pt>
               </c:numCache>
             </c:numRef>
@@ -2033,7 +2033,7 @@
           <a:p>
             <a:r>
               <a:rPr lang="en-US" dirty="0"/>
-              <a:t>개선을 많이 붙인 게 아니라, 어떤 개선이 실제로 효과였는지를 통계로 분리했고, 그 판정을 한 AI 평가자도 검증했습니다.</a:t>
+              <a:t>개선을 많이 붙인 게 아니라, 어떤 개선이 실제로 효과였는지를 통계로 분리했고, 채점한 AI 평가자가 얼마나 관대한지도 다른 평가자와 대조해 쟀습니다.</a:t>
             </a:r>
             <a:endParaRPr lang="en-US" dirty="0"/>
           </a:p>
@@ -4060,7 +4060,7 @@
                   <a:schemeClr val="bg1"/>
                 </a:solidFill>
               </a:rPr>
-              <a:t>개선 효과를 통계로 증명하고, 평가자까지 검증했다</a:t>
+              <a:t>개선 효과를 통계로 분리하고, AI 평가자의 관대함까지 쟀다</a:t>
             </a:r>
             <a:endParaRPr lang="en-US" sz="4000" dirty="0"/>
           </a:p>
@@ -6698,7 +6698,7 @@
                             <a:srgbClr val="1A2230"/>
                           </a:solidFill>
                         </a:rPr>
-                        <a:t>58%</a:t>
+                        <a:t>59%</a:t>
                       </a:r>
                       <a:endParaRPr lang="en-US" sz="1300" dirty="0"/>
                     </a:p>
@@ -6814,7 +6814,7 @@
                             <a:srgbClr val="1A2230"/>
                           </a:solidFill>
                         </a:rPr>
-                        <a:t>93%</a:t>
+                        <a:t>95%</a:t>
                       </a:r>
                       <a:endParaRPr lang="en-US" sz="1300" dirty="0"/>
                     </a:p>
@@ -6872,7 +6872,7 @@
                             <a:srgbClr val="1A2230"/>
                           </a:solidFill>
                         </a:rPr>
-                        <a:t>$0.00086</a:t>
+                        <a:t>$0.00093</a:t>
                       </a:r>
                       <a:endParaRPr lang="en-US" sz="1300" dirty="0"/>
                     </a:p>
@@ -6930,7 +6930,7 @@
                             <a:srgbClr val="1A2230"/>
                           </a:solidFill>
                         </a:rPr>
-                        <a:t>10.8초</a:t>
+                        <a:t>10.6초</a:t>
                       </a:r>
                       <a:endParaRPr lang="en-US" sz="1300" dirty="0"/>
                     </a:p>
@@ -6988,7 +6988,7 @@
                             <a:srgbClr val="1A2230"/>
                           </a:solidFill>
                         </a:rPr>
-                        <a:t>2.0</a:t>
+                        <a:t>2.3</a:t>
                       </a:r>
                       <a:endParaRPr lang="en-US" sz="1300" dirty="0"/>
                     </a:p>
@@ -7630,7 +7630,7 @@
                             <a:srgbClr val="1A2230"/>
                           </a:solidFill>
                         </a:rPr>
-                        <a:t>34%</a:t>
+                        <a:t>35%</a:t>
                       </a:r>
                       <a:endParaRPr lang="en-US" sz="1300" dirty="0"/>
                     </a:p>
@@ -7688,7 +7688,7 @@
                             <a:srgbClr val="1A2230"/>
                           </a:solidFill>
                         </a:rPr>
-                        <a:t>74%</a:t>
+                        <a:t>73%</a:t>
                       </a:r>
                       <a:endParaRPr lang="en-US" sz="1300" dirty="0"/>
                     </a:p>
@@ -7746,7 +7746,7 @@
                             <a:srgbClr val="1A2230"/>
                           </a:solidFill>
                         </a:rPr>
-                        <a:t>99%</a:t>
+                        <a:t>98%</a:t>
                       </a:r>
                       <a:endParaRPr lang="en-US" sz="1300" dirty="0"/>
                     </a:p>
@@ -7804,7 +7804,7 @@
                             <a:srgbClr val="1A2230"/>
                           </a:solidFill>
                         </a:rPr>
-                        <a:t>$0.00064</a:t>
+                        <a:t>$0.00057</a:t>
                       </a:r>
                       <a:endParaRPr lang="en-US" sz="1300" dirty="0"/>
                     </a:p>
@@ -7862,7 +7862,7 @@
                             <a:srgbClr val="1A2230"/>
                           </a:solidFill>
                         </a:rPr>
-                        <a:t>10.7초</a:t>
+                        <a:t>9.8초</a:t>
                       </a:r>
                       <a:endParaRPr lang="en-US" sz="1300" dirty="0"/>
                     </a:p>
@@ -7920,7 +7920,7 @@
                             <a:srgbClr val="1A2230"/>
                           </a:solidFill>
                         </a:rPr>
-                        <a:t>0.5</a:t>
+                        <a:t>0.0</a:t>
                       </a:r>
                       <a:endParaRPr lang="en-US" sz="1300" dirty="0"/>
                     </a:p>
@@ -8074,7 +8074,7 @@
                   <a:schemeClr val="accent3"/>
                 </a:solidFill>
               </a:rPr>
-              <a:t>holdout 36건, 3회 평균. 비용은 OpenAI 공개 단가 x 실측 토큰 추정치 (평가 Judge 제외). 지연은 7구성 동시 실행 부하에서 측정</a:t>
+              <a:t>holdout 36건, 3회 평균. 비용은 OpenAI 공개 단가 x 실측 토큰 추정치 (평가 Judge 제외). 지연: 5구성은 7프로세스 동시 부하, +비용·final은 캐시 버그 수정 뒤 2프로세스로 재측정 → 두 구성의 지연 차이엔 부하 차이가 섞였을 수 있음</a:t>
             </a:r>
             <a:endParaRPr lang="en-US" sz="1050" dirty="0"/>
           </a:p>
@@ -8281,7 +8281,7 @@
                   <a:schemeClr val="tx1"/>
                 </a:solidFill>
               </a:rPr>
-              <a:t>미등록 질의 평가 통과율</a:t>
+              <a:t>미등록 질의 평가 통과율 (4건 x 3회)</a:t>
             </a:r>
             <a:endParaRPr lang="en-US" sz="1350" dirty="0"/>
           </a:p>
@@ -8295,7 +8295,7 @@
                   <a:schemeClr val="tx1"/>
                 </a:solidFill>
               </a:rPr>
-              <a:t>'등록된 런북에 없다'를 밝히게 됨</a:t>
+              <a:t>전체 통과율 차이는 유의하지 않음</a:t>
             </a:r>
             <a:endParaRPr lang="en-US" sz="1350" dirty="0"/>
           </a:p>
@@ -8832,7 +8832,7 @@
                   <a:srgbClr val="8A94A3"/>
                 </a:solidFill>
               </a:rPr>
-              <a:t>장애를 맞은 질의 중 끝까지 답한 건수 (LLM 없이 코드 경로만 측정)</a:t>
+              <a:t>장애를 맞은 질의 중 끝까지 답한 건수</a:t>
             </a:r>
             <a:endParaRPr lang="en-US" sz="1400" dirty="0"/>
           </a:p>
@@ -8846,7 +8846,7 @@
                   <a:srgbClr val="155E4B"/>
                 </a:solidFill>
               </a:rPr>
-              <a:t>base 0/21 · 허용 끔 0/21 · final 21/21</a:t>
+              <a:t>base 0/19 · 허용 끔 0/18 · final 18/18</a:t>
             </a:r>
             <a:endParaRPr lang="en-US" sz="1400" dirty="0"/>
           </a:p>
@@ -8937,7 +8937,7 @@
                   <a:schemeClr val="tx1"/>
                 </a:solidFill>
               </a:rPr>
-              <a:t>route·plan·임베딩만 캐시 (final 비용의 19%). 2회차 비용 $0.0272 → $0.0233. 모니터링·답변은 캐시하지 않음.</a:t>
+              <a:t>route·plan·임베딩만 캐시 (final 비용의 21%). 2회차 비용 $0.0272 → $0.0233. 모니터링·답변은 캐시하지 않음.</a:t>
             </a:r>
             <a:endParaRPr lang="en-US" sz="1400" dirty="0"/>
           </a:p>
@@ -8973,7 +8973,7 @@
                   <a:schemeClr val="accent3"/>
                 </a:solidFill>
               </a:rPr>
-              <a:t>동시성·장애 주입은 API 지출 한도 소진 뒤 API 없이 측정 (results/concurrency_bench_simulated_latest.json · fault_bench_fake_latest.json). 캐시는 실제 API (cache_bench_latest.json)</a:t>
+              <a:t>동시성·장애 주입·캐시 모두 실제 API (results/concurrency_bench_latest.json · fault_bench_latest.json · cache_bench_latest.json). 동시성은 N마다 1회 측정</a:t>
             </a:r>
             <a:endParaRPr lang="en-US" sz="1050" dirty="0"/>
           </a:p>
@@ -10581,7 +10581,7 @@
                   <a:schemeClr val="accent3"/>
                 </a:solidFill>
               </a:rPr>
-              <a:t>평가 Judge vs 독립 평가자(Claude, Judge 판정을 가린 블라인드 채점) base 답변 60건. 사람 라벨이 아니다. * 독립 평가자가 Fail로 본 답을 Judge가 Pass로 준 비율. 사람 표본 검증은 진행 중.</a:t>
+              <a:t>평가 Judge vs 독립 평가자(Claude, Judge 판정을 가린 블라인드 채점) base 답변 60건. 사람 라벨이 아니다. * 독립 평가자가 Fail로 본 답을 Judge가 Pass로 준 비율. 사람 표본 라벨은 아직 없다.</a:t>
             </a:r>
             <a:endParaRPr lang="en-US" sz="1150" dirty="0"/>
           </a:p>
@@ -10617,7 +10617,7 @@
                   <a:schemeClr val="tx1"/>
                 </a:solidFill>
               </a:rPr>
-              <a:t>평가 Judge는 RAG 이후 97% 이상에서 포화돼 구성 차이를 잘 보지 못했다. 그래서 Judge 무관 지표(정답 누락·혼입, 런북 어구 포함)로 결론을 냈다.</a:t>
+              <a:t>평가 Judge는 RAG가 들어간 구성에서 95%~99%로 포화돼 구성 차이를 잘 보지 못했다. 그래서 Judge 무관 지표(정답 누락·혼입, 런북 어구 포함)로 결론을 냈다.</a:t>
             </a:r>
             <a:endParaRPr lang="en-US" sz="1350" dirty="0"/>
           </a:p>
@@ -11657,7 +11657,7 @@
                   <a:schemeClr val="tx1"/>
                 </a:solidFill>
               </a:rPr>
-              <a:t>final 혼입 34%. 1위 점수와 가까운 런북을 함께 넣는 규칙 때문</a:t>
+              <a:t>final 혼입 35%. 1위 점수와 가까운 런북을 함께 넣는 규칙 때문</a:t>
             </a:r>
             <a:endParaRPr lang="en-US" sz="1250" dirty="0"/>
           </a:p>
@@ -11853,7 +11853,7 @@
                   <a:schemeClr val="tx1"/>
                 </a:solidFill>
               </a:rPr>
-              <a:t>어구 포함 -5%p (유의하지 않음). 저가 초안이 런북 문구를 덜 인용</a:t>
+              <a:t>어구 포함 -5%p (유의하지 않음). 저가 초안이 런북 문구를 덜 인용하는 것으로 추정 (미검증)</a:t>
             </a:r>
             <a:endParaRPr lang="en-US" sz="1250" dirty="0"/>
           </a:p>
@@ -12484,7 +12484,7 @@
                   <a:schemeClr val="accent6"/>
                 </a:solidFill>
               </a:rPr>
-              <a:t>-81%</a:t>
+              <a:t>-84%</a:t>
             </a:r>
             <a:endParaRPr lang="en-US" sz="3600" dirty="0"/>
           </a:p>
@@ -12534,7 +12534,7 @@
                   <a:schemeClr val="tx1"/>
                 </a:solidFill>
               </a:rPr>
-              <a:t>$0.00343 → $0.00064</a:t>
+              <a:t>$0.00343 → $0.00057</a:t>
             </a:r>
             <a:endParaRPr lang="en-US" sz="1350" dirty="0"/>
           </a:p>
@@ -12597,7 +12597,7 @@
                   <a:schemeClr val="accent1"/>
                 </a:solidFill>
               </a:rPr>
-              <a:t>효과 없음</a:t>
+              <a:t>개선 미확인</a:t>
             </a:r>
             <a:endParaRPr lang="en-US" sz="3600" dirty="0"/>
           </a:p>
@@ -12633,7 +12633,7 @@
                   <a:schemeClr val="tx1"/>
                 </a:solidFill>
               </a:rPr>
-              <a:t>LLM Judge 단독: 품질 변화 유의하지 않음</a:t>
+              <a:t>LLM Judge 단독: 품질 향상 확인 안 됨</a:t>
             </a:r>
             <a:endParaRPr lang="en-US" sz="1350" dirty="0"/>
           </a:p>
@@ -12647,7 +12647,7 @@
                   <a:schemeClr val="tx1"/>
                 </a:solidFill>
               </a:rPr>
-              <a:t>지연만 +2.3초 (유의)</a:t>
+              <a:t>지연은 +2.3초 (유의)</a:t>
             </a:r>
             <a:endParaRPr lang="en-US" sz="1350" dirty="0"/>
           </a:p>
@@ -13303,7 +13303,7 @@
                   <a:schemeClr val="accent6"/>
                 </a:solidFill>
               </a:rPr>
-              <a:t>→ Judge-사람 일치도 (kappa) · Judge 무관 지표</a:t>
+              <a:t>→ 독립 평가자·사람 표본과의 일치도 (kappa) · Judge 무관 지표</a:t>
             </a:r>
             <a:endParaRPr lang="en-US" sz="1300" dirty="0"/>
           </a:p>
@@ -19040,7 +19040,7 @@
                   <a:schemeClr val="tx1"/>
                 </a:solidFill>
               </a:rPr>
-              <a:t>사람이 base 답변을 지표별로 블라인드 라벨</a:t>
+              <a:t>독립 평가자(Claude, LLM) 블라인드 60건 → 지표별 kappa, 오판 유형</a:t>
             </a:r>
             <a:endParaRPr lang="en-US" sz="1350" dirty="0"/>
           </a:p>
@@ -19054,7 +19054,7 @@
                   <a:schemeClr val="tx1"/>
                 </a:solidFill>
               </a:rPr>
-              <a:t>→ 지표별 kappa, 오판 유형</a:t>
+              <a:t>사람 표본 20건 라벨은 아직 없음</a:t>
             </a:r>
             <a:endParaRPr lang="en-US" sz="1350" dirty="0"/>
           </a:p>
@@ -19230,7 +19230,7 @@
                   <a:schemeClr val="accent3"/>
                 </a:solidFill>
               </a:rPr>
-              <a:t>holdout 장애 경로 질의, 3회 평균. Recall@1 33% → 52%, MRR 0.37 → 0.68. 누락 = 맞는 조치를 못 줄 위험, 혼입 = 잘못된 조치를 섞을 위험</a:t>
+              <a:t>holdout, 3회 평균. 누락·혼입은 장애 경로 질의 기준. Recall@1·MRR은 gold 있는 holdout 질의 전체 기준: 33% → 52%, MRR 0.37 → 0.68. 누락 = 맞는 조치를 못 줄 위험, 혼입 = 잘못된 조치를 섞을 위험</a:t>
             </a:r>
             <a:endParaRPr lang="en-US" sz="1050" dirty="0"/>
           </a:p>
@@ -21302,7 +21302,7 @@
                             <a:srgbClr val="1A2230"/>
                           </a:solidFill>
                         </a:rPr>
-                        <a:t>-4%p</a:t>
+                        <a:t>-2%p</a:t>
                       </a:r>
                       <a:endParaRPr lang="en-US" sz="1250" dirty="0"/>
                     </a:p>
@@ -21416,12 +21416,12 @@
                         <a:buNone/>
                       </a:pPr>
                       <a:r>
-                        <a:rPr lang="en-US" sz="1250" dirty="0">
+                        <a:rPr lang="en-US" sz="1250" b="1" dirty="0">
                           <a:solidFill>
                             <a:srgbClr val="1A2230"/>
                           </a:solidFill>
                         </a:rPr>
-                        <a:t>-0.1초</a:t>
+                        <a:t>-0.7초 ★</a:t>
                       </a:r>
                       <a:endParaRPr lang="en-US" sz="1250" dirty="0"/>
                     </a:p>
@@ -21463,6 +21463,9 @@
                       <a:headEnd type="none" w="med" len="med"/>
                       <a:tailEnd type="none" w="med" len="med"/>
                     </a:lnB>
+                    <a:solidFill>
+                      <a:srgbClr val="D7EFE6"/>
+                    </a:solidFill>
                   </a:tcPr>
                 </a:tc>
               </a:tr>
@@ -22008,7 +22011,7 @@
                             <a:srgbClr val="1A2230"/>
                           </a:solidFill>
                         </a:rPr>
-                        <a:t>+0%p</a:t>
+                        <a:t>+1%p</a:t>
                       </a:r>
                       <a:endParaRPr lang="en-US" sz="1250" dirty="0"/>
                     </a:p>
@@ -22066,7 +22069,7 @@
                             <a:srgbClr val="1A2230"/>
                           </a:solidFill>
                         </a:rPr>
-                        <a:t>+0%p</a:t>
+                        <a:t>-2%p</a:t>
                       </a:r>
                       <a:endParaRPr lang="en-US" sz="1250" dirty="0"/>
                     </a:p>
@@ -22124,7 +22127,7 @@
                             <a:srgbClr val="1A2230"/>
                           </a:solidFill>
                         </a:rPr>
-                        <a:t>0%p</a:t>
+                        <a:t>-1%p</a:t>
                       </a:r>
                       <a:endParaRPr lang="en-US" sz="1250" dirty="0"/>
                     </a:p>
@@ -22182,7 +22185,7 @@
                             <a:srgbClr val="1A2230"/>
                           </a:solidFill>
                         </a:rPr>
-                        <a:t>-0.0029 ★</a:t>
+                        <a:t>-0.0030 ★</a:t>
                       </a:r>
                       <a:endParaRPr lang="en-US" sz="1250" dirty="0"/>
                     </a:p>
@@ -22243,7 +22246,7 @@
                             <a:srgbClr val="1A2230"/>
                           </a:solidFill>
                         </a:rPr>
-                        <a:t>-0.4초 ★</a:t>
+                        <a:t>-0.9초 ★</a:t>
                       </a:r>
                       <a:endParaRPr lang="en-US" sz="1250" dirty="0"/>
                     </a:p>
@@ -22425,7 +22428,7 @@
                             <a:srgbClr val="1A2230"/>
                           </a:solidFill>
                         </a:rPr>
-                        <a:t>-30%p ★</a:t>
+                        <a:t>-29%p ★</a:t>
                       </a:r>
                       <a:endParaRPr lang="en-US" sz="1250" dirty="0"/>
                     </a:p>
@@ -22486,7 +22489,7 @@
                             <a:srgbClr val="1A2230"/>
                           </a:solidFill>
                         </a:rPr>
-                        <a:t>+31%p ★</a:t>
+                        <a:t>+30%p ★</a:t>
                       </a:r>
                       <a:endParaRPr lang="en-US" sz="1250" dirty="0"/>
                     </a:p>
@@ -22547,7 +22550,7 @@
                             <a:srgbClr val="1A2230"/>
                           </a:solidFill>
                         </a:rPr>
-                        <a:t>+22%p ★</a:t>
+                        <a:t>+21%p ★</a:t>
                       </a:r>
                       <a:endParaRPr lang="en-US" sz="1250" dirty="0"/>
                     </a:p>
@@ -22608,7 +22611,7 @@
                             <a:srgbClr val="1A2230"/>
                           </a:solidFill>
                         </a:rPr>
-                        <a:t>-0.0023 ★</a:t>
+                        <a:t>-0.0024 ★</a:t>
                       </a:r>
                       <a:endParaRPr lang="en-US" sz="1250" dirty="0"/>
                     </a:p>
@@ -22669,7 +22672,7 @@
                             <a:srgbClr val="1A2230"/>
                           </a:solidFill>
                         </a:rPr>
-                        <a:t>+1.8초 ★</a:t>
+                        <a:t>+1.4초 ★</a:t>
                       </a:r>
                       <a:endParaRPr lang="en-US" sz="1250" dirty="0"/>
                     </a:p>

--- a/deck/incident-agent-ablation.pptx
+++ b/deck/incident-agent-ablation.pptx
@@ -122,34 +122,34 @@
   <p:extLst>
     <p:ext uri="{521415D9-36F7-43E2-AB2F-B90AF26B5E84}">
       <p14:sectionLst xmlns:p14="http://schemas.microsoft.com/office/powerpoint/2010/main">
-        <p14:section name="표지" id="{39f0d290-2746-e491-754e-46bd1c5f28c0}">
+        <p14:section name="표지" id="{5e63ccc3-13df-48e7-e608-961e37690fa0}">
           <p14:sldIdLst>
             <p14:sldId id="256"/>
           </p14:sldIdLst>
         </p14:section>
-        <p14:section name="요약" id="{4fb4c3d9-c0d4-af46-f535-645fe62ecac4}">
+        <p14:section name="요약" id="{a2461d8d-ecb1-0e06-fd85-34b8f215a029}">
           <p14:sldIdLst>
             <p14:sldId id="257"/>
           </p14:sldIdLst>
         </p14:section>
-        <p14:section name="문제" id="{d263d991-5229-fae4-1d91-b2c17c5b1a1f}">
+        <p14:section name="문제" id="{8c42fbb7-b513-a976-b455-566e7ee79adc}">
           <p14:sldIdLst>
             <p14:sldId id="258"/>
             <p14:sldId id="259"/>
             <p14:sldId id="260"/>
           </p14:sldIdLst>
         </p14:section>
-        <p14:section name="개선" id="{e4005159-baed-e4ad-bac9-aee7625a0758}">
+        <p14:section name="개선" id="{e252e282-5193-04ec-2747-fadf238afcc6}">
           <p14:sldIdLst>
             <p14:sldId id="261"/>
           </p14:sldIdLst>
         </p14:section>
-        <p14:section name="평가 설계" id="{8745e439-1d82-bc38-cfef-15cd532f66b5}">
+        <p14:section name="평가 설계" id="{3e8de5e9-b33e-f6ba-15b5-0a549479c741}">
           <p14:sldIdLst>
             <p14:sldId id="262"/>
           </p14:sldIdLst>
         </p14:section>
-        <p14:section name="Before/After" id="{66e9ccd1-906a-2a95-d2a9-0e98d8b8b959}">
+        <p14:section name="Before/After" id="{0fa754ac-07d0-05ef-a773-9e7bd082b59b}">
           <p14:sldIdLst>
             <p14:sldId id="263"/>
             <p14:sldId id="264"/>
@@ -158,22 +158,22 @@
             <p14:sldId id="267"/>
           </p14:sldIdLst>
         </p14:section>
-        <p14:section name="평가자 검증" id="{dcf30ba7-ebdf-1b25-3e57-a1ea916f1028}">
+        <p14:section name="평가자 검증" id="{c915a1b7-dcff-27c7-4219-2760304d4e26}">
           <p14:sldIdLst>
             <p14:sldId id="268"/>
           </p14:sldIdLst>
         </p14:section>
-        <p14:section name="시연" id="{c550c466-1901-da9b-a19d-0f6d83a8d389}">
+        <p14:section name="시연" id="{10471334-641e-82b5-a4fb-609d075f5e78}">
           <p14:sldIdLst>
             <p14:sldId id="269"/>
           </p14:sldIdLst>
         </p14:section>
-        <p14:section name="한계" id="{c9380120-79a9-4270-c09a-3a369fd61e96}">
+        <p14:section name="한계" id="{ded026c8-01fd-a333-4a90-1d8abe8412a9}">
           <p14:sldIdLst>
             <p14:sldId id="270"/>
           </p14:sldIdLst>
         </p14:section>
-        <p14:section name="마무리" id="{2b019719-e693-802a-5c6c-2f0e9b20bdd2}">
+        <p14:section name="마무리" id="{95276be8-e356-bd91-1a4a-10267fad3118}">
           <p14:sldIdLst>
             <p14:sldId id="271"/>
           </p14:sldIdLst>
@@ -8937,7 +8937,7 @@
                   <a:schemeClr val="tx1"/>
                 </a:solidFill>
               </a:rPr>
-              <a:t>route·plan·임베딩만 캐시 (final 비용의 21%). 2회차 비용 $0.0272 → $0.0233. 모니터링·답변은 캐시하지 않음.</a:t>
+              <a:t>route·plan·임베딩만 캐시 (final 비용의 21%). 1회차 → 2회차 비용 $0.0272 → $0.0233. 모니터링·답변은 캐시하지 않음.</a:t>
             </a:r>
             <a:endParaRPr lang="en-US" sz="1400" dirty="0"/>
           </a:p>
@@ -11073,7 +11073,7 @@
                   <a:schemeClr val="accent2"/>
                 </a:solidFill>
               </a:rPr>
-              <a:t>정답</a:t>
+              <a:t>정답 포함</a:t>
             </a:r>
             <a:endParaRPr lang="en-US" sz="1600" dirty="0"/>
           </a:p>
@@ -11126,7 +11126,7 @@
                   <a:schemeClr val="tx1"/>
                 </a:solidFill>
               </a:rPr>
-              <a:t>db-down (+disk-full)</a:t>
+              <a:t>db-down (+disk-full 혼입)</a:t>
             </a:r>
             <a:endParaRPr lang="en-US" sz="1450" dirty="0"/>
           </a:p>
@@ -11657,7 +11657,7 @@
                   <a:schemeClr val="tx1"/>
                 </a:solidFill>
               </a:rPr>
-              <a:t>final 혼입 35%. 1위 점수와 가까운 런북을 함께 넣는 규칙 때문</a:t>
+              <a:t>final 혼입 35%. 1위와 점수가 가까운 런북을 함께 넣는 규칙, 맞는 런북이 없는 질문에도 런북이 들어가는 경우</a:t>
             </a:r>
             <a:endParaRPr lang="en-US" sz="1250" dirty="0"/>
           </a:p>
@@ -12231,7 +12231,7 @@
                   <a:schemeClr val="bg2"/>
                 </a:solidFill>
               </a:rPr>
-              <a:t>RAG가 조치 정확도를 올렸고, Judge는 기준을 잘못 세우면 비용만 늘렸으며, 캐스케이드로 장애 1건당 비용을 낮췄다. 모두 holdout에서, 반복과 짝지은 비교로 확인했다.</a:t>
+              <a:t>RAG가 조치 정확도를 올렸고, Judge는 품질 향상이 확인되지 않은 채 비용·지연만 늘렸으며, 캐스케이드로 장애 1건당 비용을 낮췄다. 모두 holdout에서, 반복과 짝지은 비교로 확인했다.</a:t>
             </a:r>
             <a:endParaRPr lang="en-US" sz="1800" dirty="0"/>
           </a:p>
@@ -12308,7 +12308,7 @@
                   <a:schemeClr val="tx2"/>
                 </a:solidFill>
               </a:rPr>
-              <a:t>결론: 조치 정확도는 RAG가, 비용은 캐스케이드가 만들었다</a:t>
+              <a:t>결론: 조치 정확도는 RAG가, 비용은 캐스케이드가 낮췄다</a:t>
             </a:r>
             <a:endParaRPr lang="en-US" sz="2800" dirty="0"/>
           </a:p>
@@ -12520,7 +12520,7 @@
                   <a:schemeClr val="tx1"/>
                 </a:solidFill>
               </a:rPr>
-              <a:t>장애 1건당 처리 비용</a:t>
+              <a:t>장애 1건당 처리 비용 $0.00343 → $0.00057</a:t>
             </a:r>
             <a:endParaRPr lang="en-US" sz="1350" dirty="0"/>
           </a:p>
@@ -12534,7 +12534,7 @@
                   <a:schemeClr val="tx1"/>
                 </a:solidFill>
               </a:rPr>
-              <a:t>$0.00343 → $0.00057</a:t>
+              <a:t>(캐스케이드만 켜면 -73%)</a:t>
             </a:r>
             <a:endParaRPr lang="en-US" sz="1350" dirty="0"/>
           </a:p>
@@ -13303,7 +13303,7 @@
                   <a:schemeClr val="accent6"/>
                 </a:solidFill>
               </a:rPr>
-              <a:t>→ 독립 평가자·사람 표본과의 일치도 (kappa) · Judge 무관 지표</a:t>
+              <a:t>→ 독립 평가자와의 일치도 (kappa, 사람 표본은 예정) · Judge 무관 지표</a:t>
             </a:r>
             <a:endParaRPr lang="en-US" sz="1300" dirty="0"/>
           </a:p>
@@ -22732,8 +22732,8 @@
         </p:nvSpPr>
         <p:spPr>
           <a:xfrm>
-            <a:off x="548640" y="5120640"/>
-            <a:ext cx="11064240" cy="548640"/>
+            <a:off x="548640" y="5074920"/>
+            <a:ext cx="11064240" cy="640080"/>
           </a:xfrm>
           <a:prstGeom prst="rect">
             <a:avLst/>
@@ -22749,14 +22749,14 @@
               <a:buNone/>
             </a:pPr>
             <a:r>
-              <a:rPr lang="en-US" sz="1250" dirty="0">
+              <a:rPr lang="en-US" sz="1150" dirty="0">
                 <a:solidFill>
                   <a:schemeClr val="tx1"/>
                 </a:solidFill>
               </a:rPr>
-              <a:t>★ = 95% 신뢰구간이 0을 포함하지 않음 (holdout 36건, 질의 단위 paired bootstrap 2,000회). 초록 = 좋아짐, 주황 = 나빠짐. 표시 없는 칸은 차이가 있다고 말할 수 없음.</a:t>
+              <a:t>★ = 95% 신뢰구간이 0을 포함하지 않음 (holdout 36건, 질의 단위 paired bootstrap 2,000회). 초록 = 좋아짐, 주황 = 나빠짐. 표시 없는 칸은 차이가 있다고 말할 수 없음. 캐스케이드·v2 위 비용·전체 행의 지연은 재측정 부하(2프로세스 vs 7프로세스) 차이가 섞였을 수 있음.</a:t>
             </a:r>
-            <a:endParaRPr lang="en-US" sz="1250" dirty="0"/>
+            <a:endParaRPr lang="en-US" sz="1150" dirty="0"/>
           </a:p>
         </p:txBody>
       </p:sp>

--- a/deck/incident-agent-ablation.pptx
+++ b/deck/incident-agent-ablation.pptx
@@ -122,34 +122,34 @@
   <p:extLst>
     <p:ext uri="{521415D9-36F7-43E2-AB2F-B90AF26B5E84}">
       <p14:sectionLst xmlns:p14="http://schemas.microsoft.com/office/powerpoint/2010/main">
-        <p14:section name="표지" id="{5e63ccc3-13df-48e7-e608-961e37690fa0}">
+        <p14:section name="표지" id="{c17eeb18-39e9-ed30-3763-be3d2fe43b50}">
           <p14:sldIdLst>
             <p14:sldId id="256"/>
           </p14:sldIdLst>
         </p14:section>
-        <p14:section name="요약" id="{a2461d8d-ecb1-0e06-fd85-34b8f215a029}">
+        <p14:section name="요약" id="{14e40750-734e-44a0-c3b3-2696b7f4f0c1}">
           <p14:sldIdLst>
             <p14:sldId id="257"/>
           </p14:sldIdLst>
         </p14:section>
-        <p14:section name="문제" id="{8c42fbb7-b513-a976-b455-566e7ee79adc}">
+        <p14:section name="문제" id="{f2d7dffe-f81b-bde9-bdae-20b868c8fef4}">
           <p14:sldIdLst>
             <p14:sldId id="258"/>
             <p14:sldId id="259"/>
             <p14:sldId id="260"/>
           </p14:sldIdLst>
         </p14:section>
-        <p14:section name="개선" id="{e252e282-5193-04ec-2747-fadf238afcc6}">
+        <p14:section name="개선" id="{ed736460-cf96-cfcf-efb4-89ee5e3377a0}">
           <p14:sldIdLst>
             <p14:sldId id="261"/>
           </p14:sldIdLst>
         </p14:section>
-        <p14:section name="평가 설계" id="{3e8de5e9-b33e-f6ba-15b5-0a549479c741}">
+        <p14:section name="평가 설계" id="{2e4aed98-bb52-c93c-917d-89f389bfc7b4}">
           <p14:sldIdLst>
             <p14:sldId id="262"/>
           </p14:sldIdLst>
         </p14:section>
-        <p14:section name="Before/After" id="{0fa754ac-07d0-05ef-a773-9e7bd082b59b}">
+        <p14:section name="Before/After" id="{1c3f7c36-6787-e44d-96ca-b2a1cd89e643}">
           <p14:sldIdLst>
             <p14:sldId id="263"/>
             <p14:sldId id="264"/>
@@ -158,22 +158,22 @@
             <p14:sldId id="267"/>
           </p14:sldIdLst>
         </p14:section>
-        <p14:section name="평가자 검증" id="{c915a1b7-dcff-27c7-4219-2760304d4e26}">
+        <p14:section name="평가자 검증" id="{30032802-7821-931f-2755-80663ede30f5}">
           <p14:sldIdLst>
             <p14:sldId id="268"/>
           </p14:sldIdLst>
         </p14:section>
-        <p14:section name="시연" id="{10471334-641e-82b5-a4fb-609d075f5e78}">
+        <p14:section name="시연" id="{56ec1e8d-a8a9-62b7-9bb2-36927e5aa1f7}">
           <p14:sldIdLst>
             <p14:sldId id="269"/>
           </p14:sldIdLst>
         </p14:section>
-        <p14:section name="한계" id="{ded026c8-01fd-a333-4a90-1d8abe8412a9}">
+        <p14:section name="한계" id="{ca51285a-c4a4-2ce1-d4be-405e55e8f6b9}">
           <p14:sldIdLst>
             <p14:sldId id="270"/>
           </p14:sldIdLst>
         </p14:section>
-        <p14:section name="마무리" id="{95276be8-e356-bd91-1a4a-10267fad3118}">
+        <p14:section name="마무리" id="{e6e69074-a172-a120-61d6-7b3411d50d8d}">
           <p14:sldIdLst>
             <p14:sldId id="271"/>
           </p14:sldIdLst>
@@ -11157,7 +11157,7 @@
                   <a:schemeClr val="tx1"/>
                 </a:solidFill>
               </a:rPr>
-              <a:t>커넥션 풀·리플리케이션 점검, failover 노드로 전환…</a:t>
+              <a:t>커넥션 풀 점검, 필요 시 failover 노드로 전환…</a:t>
             </a:r>
             <a:endParaRPr lang="en-US" sz="1450" dirty="0"/>
           </a:p>

--- a/deck/incident-agent-ablation.pptx
+++ b/deck/incident-agent-ablation.pptx
@@ -22,9 +22,10 @@
     <p:sldId id="270" r:id="rId16"/>
     <p:sldId id="271" r:id="rId17"/>
     <p:sldId id="272" r:id="rId18"/>
+    <p:sldId id="273" r:id="rId19"/>
   </p:sldIdLst>
   <p:notesMasterIdLst>
-    <p:notesMasterId r:id="rId19"/>
+    <p:notesMasterId r:id="rId20"/>
   </p:notesMasterIdLst>
   <p:sldSz cx="12192000" cy="6858000"/>
   <p:notesSz cx="6858000" cy="12192000"/>
@@ -123,61 +124,62 @@
   <p:extLst>
     <p:ext uri="{521415D9-36F7-43E2-AB2F-B90AF26B5E84}">
       <p14:sectionLst xmlns:p14="http://schemas.microsoft.com/office/powerpoint/2010/main">
-        <p14:section name="표지" id="{0ca7d6db-fdb8-bcd4-f044-2dfe218f7e7d}">
+        <p14:section name="표지" id="{dc8b99c6-d615-b7b0-0993-87ad23a3e87a}">
           <p14:sldIdLst>
             <p14:sldId id="256"/>
           </p14:sldIdLst>
         </p14:section>
-        <p14:section name="요약" id="{9adafa3c-f3cd-3044-e1dd-aaa6ff5db02d}">
+        <p14:section name="요약" id="{67fc83d8-f2c5-0466-3607-637fa2f68f2e}">
           <p14:sldIdLst>
             <p14:sldId id="257"/>
             <p14:sldId id="258"/>
+            <p14:sldId id="259"/>
           </p14:sldIdLst>
         </p14:section>
-        <p14:section name="문제" id="{99e2068b-bc77-d4c6-d18e-9851e7d81062}">
+        <p14:section name="문제" id="{0efcb65d-4533-99b4-be9a-925e55bd4925}">
           <p14:sldIdLst>
-            <p14:sldId id="259"/>
             <p14:sldId id="260"/>
             <p14:sldId id="261"/>
-          </p14:sldIdLst>
-        </p14:section>
-        <p14:section name="개선" id="{7ae72d53-17b1-2a87-0ab4-de496c65272f}">
-          <p14:sldIdLst>
             <p14:sldId id="262"/>
           </p14:sldIdLst>
         </p14:section>
-        <p14:section name="평가 설계" id="{89c76f3a-cb6f-e817-2ce5-2571ec1d857e}">
+        <p14:section name="개선" id="{93f01414-197f-87e9-a0d0-d7eb96d707a9}">
           <p14:sldIdLst>
             <p14:sldId id="263"/>
           </p14:sldIdLst>
         </p14:section>
-        <p14:section name="Before/After" id="{29ccccdf-61f8-fc02-b50a-73c802a2bf28}">
+        <p14:section name="평가 설계" id="{1761399b-bf95-5633-2a7e-a5f150e50ff5}">
           <p14:sldIdLst>
             <p14:sldId id="264"/>
+          </p14:sldIdLst>
+        </p14:section>
+        <p14:section name="Before/After" id="{edd76eb1-0797-af7b-55bd-154e8ca88ade}">
+          <p14:sldIdLst>
             <p14:sldId id="265"/>
             <p14:sldId id="266"/>
             <p14:sldId id="267"/>
             <p14:sldId id="268"/>
-          </p14:sldIdLst>
-        </p14:section>
-        <p14:section name="평가자 검증" id="{5c4d0fdb-fa7e-04b9-3581-29f9835d05fa}">
-          <p14:sldIdLst>
             <p14:sldId id="269"/>
           </p14:sldIdLst>
         </p14:section>
-        <p14:section name="시연" id="{91e61492-86e6-5381-c26d-32b2a5f584f9}">
+        <p14:section name="평가자 검증" id="{0dbd85c4-9735-533b-d517-6884f6cea659}">
           <p14:sldIdLst>
             <p14:sldId id="270"/>
           </p14:sldIdLst>
         </p14:section>
-        <p14:section name="한계" id="{b0da42d1-4cd1-97b9-b696-c86b27506e1b}">
+        <p14:section name="시연" id="{bd8061bc-ebd2-19e3-7d16-e6590ef11772}">
           <p14:sldIdLst>
             <p14:sldId id="271"/>
           </p14:sldIdLst>
         </p14:section>
-        <p14:section name="마무리" id="{bfa83e08-d88f-4e51-fc14-2609c97fb189}">
+        <p14:section name="한계" id="{851cde9e-a030-c9be-2ce2-e3e7aad1d28a}">
           <p14:sldIdLst>
             <p14:sldId id="272"/>
+          </p14:sldIdLst>
+        </p14:section>
+        <p14:section name="마무리" id="{2d233bde-8772-1ffc-6666-f30dca9ed79c}">
+          <p14:sldIdLst>
+            <p14:sldId id="273"/>
           </p14:sldIdLst>
         </p14:section>
       </p14:sectionLst>
@@ -2123,7 +2125,7 @@
           <a:p>
             <a:r>
               <a:rPr lang="en-US" dirty="0"/>
-              <a:t>이 표가 핵심입니다. RAG 행에 품질 별표가 몰려 있고, Judge 행에는 비용과 지연 별표만 있습니다.</a:t>
+              <a:t>왼쪽은 RAG를 켜는 순간 떨어지고, 오른쪽은 v2의 최소 유사도 기준을 켜는 순간 떨어집니다. 개선마다 고친 문제가 다릅니다.</a:t>
             </a:r>
             <a:endParaRPr lang="en-US" dirty="0"/>
           </a:p>
@@ -2211,7 +2213,7 @@
           <a:p>
             <a:r>
               <a:rPr lang="en-US" dirty="0"/>
-              <a:t/>
+              <a:t>이 표가 핵심입니다. RAG 행에 품질 별표가 몰려 있고, Judge 행에는 비용과 지연 별표만 있습니다.</a:t>
             </a:r>
             <a:endParaRPr lang="en-US" dirty="0"/>
           </a:p>
@@ -2387,7 +2389,7 @@
           <a:p>
             <a:r>
               <a:rPr lang="en-US" dirty="0"/>
-              <a:t>원본은 노드가 async여도 LLM 호출이 동기라 동시 요청이 줄을 섭니다. 도구 하나가 죽으면 질의 전체가 실패합니다. 둘 다 고쳤습니다.</a:t>
+              <a:t/>
             </a:r>
             <a:endParaRPr lang="en-US" dirty="0"/>
           </a:p>
@@ -2475,7 +2477,7 @@
           <a:p>
             <a:r>
               <a:rPr lang="en-US" dirty="0"/>
-              <a:t/>
+              <a:t>원본은 노드가 async여도 LLM 호출이 동기라 동시 요청이 줄을 섭니다. 도구 하나가 죽으면 질의 전체가 실패합니다. 둘 다 고쳤습니다.</a:t>
             </a:r>
             <a:endParaRPr lang="en-US" dirty="0"/>
           </a:p>
@@ -2781,6 +2783,94 @@
 </p:notes>
 </file>
 
+<file path=ppt/notesSlides/notesSlide18.xml><?xml version="1.0" encoding="utf-8"?>
+<p:notes xmlns:a="http://schemas.openxmlformats.org/drawingml/2006/main" xmlns:r="http://schemas.openxmlformats.org/officeDocument/2006/relationships" xmlns:p="http://schemas.openxmlformats.org/presentationml/2006/main">
+  <p:cSld>
+    <p:spTree>
+      <p:nvGrpSpPr>
+        <p:cNvPr id="1" name=""/>
+        <p:cNvGrpSpPr/>
+        <p:nvPr/>
+      </p:nvGrpSpPr>
+      <p:grpSpPr>
+        <a:xfrm>
+          <a:off x="0" y="0"/>
+          <a:ext cx="0" cy="0"/>
+          <a:chOff x="0" y="0"/>
+          <a:chExt cx="0" cy="0"/>
+        </a:xfrm>
+      </p:grpSpPr>
+      <p:sp>
+        <p:nvSpPr>
+          <p:cNvPr id="2" name="Slide Image Placeholder 1"/>
+          <p:cNvSpPr>
+            <a:spLocks noGrp="1" noRot="1" noChangeAspect="1"/>
+          </p:cNvSpPr>
+          <p:nvPr>
+            <p:ph type="sldImg"/>
+          </p:nvPr>
+        </p:nvSpPr>
+        <p:spPr/>
+      </p:sp>
+      <p:sp>
+        <p:nvSpPr>
+          <p:cNvPr id="3" name="Notes Placeholder 2"/>
+          <p:cNvSpPr>
+            <a:spLocks noGrp="1"/>
+          </p:cNvSpPr>
+          <p:nvPr>
+            <p:ph type="body" idx="1"/>
+          </p:nvPr>
+        </p:nvSpPr>
+        <p:spPr/>
+        <p:txBody>
+          <a:bodyPr/>
+          <a:lstStyle/>
+          <a:p>
+            <a:r>
+              <a:rPr lang="en-US" dirty="0"/>
+              <a:t/>
+            </a:r>
+            <a:endParaRPr lang="en-US" dirty="0"/>
+          </a:p>
+        </p:txBody>
+      </p:sp>
+      <p:sp>
+        <p:nvSpPr>
+          <p:cNvPr id="4" name="Slide Number Placeholder 3"/>
+          <p:cNvSpPr>
+            <a:spLocks noGrp="1"/>
+          </p:cNvSpPr>
+          <p:nvPr>
+            <p:ph type="sldNum" sz="quarter" idx="10"/>
+          </p:nvPr>
+        </p:nvSpPr>
+        <p:spPr/>
+        <p:txBody>
+          <a:bodyPr/>
+          <a:lstStyle/>
+          <a:p>
+            <a:fld id="{F7021451-1387-4CA6-816F-3879F97B5CBC}" type="slidenum">
+              <a:rPr lang="en-US"/>
+              <a:t>18</a:t>
+            </a:fld>
+            <a:endParaRPr lang="en-US"/>
+          </a:p>
+        </p:txBody>
+      </p:sp>
+    </p:spTree>
+    <p:extLst>
+      <p:ext uri="{BB962C8B-B14F-4D97-AF65-F5344CB8AC3E}">
+        <p14:creationId xmlns:p14="http://schemas.microsoft.com/office/powerpoint/2010/main" val="1024086991"/>
+      </p:ext>
+    </p:extLst>
+  </p:cSld>
+  <p:clrMapOvr>
+    <a:masterClrMapping/>
+  </p:clrMapOvr>
+</p:notes>
+</file>
+
 <file path=ppt/notesSlides/notesSlide2.xml><?xml version="1.0" encoding="utf-8"?>
 <p:notes xmlns:a="http://schemas.openxmlformats.org/drawingml/2006/main" xmlns:r="http://schemas.openxmlformats.org/officeDocument/2006/relationships" xmlns:p="http://schemas.openxmlformats.org/presentationml/2006/main">
   <p:cSld>
@@ -2915,7 +3005,7 @@
           <a:p>
             <a:r>
               <a:rPr lang="en-US" dirty="0"/>
-              <a:t>세 숫자가 결론입니다. 그리고 이 숫자를 어떻게 믿을 수 있는지가 이 발표의 나머지입니다.</a:t>
+              <a:t>시장은 이미 AI SRE로 가고 있고 구조도 우리와 같습니다. 그런데 공개된 수치는 대부분 업체 주장이고, 효과를 부품별로 잰 공개 사례는 찾지 못했습니다. 이 과제는 그 빈칸을 채웠습니다.</a:t>
             </a:r>
             <a:endParaRPr lang="en-US" dirty="0"/>
           </a:p>
@@ -3003,7 +3093,7 @@
           <a:p>
             <a:r>
               <a:rPr lang="en-US" dirty="0"/>
-              <a:t>SK AX가 고객사에 에이전트를 넣을 때 받는 질문 세 가지입니다. 이후 모든 지표는 이 세 질문에 대한 답입니다.</a:t>
+              <a:t>세 숫자가 결론입니다. 그리고 이 숫자를 어떻게 믿을 수 있는지가 이 발표의 나머지입니다.</a:t>
             </a:r>
             <a:endParaRPr lang="en-US" dirty="0"/>
           </a:p>
@@ -3091,7 +3181,7 @@
           <a:p>
             <a:r>
               <a:rPr lang="en-US" dirty="0"/>
-              <a:t>평가셋을 알림 문구와 같은 말로 묻는 질문과 자기 말로 묻는 질문으로 나눠 봤습니다. base는 자기 말로 물으면 거의 못 맞힙니다.</a:t>
+              <a:t>SK AX가 고객사에 에이전트를 넣을 때 받는 질문 세 가지입니다. 이후 모든 지표는 이 세 질문에 대한 답입니다.</a:t>
             </a:r>
             <a:endParaRPr lang="en-US" dirty="0"/>
           </a:p>
@@ -3179,7 +3269,7 @@
           <a:p>
             <a:r>
               <a:rPr lang="en-US" dirty="0"/>
-              <a:t/>
+              <a:t>평가셋을 알림 문구와 같은 말로 묻는 질문과 자기 말로 묻는 질문으로 나눠 봤습니다. base는 자기 말로 물으면 거의 못 맞힙니다.</a:t>
             </a:r>
             <a:endParaRPr lang="en-US" dirty="0"/>
           </a:p>
@@ -3355,7 +3445,7 @@
           <a:p>
             <a:r>
               <a:rPr lang="en-US" dirty="0"/>
-              <a:t>holdout은 개선 v2를 만들기 전에 커밋해 고정했습니다. 커밋 시각으로 증명됩니다.</a:t>
+              <a:t/>
             </a:r>
             <a:endParaRPr lang="en-US" dirty="0"/>
           </a:p>
@@ -3443,7 +3533,7 @@
           <a:p>
             <a:r>
               <a:rPr lang="en-US" dirty="0"/>
-              <a:t>왼쪽은 RAG를 켜는 순간 떨어지고, 오른쪽은 v2의 최소 유사도 기준을 켜는 순간 떨어집니다. 개선마다 고친 문제가 다릅니다.</a:t>
+              <a:t>holdout은 개선 v2를 만들기 전에 커밋해 고정했습니다. 커밋 시각으로 증명됩니다.</a:t>
             </a:r>
             <a:endParaRPr lang="en-US" dirty="0"/>
           </a:p>
@@ -4265,6 +4355,182 @@
                   <a:schemeClr val="tx2"/>
                 </a:solidFill>
               </a:rPr>
+              <a:t>Before/After 1: 누락은 RAG가, 무관 런북 혼입은 v2가 줄였다</a:t>
+            </a:r>
+            <a:endParaRPr lang="en-US" sz="2800" dirty="0"/>
+          </a:p>
+        </p:txBody>
+      </p:sp>
+      <p:graphicFrame>
+        <p:nvGraphicFramePr>
+          <p:cNvPr id="3" name="chart-miss" descr=""/>
+          <p:cNvGraphicFramePr/>
+          <p:nvPr/>
+        </p:nvGraphicFramePr>
+        <p:xfrm>
+          <a:off x="548640" y="1280160"/>
+          <a:ext cx="5486400" cy="4297680"/>
+        </p:xfrm>
+        <a:graphic xmlns:a="http://schemas.openxmlformats.org/drawingml/2006/main">
+          <a:graphicData uri="http://schemas.openxmlformats.org/drawingml/2006/chart">
+            <c:chart xmlns:c="http://schemas.openxmlformats.org/drawingml/2006/chart" r:id="rId1"/>
+          </a:graphicData>
+        </a:graphic>
+      </p:graphicFrame>
+      <p:graphicFrame>
+        <p:nvGraphicFramePr>
+          <p:cNvPr id="4" name="chart-wrong" descr=""/>
+          <p:cNvGraphicFramePr/>
+          <p:nvPr/>
+        </p:nvGraphicFramePr>
+        <p:xfrm>
+          <a:off x="6153912" y="1280160"/>
+          <a:ext cx="5486400" cy="4297680"/>
+        </p:xfrm>
+        <a:graphic xmlns:a="http://schemas.openxmlformats.org/drawingml/2006/main">
+          <a:graphicData uri="http://schemas.openxmlformats.org/drawingml/2006/chart">
+            <c:chart xmlns:c="http://schemas.openxmlformats.org/drawingml/2006/chart" r:id="rId2"/>
+          </a:graphicData>
+        </a:graphic>
+      </p:graphicFrame>
+      <p:sp>
+        <p:nvSpPr>
+          <p:cNvPr id="5" name="Text 1"/>
+          <p:cNvSpPr txBox="1"/>
+          <p:nvPr/>
+        </p:nvSpPr>
+        <p:spPr>
+          <a:xfrm>
+            <a:off x="548640" y="5715000"/>
+            <a:ext cx="11064240" cy="274320"/>
+          </a:xfrm>
+          <a:prstGeom prst="rect">
+            <a:avLst/>
+          </a:prstGeom>
+          <a:noFill/>
+          <a:ln/>
+        </p:spPr>
+        <p:txBody>
+          <a:bodyPr wrap="square" lIns="0" tIns="0" rIns="0" bIns="0" rtlCol="0" anchor="ctr"/>
+          <a:lstStyle/>
+          <a:p>
+            <a:pPr indent="0" marL="0">
+              <a:buNone/>
+            </a:pPr>
+            <a:r>
+              <a:rPr lang="en-US" sz="1050" dirty="0">
+                <a:solidFill>
+                  <a:schemeClr val="accent3"/>
+                </a:solidFill>
+              </a:rPr>
+              <a:t>holdout, 3회 평균. 누락·혼입은 장애 경로 질의 기준. Recall@1·MRR은 gold 있는 holdout 질의 전체 기준: 33% → 52%, MRR 0.37 → 0.68. 누락 = 맞는 조치를 못 줄 위험, 혼입 = 잘못된 조치를 섞을 위험</a:t>
+            </a:r>
+            <a:endParaRPr lang="en-US" sz="1050" dirty="0"/>
+          </a:p>
+        </p:txBody>
+      </p:sp>
+      <p:sp>
+        <p:nvSpPr>
+          <p:cNvPr id="25" name="Slide Number Placeholder 0"/>
+          <p:cNvSpPr>
+            <a:spLocks noGrp="1"/>
+          </p:cNvSpPr>
+          <p:nvPr>
+            <p:ph type="sldNum" sz="quarter" idx="4294967295"/>
+          </p:nvPr>
+        </p:nvSpPr>
+        <p:spPr>
+          <a:xfrm>
+            <a:off x="11155680" y="6400800"/>
+            <a:ext cx="457200" cy="274320"/>
+          </a:xfrm>
+          <a:prstGeom prst="rect">
+            <a:avLst/>
+          </a:prstGeom>
+          <a:extLst>
+            <a:ext uri="{C572A759-6A51-4108-AA02-DFA0A04FC94B}">
+              <ma14:wrappingTextBoxFlag xmlns:ma14="http://schemas.microsoft.com/office/mac/drawingml/2011/main" val="0"/>
+            </a:ext>
+          </a:extLst>
+        </p:spPr>
+        <p:txBody>
+          <a:bodyPr/>
+          <a:lstStyle>
+            <a:lvl1pPr>
+              <a:defRPr sz="1000">
+                <a:solidFill>
+                  <a:schemeClr val="accent3"/>
+                </a:solidFill>
+              </a:defRPr>
+            </a:lvl1pPr>
+          </a:lstStyle>
+          <a:p>
+            <a:pPr algn="r"/>
+            <a:fld id="{F7021451-1387-4CA6-816F-3879F97B5CBC}" type="slidenum">
+              <a:rPr b="0" lang="en-US"/>
+              <a:t>10</a:t>
+            </a:fld>
+            <a:endParaRPr lang="en-US"/>
+          </a:p>
+        </p:txBody>
+      </p:sp>
+    </p:spTree>
+  </p:cSld>
+  <p:clrMapOvr>
+    <a:masterClrMapping/>
+  </p:clrMapOvr>
+</p:sld>
+</file>
+
+<file path=ppt/slides/slide11.xml><?xml version="1.0" encoding="utf-8"?>
+<p:sld xmlns:a="http://schemas.openxmlformats.org/drawingml/2006/main" xmlns:r="http://schemas.openxmlformats.org/officeDocument/2006/relationships" xmlns:p="http://schemas.openxmlformats.org/presentationml/2006/main">
+  <p:cSld name="Slide 11">
+    <p:spTree>
+      <p:nvGrpSpPr>
+        <p:cNvPr id="1" name=""/>
+        <p:cNvGrpSpPr/>
+        <p:nvPr/>
+      </p:nvGrpSpPr>
+      <p:grpSpPr>
+        <a:xfrm>
+          <a:off x="0" y="0"/>
+          <a:ext cx="0" cy="0"/>
+          <a:chOff x="0" y="0"/>
+          <a:chExt cx="0" cy="0"/>
+        </a:xfrm>
+      </p:grpSpPr>
+      <p:sp>
+        <p:nvSpPr>
+          <p:cNvPr id="2" name="Text 0"/>
+          <p:cNvSpPr/>
+          <p:nvPr>
+            <p:ph idx="100" type="title" hasCustomPrompt="1"/>
+          </p:nvPr>
+        </p:nvSpPr>
+        <p:spPr>
+          <a:xfrm>
+            <a:off x="548640" y="320040"/>
+            <a:ext cx="11064240" cy="777240"/>
+          </a:xfrm>
+          <a:prstGeom prst="rect">
+            <a:avLst/>
+          </a:prstGeom>
+          <a:noFill/>
+          <a:ln/>
+        </p:spPr>
+        <p:txBody>
+          <a:bodyPr wrap="square" lIns="0" tIns="0" rIns="0" bIns="0" rtlCol="0" anchor="ctr"/>
+          <a:lstStyle/>
+          <a:p>
+            <a:pPr algn="l" indent="0" marL="0">
+              <a:buNone/>
+            </a:pPr>
+            <a:r>
+              <a:rPr lang="en-US" sz="2800" b="1" dirty="0">
+                <a:solidFill>
+                  <a:schemeClr val="tx2"/>
+                </a:solidFill>
+              </a:rPr>
               <a:t>Before/After 2: 개선별 기여도 — 같은 질의끼리 짝지어 비교했다</a:t>
             </a:r>
             <a:endParaRPr lang="en-US" sz="2800" dirty="0"/>
@@ -4273,7 +4539,7 @@
       </p:sp>
       <p:graphicFrame>
         <p:nvGraphicFramePr>
-          <p:cNvPr id="11" name="contrib-table"/>
+          <p:cNvPr id="12" name="contrib-table"/>
           <p:cNvGraphicFramePr>
             <a:graphicFrameLocks noGrp="1"/>
           </p:cNvGraphicFramePr>
@@ -7762,7 +8028,7 @@
             <a:pPr algn="r"/>
             <a:fld id="{F7021451-1387-4CA6-816F-3879F97B5CBC}" type="slidenum">
               <a:rPr b="0" lang="en-US"/>
-              <a:t>10</a:t>
+              <a:t>11</a:t>
             </a:fld>
             <a:endParaRPr lang="en-US"/>
           </a:p>
@@ -7776,9 +8042,9 @@
 </p:sld>
 </file>
 
-<file path=ppt/slides/slide11.xml><?xml version="1.0" encoding="utf-8"?>
+<file path=ppt/slides/slide12.xml><?xml version="1.0" encoding="utf-8"?>
 <p:sld xmlns:a="http://schemas.openxmlformats.org/drawingml/2006/main" xmlns:r="http://schemas.openxmlformats.org/officeDocument/2006/relationships" xmlns:p="http://schemas.openxmlformats.org/presentationml/2006/main">
-  <p:cSld name="Slide 11">
+  <p:cSld name="Slide 12">
     <p:spTree>
       <p:nvGrpSpPr>
         <p:cNvPr id="1" name=""/>
@@ -7833,7 +8099,7 @@
       </p:sp>
       <p:graphicFrame>
         <p:nvGraphicFramePr>
-          <p:cNvPr id="12" name="tradeoff-table"/>
+          <p:cNvPr id="13" name="tradeoff-table"/>
           <p:cNvGraphicFramePr>
             <a:graphicFrameLocks noGrp="1"/>
           </p:cNvGraphicFramePr>
@@ -11769,7 +12035,7 @@
             <a:pPr algn="r"/>
             <a:fld id="{F7021451-1387-4CA6-816F-3879F97B5CBC}" type="slidenum">
               <a:rPr b="0" lang="en-US"/>
-              <a:t>11</a:t>
+              <a:t>12</a:t>
             </a:fld>
             <a:endParaRPr lang="en-US"/>
           </a:p>
@@ -11783,9 +12049,9 @@
 </p:sld>
 </file>
 
-<file path=ppt/slides/slide12.xml><?xml version="1.0" encoding="utf-8"?>
+<file path=ppt/slides/slide13.xml><?xml version="1.0" encoding="utf-8"?>
 <p:sld xmlns:a="http://schemas.openxmlformats.org/drawingml/2006/main" xmlns:r="http://schemas.openxmlformats.org/officeDocument/2006/relationships" xmlns:p="http://schemas.openxmlformats.org/presentationml/2006/main">
-  <p:cSld name="Slide 12">
+  <p:cSld name="Slide 13">
     <p:spTree>
       <p:nvGrpSpPr>
         <p:cNvPr id="1" name=""/>
@@ -12326,7 +12592,7 @@
             <a:pPr algn="r"/>
             <a:fld id="{F7021451-1387-4CA6-816F-3879F97B5CBC}" type="slidenum">
               <a:rPr b="0" lang="en-US"/>
-              <a:t>12</a:t>
+              <a:t>13</a:t>
             </a:fld>
             <a:endParaRPr lang="en-US"/>
           </a:p>
@@ -12340,9 +12606,9 @@
 </p:sld>
 </file>
 
-<file path=ppt/slides/slide13.xml><?xml version="1.0" encoding="utf-8"?>
+<file path=ppt/slides/slide14.xml><?xml version="1.0" encoding="utf-8"?>
 <p:sld xmlns:a="http://schemas.openxmlformats.org/drawingml/2006/main" xmlns:r="http://schemas.openxmlformats.org/officeDocument/2006/relationships" xmlns:p="http://schemas.openxmlformats.org/presentationml/2006/main">
-  <p:cSld name="Slide 13">
+  <p:cSld name="Slide 14">
     <p:spTree>
       <p:nvGrpSpPr>
         <p:cNvPr id="1" name=""/>
@@ -12668,7 +12934,7 @@
             <a:pPr algn="r"/>
             <a:fld id="{F7021451-1387-4CA6-816F-3879F97B5CBC}" type="slidenum">
               <a:rPr b="0" lang="en-US"/>
-              <a:t>13</a:t>
+              <a:t>14</a:t>
             </a:fld>
             <a:endParaRPr lang="en-US"/>
           </a:p>
@@ -12682,9 +12948,9 @@
 </p:sld>
 </file>
 
-<file path=ppt/slides/slide14.xml><?xml version="1.0" encoding="utf-8"?>
+<file path=ppt/slides/slide15.xml><?xml version="1.0" encoding="utf-8"?>
 <p:sld xmlns:a="http://schemas.openxmlformats.org/drawingml/2006/main" xmlns:r="http://schemas.openxmlformats.org/officeDocument/2006/relationships" xmlns:p="http://schemas.openxmlformats.org/presentationml/2006/main">
-  <p:cSld name="Slide 14">
+  <p:cSld name="Slide 15">
     <p:spTree>
       <p:nvGrpSpPr>
         <p:cNvPr id="1" name=""/>
@@ -12755,7 +13021,7 @@
       </p:graphicFrame>
       <p:graphicFrame>
         <p:nvGraphicFramePr>
-          <p:cNvPr id="15" name="claude-kappa-table"/>
+          <p:cNvPr id="16" name="claude-kappa-table"/>
           <p:cNvGraphicFramePr>
             <a:graphicFrameLocks noGrp="1"/>
           </p:cNvGraphicFramePr>
@@ -14312,7 +14578,7 @@
             <a:pPr algn="r"/>
             <a:fld id="{F7021451-1387-4CA6-816F-3879F97B5CBC}" type="slidenum">
               <a:rPr b="0" lang="en-US"/>
-              <a:t>14</a:t>
+              <a:t>15</a:t>
             </a:fld>
             <a:endParaRPr lang="en-US"/>
           </a:p>
@@ -14326,9 +14592,9 @@
 </p:sld>
 </file>
 
-<file path=ppt/slides/slide15.xml><?xml version="1.0" encoding="utf-8"?>
+<file path=ppt/slides/slide16.xml><?xml version="1.0" encoding="utf-8"?>
 <p:sld xmlns:a="http://schemas.openxmlformats.org/drawingml/2006/main" xmlns:r="http://schemas.openxmlformats.org/officeDocument/2006/relationships" xmlns:p="http://schemas.openxmlformats.org/presentationml/2006/main">
-  <p:cSld name="Slide 15">
+  <p:cSld name="Slide 16">
     <p:spTree>
       <p:nvGrpSpPr>
         <p:cNvPr id="1" name=""/>
@@ -14888,7 +15154,7 @@
             <a:pPr algn="r"/>
             <a:fld id="{F7021451-1387-4CA6-816F-3879F97B5CBC}" type="slidenum">
               <a:rPr b="0" lang="en-US"/>
-              <a:t>15</a:t>
+              <a:t>16</a:t>
             </a:fld>
             <a:endParaRPr lang="en-US"/>
           </a:p>
@@ -14902,9 +15168,9 @@
 </p:sld>
 </file>
 
-<file path=ppt/slides/slide16.xml><?xml version="1.0" encoding="utf-8"?>
+<file path=ppt/slides/slide17.xml><?xml version="1.0" encoding="utf-8"?>
 <p:sld xmlns:a="http://schemas.openxmlformats.org/drawingml/2006/main" xmlns:r="http://schemas.openxmlformats.org/officeDocument/2006/relationships" xmlns:p="http://schemas.openxmlformats.org/presentationml/2006/main">
-  <p:cSld name="Slide 16">
+  <p:cSld name="Slide 17">
     <p:spTree>
       <p:nvGrpSpPr>
         <p:cNvPr id="1" name=""/>
@@ -15780,7 +16046,7 @@
             <a:pPr algn="r"/>
             <a:fld id="{F7021451-1387-4CA6-816F-3879F97B5CBC}" type="slidenum">
               <a:rPr b="0" lang="en-US"/>
-              <a:t>16</a:t>
+              <a:t>17</a:t>
             </a:fld>
             <a:endParaRPr lang="en-US"/>
           </a:p>
@@ -15794,9 +16060,9 @@
 </p:sld>
 </file>
 
-<file path=ppt/slides/slide17.xml><?xml version="1.0" encoding="utf-8"?>
+<file path=ppt/slides/slide18.xml><?xml version="1.0" encoding="utf-8"?>
 <p:sld xmlns:a="http://schemas.openxmlformats.org/drawingml/2006/main" xmlns:r="http://schemas.openxmlformats.org/officeDocument/2006/relationships" xmlns:p="http://schemas.openxmlformats.org/presentationml/2006/main">
-  <p:cSld name="Slide 17">
+  <p:cSld name="Slide 18">
     <p:spTree>
       <p:nvGrpSpPr>
         <p:cNvPr id="1" name=""/>
@@ -16150,7 +16416,7 @@
                   <a:schemeClr val="tx2"/>
                 </a:solidFill>
               </a:rPr>
-              <a:t>결론: 조치 정확도는 RAG가, 비용은 캐스케이드가 낮췄다</a:t>
+              <a:t>실태 현황: 시장은 AI SRE로 가는데, 효과를 잰 곳은 드물다</a:t>
             </a:r>
             <a:endParaRPr lang="en-US" sz="2800" dirty="0"/>
           </a:p>
@@ -16158,18 +16424,18 @@
       </p:sp>
       <p:sp>
         <p:nvSpPr>
-          <p:cNvPr id="3" name="stat-miss"/>
+          <p:cNvPr id="3" name="stat-outage"/>
           <p:cNvSpPr/>
           <p:nvPr/>
         </p:nvSpPr>
         <p:spPr>
           <a:xfrm>
-            <a:off x="548640" y="1371600"/>
-            <a:ext cx="3520440" cy="1828800"/>
+            <a:off x="548640" y="1280160"/>
+            <a:ext cx="3520440" cy="2103120"/>
           </a:xfrm>
           <a:prstGeom prst="roundRect">
             <a:avLst>
-              <a:gd name="adj" fmla="val 6000"/>
+              <a:gd name="adj" fmla="val 5217"/>
             </a:avLst>
           </a:prstGeom>
           <a:solidFill>
@@ -16191,7 +16457,7 @@
         </p:nvSpPr>
         <p:spPr>
           <a:xfrm>
-            <a:off x="822960" y="1572768"/>
+            <a:off x="822960" y="1481328"/>
             <a:ext cx="2971800" cy="868680"/>
           </a:xfrm>
           <a:prstGeom prst="rect">
@@ -16210,10 +16476,10 @@
             <a:r>
               <a:rPr lang="en-US" sz="3600" b="1" dirty="0">
                 <a:solidFill>
-                  <a:schemeClr val="accent2"/>
+                  <a:schemeClr val="accent1"/>
                 </a:solidFill>
               </a:rPr>
-              <a:t>56% → 9%</a:t>
+              <a:t>54%</a:t>
             </a:r>
             <a:endParaRPr lang="en-US" sz="3600" dirty="0"/>
           </a:p>
@@ -16227,8 +16493,8 @@
         </p:nvSpPr>
         <p:spPr>
           <a:xfrm>
-            <a:off x="822960" y="2468880"/>
-            <a:ext cx="2971800" cy="640080"/>
+            <a:off x="822960" y="2377440"/>
+            <a:ext cx="2971800" cy="914400"/>
           </a:xfrm>
           <a:prstGeom prst="rect">
             <a:avLst/>
@@ -16249,40 +16515,26 @@
                   <a:schemeClr val="tx1"/>
                 </a:solidFill>
               </a:rPr>
-              <a:t>정답 런북 누락률 (base → final)</a:t>
+              <a:t>최근 중대 장애 비용이 10만 달러를 넘었다는 응답 (Uptime Institute 2025). 절차 미준수 장애도 늘었다</a:t>
             </a:r>
             <a:endParaRPr lang="en-US" sz="1350" dirty="0"/>
           </a:p>
-          <a:p>
-            <a:pPr indent="0" marL="0">
-              <a:buNone/>
-            </a:pPr>
-            <a:r>
-              <a:rPr lang="en-US" sz="1350" dirty="0">
-                <a:solidFill>
-                  <a:schemeClr val="tx1"/>
-                </a:solidFill>
-              </a:rPr>
-              <a:t>= 맞는 조치를 권고하지 못할 위험</a:t>
-            </a:r>
-            <a:endParaRPr lang="en-US" sz="1350" dirty="0"/>
-          </a:p>
         </p:txBody>
       </p:sp>
       <p:sp>
         <p:nvSpPr>
-          <p:cNvPr id="6" name="stat-cost"/>
+          <p:cNvPr id="6" name="stat-market"/>
           <p:cNvSpPr/>
           <p:nvPr/>
         </p:nvSpPr>
         <p:spPr>
           <a:xfrm>
-            <a:off x="4334256" y="1371600"/>
-            <a:ext cx="3520440" cy="1828800"/>
+            <a:off x="4334256" y="1280160"/>
+            <a:ext cx="3520440" cy="2103120"/>
           </a:xfrm>
           <a:prstGeom prst="roundRect">
             <a:avLst>
-              <a:gd name="adj" fmla="val 6000"/>
+              <a:gd name="adj" fmla="val 5217"/>
             </a:avLst>
           </a:prstGeom>
           <a:solidFill>
@@ -16304,7 +16556,7 @@
         </p:nvSpPr>
         <p:spPr>
           <a:xfrm>
-            <a:off x="4608576" y="1572768"/>
+            <a:off x="4608576" y="1481328"/>
             <a:ext cx="2971800" cy="868680"/>
           </a:xfrm>
           <a:prstGeom prst="rect">
@@ -16323,10 +16575,10 @@
             <a:r>
               <a:rPr lang="en-US" sz="3600" b="1" dirty="0">
                 <a:solidFill>
-                  <a:schemeClr val="accent6"/>
+                  <a:schemeClr val="accent2"/>
                 </a:solidFill>
               </a:rPr>
-              <a:t>-84%</a:t>
+              <a:t>5개</a:t>
             </a:r>
             <a:endParaRPr lang="en-US" sz="3600" dirty="0"/>
           </a:p>
@@ -16340,8 +16592,8 @@
         </p:nvSpPr>
         <p:spPr>
           <a:xfrm>
-            <a:off x="4608576" y="2468880"/>
-            <a:ext cx="2971800" cy="640080"/>
+            <a:off x="4608576" y="2377440"/>
+            <a:ext cx="2971800" cy="914400"/>
           </a:xfrm>
           <a:prstGeom prst="rect">
             <a:avLst/>
@@ -16362,40 +16614,26 @@
                   <a:schemeClr val="tx1"/>
                 </a:solidFill>
               </a:rPr>
-              <a:t>장애 1건당 처리 비용 $0.00343 → $0.00057</a:t>
+              <a:t>국외 정식 출시 AI SRE: PagerDuty·Datadog·Azure·AWS·Grafana. 국내도 SK AX·삼성계정·롯데ON·현대오토에버·GS리테일</a:t>
             </a:r>
             <a:endParaRPr lang="en-US" sz="1350" dirty="0"/>
           </a:p>
-          <a:p>
-            <a:pPr indent="0" marL="0">
-              <a:buNone/>
-            </a:pPr>
-            <a:r>
-              <a:rPr lang="en-US" sz="1350" dirty="0">
-                <a:solidFill>
-                  <a:schemeClr val="tx1"/>
-                </a:solidFill>
-              </a:rPr>
-              <a:t>(캐스케이드만 켜면 -73%)</a:t>
-            </a:r>
-            <a:endParaRPr lang="en-US" sz="1350" dirty="0"/>
-          </a:p>
         </p:txBody>
       </p:sp>
       <p:sp>
         <p:nvSpPr>
-          <p:cNvPr id="9" name="stat-judge"/>
+          <p:cNvPr id="9" name="stat-gap"/>
           <p:cNvSpPr/>
           <p:nvPr/>
         </p:nvSpPr>
         <p:spPr>
           <a:xfrm>
-            <a:off x="8119872" y="1371600"/>
-            <a:ext cx="3520440" cy="1828800"/>
+            <a:off x="8119872" y="1280160"/>
+            <a:ext cx="3520440" cy="2103120"/>
           </a:xfrm>
           <a:prstGeom prst="roundRect">
             <a:avLst>
-              <a:gd name="adj" fmla="val 6000"/>
+              <a:gd name="adj" fmla="val 5217"/>
             </a:avLst>
           </a:prstGeom>
           <a:solidFill>
@@ -16417,7 +16655,7 @@
         </p:nvSpPr>
         <p:spPr>
           <a:xfrm>
-            <a:off x="8394192" y="1572768"/>
+            <a:off x="8394192" y="1481328"/>
             <a:ext cx="2971800" cy="868680"/>
           </a:xfrm>
           <a:prstGeom prst="rect">
@@ -16436,10 +16674,10 @@
             <a:r>
               <a:rPr lang="en-US" sz="3600" b="1" dirty="0">
                 <a:solidFill>
-                  <a:schemeClr val="accent1"/>
+                  <a:schemeClr val="accent6"/>
                 </a:solidFill>
               </a:rPr>
-              <a:t>개선 미확인</a:t>
+              <a:t>0건</a:t>
             </a:r>
             <a:endParaRPr lang="en-US" sz="3600" dirty="0"/>
           </a:p>
@@ -16453,8 +16691,8 @@
         </p:nvSpPr>
         <p:spPr>
           <a:xfrm>
-            <a:off x="8394192" y="2468880"/>
-            <a:ext cx="2971800" cy="640080"/>
+            <a:off x="8394192" y="2377440"/>
+            <a:ext cx="2971800" cy="914400"/>
           </a:xfrm>
           <a:prstGeom prst="rect">
             <a:avLst/>
@@ -16475,40 +16713,26 @@
                   <a:schemeClr val="tx1"/>
                 </a:solidFill>
               </a:rPr>
-              <a:t>LLM Judge 단독: 품질 향상 확인 안 됨</a:t>
+              <a:t>조사 범위의 국내 공개 사례 중 고정 평가셋·Ablation 공개. 국외 수치도 대부분 '최대 몇 %' 업체 주장</a:t>
             </a:r>
             <a:endParaRPr lang="en-US" sz="1350" dirty="0"/>
           </a:p>
-          <a:p>
-            <a:pPr indent="0" marL="0">
-              <a:buNone/>
-            </a:pPr>
-            <a:r>
-              <a:rPr lang="en-US" sz="1350" dirty="0">
-                <a:solidFill>
-                  <a:schemeClr val="tx1"/>
-                </a:solidFill>
-              </a:rPr>
-              <a:t>지연은 +2.3초 (유의)</a:t>
-            </a:r>
-            <a:endParaRPr lang="en-US" sz="1350" dirty="0"/>
-          </a:p>
         </p:txBody>
       </p:sp>
       <p:sp>
         <p:nvSpPr>
-          <p:cNvPr id="12" name="method"/>
+          <p:cNvPr id="12" name="landscape-evidence"/>
           <p:cNvSpPr/>
           <p:nvPr/>
         </p:nvSpPr>
         <p:spPr>
           <a:xfrm>
-            <a:off x="548640" y="3520440"/>
-            <a:ext cx="11064240" cy="1783080"/>
+            <a:off x="548640" y="3611880"/>
+            <a:ext cx="11064240" cy="2148840"/>
           </a:xfrm>
           <a:prstGeom prst="roundRect">
             <a:avLst>
-              <a:gd name="adj" fmla="val 6154"/>
+              <a:gd name="adj" fmla="val 5106"/>
             </a:avLst>
           </a:prstGeom>
           <a:solidFill>
@@ -16530,8 +16754,8 @@
         </p:nvSpPr>
         <p:spPr>
           <a:xfrm>
-            <a:off x="822960" y="3657600"/>
-            <a:ext cx="10515600" cy="1600200"/>
+            <a:off x="822960" y="3749040"/>
+            <a:ext cx="10515600" cy="1920240"/>
           </a:xfrm>
           <a:prstGeom prst="rect">
             <a:avLst/>
@@ -16545,73 +16769,73 @@
           <a:p>
             <a:pPr indent="0" marL="0">
               <a:spcAft>
-                <a:spcPts val="500"/>
+                <a:spcPts val="400"/>
               </a:spcAft>
               <a:buNone/>
             </a:pPr>
             <a:r>
-              <a:rPr lang="en-US" sz="1600" b="1" dirty="0">
+              <a:rPr lang="en-US" sz="1400" b="1" dirty="0">
                 <a:solidFill>
-                  <a:srgbClr val="16202C"/>
+                  <a:schemeClr val="tx1"/>
                 </a:solidFill>
               </a:rPr>
-              <a:t>어떻게 증명했나</a:t>
+              <a:t>현업 구조는 우리와 같다: 런북 근거 + MCP 도구 연동 + 조치 전 사람 승인</a:t>
             </a:r>
-            <a:endParaRPr lang="en-US" sz="1450" dirty="0"/>
+            <a:endParaRPr lang="en-US" sz="1400" dirty="0"/>
           </a:p>
           <a:p>
             <a:pPr marL="342900" indent="-342900">
               <a:spcAft>
-                <a:spcPts val="500"/>
+                <a:spcPts val="400"/>
               </a:spcAft>
               <a:buSzPct val="100000"/>
               <a:buChar char="•"/>
             </a:pPr>
             <a:r>
-              <a:rPr lang="en-US" sz="1450" dirty="0">
+              <a:rPr lang="en-US" sz="1400" dirty="0">
                 <a:solidFill>
                   <a:schemeClr val="tx1"/>
                 </a:solidFill>
               </a:rPr>
-              <a:t>평가셋 60건을 dev 24건(기준값 조정용)과 holdout 36건(조정 전에 고정, 최종 보고용)으로 나눴다. 이 덱의 수치는 모두 holdout.</a:t>
+              <a:t>Datadog: 기능 하나가 일부 조사는 개선하고 다른 조사는 나쁘게 만든 사례 공개 → 부품을 하나씩 켜고 끄며 재야 하는 이유</a:t>
             </a:r>
-            <a:endParaRPr lang="en-US" sz="1450" dirty="0"/>
+            <a:endParaRPr lang="en-US" sz="1400" dirty="0"/>
           </a:p>
           <a:p>
             <a:pPr marL="342900" indent="-342900">
               <a:spcAft>
-                <a:spcPts val="500"/>
+                <a:spcPts val="400"/>
               </a:spcAft>
               <a:buSzPct val="100000"/>
               <a:buChar char="•"/>
             </a:pPr>
             <a:r>
-              <a:rPr lang="en-US" sz="1450" dirty="0">
+              <a:rPr lang="en-US" sz="1400" dirty="0">
                 <a:solidFill>
                   <a:schemeClr val="tx1"/>
                 </a:solidFill>
               </a:rPr>
-              <a:t>개선을 하나씩 켠 7구성을 각 3회 반복하고, 구성 간 차이는 같은 질의끼리 짝지은 bootstrap 95% 신뢰구간으로 판정했다.</a:t>
+              <a:t>연구: SOP를 넣자 RCA 정확도 35.5% → 64.0% (Flow-of-Action, WWW'25) · 외부 피드백 없는 자기교정은 효과 없음 (Huang 외, ICLR'24)</a:t>
             </a:r>
-            <a:endParaRPr lang="en-US" sz="1450" dirty="0"/>
+            <a:endParaRPr lang="en-US" sz="1400" dirty="0"/>
           </a:p>
           <a:p>
             <a:pPr marL="342900" indent="-342900">
               <a:spcAft>
-                <a:spcPts val="500"/>
+                <a:spcPts val="400"/>
               </a:spcAft>
               <a:buSzPct val="100000"/>
               <a:buChar char="•"/>
             </a:pPr>
             <a:r>
-              <a:rPr lang="en-US" sz="1450" dirty="0">
+              <a:rPr lang="en-US" sz="1400" dirty="0">
                 <a:solidFill>
                   <a:schemeClr val="tx1"/>
                 </a:solidFill>
               </a:rPr>
-              <a:t>평가자(LLM Judge)가 관대할 수 있어, Judge와 무관한 결정적 지표(정답 런북 누락·혼입, 런북 어구 포함)로 결론을 냈다.</a:t>
+              <a:t>국내 연구: RCA 에이전트 실패 1위는 데이터 해석 환각 71.2% (오케스트로·한양대, ASPLOS'26 AIOps 워크숍)</a:t>
             </a:r>
-            <a:endParaRPr lang="en-US" sz="1450" dirty="0"/>
+            <a:endParaRPr lang="en-US" sz="1400" dirty="0"/>
           </a:p>
         </p:txBody>
       </p:sp>
@@ -16623,7 +16847,7 @@
         </p:nvSpPr>
         <p:spPr>
           <a:xfrm>
-            <a:off x="548640" y="6053328"/>
+            <a:off x="548640" y="5897880"/>
             <a:ext cx="11064240" cy="274320"/>
           </a:xfrm>
           <a:prstGeom prst="rect">
@@ -16645,7 +16869,7 @@
                   <a:schemeClr val="accent3"/>
                 </a:solidFill>
               </a:rPr>
-              <a:t>출처: results/*_latest.json (7구성 x 60건 x 3회 = 1,260회, 실행 오류 0), results/stats_holdout.json, eval/extra_metrics.py</a:t>
+              <a:t>출처 전체: docs/research/00_요약_실태현황.md (국외 18개 제품·국내 19건·논문 38건, 2026-10-22 확인, 업체 수치는 업체 주장)</a:t>
             </a:r>
             <a:endParaRPr lang="en-US" sz="1050" dirty="0"/>
           </a:p>
@@ -16753,7 +16977,7 @@
                   <a:schemeClr val="tx2"/>
                 </a:solidFill>
               </a:rPr>
-              <a:t>운영팀이 AI 에이전트 도입을 결정하려면 세 가지를 알아야 한다</a:t>
+              <a:t>결론: 조치 정확도는 RAG가, 비용은 캐스케이드가 낮췄다</a:t>
             </a:r>
             <a:endParaRPr lang="en-US" sz="2800" dirty="0"/>
           </a:p>
@@ -16761,18 +16985,18 @@
       </p:sp>
       <p:sp>
         <p:nvSpPr>
-          <p:cNvPr id="3" name="q3-0"/>
+          <p:cNvPr id="3" name="stat-miss"/>
           <p:cNvSpPr/>
           <p:nvPr/>
         </p:nvSpPr>
         <p:spPr>
           <a:xfrm>
             <a:off x="548640" y="1371600"/>
-            <a:ext cx="3520440" cy="3246120"/>
+            <a:ext cx="3520440" cy="1828800"/>
           </a:xfrm>
           <a:prstGeom prst="roundRect">
             <a:avLst>
-              <a:gd name="adj" fmla="val 3380"/>
+              <a:gd name="adj" fmla="val 6000"/>
             </a:avLst>
           </a:prstGeom>
           <a:solidFill>
@@ -16788,39 +17012,14 @@
       </p:sp>
       <p:sp>
         <p:nvSpPr>
-          <p:cNvPr id="4" name="q3-dot-0"/>
-          <p:cNvSpPr/>
+          <p:cNvPr id="4" name="Text 2"/>
+          <p:cNvSpPr txBox="1"/>
           <p:nvPr/>
         </p:nvSpPr>
         <p:spPr>
           <a:xfrm>
-            <a:off x="822960" y="1600200"/>
-            <a:ext cx="502920" cy="502920"/>
-          </a:xfrm>
-          <a:prstGeom prst="ellipse">
-            <a:avLst/>
-          </a:prstGeom>
-          <a:solidFill>
-            <a:schemeClr val="accent1"/>
-          </a:solidFill>
-          <a:ln w="12700">
-            <a:solidFill>
-              <a:schemeClr val="accent1"/>
-            </a:solidFill>
-            <a:prstDash val="solid"/>
-          </a:ln>
-        </p:spPr>
-      </p:sp>
-      <p:sp>
-        <p:nvSpPr>
-          <p:cNvPr id="5" name="Text 3"/>
-          <p:cNvSpPr txBox="1"/>
-          <p:nvPr/>
-        </p:nvSpPr>
-        <p:spPr>
-          <a:xfrm>
-            <a:off x="822960" y="1600200"/>
-            <a:ext cx="502920" cy="502920"/>
+            <a:off x="822960" y="1572768"/>
+            <a:ext cx="2971800" cy="868680"/>
           </a:xfrm>
           <a:prstGeom prst="rect">
             <a:avLst/>
@@ -16832,67 +17031,31 @@
           <a:bodyPr wrap="square" lIns="0" tIns="0" rIns="0" bIns="0" rtlCol="0" anchor="ctr"/>
           <a:lstStyle/>
           <a:p>
-            <a:pPr algn="ctr" indent="0" marL="0">
-              <a:buNone/>
-            </a:pPr>
-            <a:r>
-              <a:rPr lang="en-US" sz="1800" b="1" dirty="0">
-                <a:solidFill>
-                  <a:schemeClr val="bg1"/>
-                </a:solidFill>
-              </a:rPr>
-              <a:t>1</a:t>
-            </a:r>
-            <a:endParaRPr lang="en-US" sz="1800" dirty="0"/>
-          </a:p>
-        </p:txBody>
-      </p:sp>
-      <p:sp>
-        <p:nvSpPr>
-          <p:cNvPr id="6" name="Text 4"/>
-          <p:cNvSpPr txBox="1"/>
-          <p:nvPr/>
-        </p:nvSpPr>
-        <p:spPr>
-          <a:xfrm>
-            <a:off x="1463040" y="1600200"/>
-            <a:ext cx="2468880" cy="502920"/>
-          </a:xfrm>
-          <a:prstGeom prst="rect">
-            <a:avLst/>
-          </a:prstGeom>
-          <a:noFill/>
-          <a:ln/>
-        </p:spPr>
-        <p:txBody>
-          <a:bodyPr wrap="square" lIns="0" tIns="0" rIns="0" bIns="0" rtlCol="0" anchor="ctr"/>
-          <a:lstStyle/>
-          <a:p>
             <a:pPr indent="0" marL="0">
               <a:buNone/>
             </a:pPr>
             <a:r>
-              <a:rPr lang="en-US" sz="1700" b="1" dirty="0">
+              <a:rPr lang="en-US" sz="3600" b="1" dirty="0">
                 <a:solidFill>
-                  <a:schemeClr val="tx2"/>
+                  <a:schemeClr val="accent2"/>
                 </a:solidFill>
               </a:rPr>
-              <a:t>맞는 조치를 권고하나</a:t>
+              <a:t>56% → 9%</a:t>
             </a:r>
-            <a:endParaRPr lang="en-US" sz="1700" dirty="0"/>
+            <a:endParaRPr lang="en-US" sz="3600" dirty="0"/>
           </a:p>
         </p:txBody>
       </p:sp>
       <p:sp>
         <p:nvSpPr>
-          <p:cNvPr id="7" name="Text 5"/>
+          <p:cNvPr id="5" name="Text 3"/>
           <p:cNvSpPr txBox="1"/>
           <p:nvPr/>
         </p:nvSpPr>
         <p:spPr>
           <a:xfrm>
-            <a:off x="822960" y="2331720"/>
-            <a:ext cx="3017520" cy="1828800"/>
+            <a:off x="822960" y="2468880"/>
+            <a:ext cx="2971800" cy="640080"/>
           </a:xfrm>
           <a:prstGeom prst="rect">
             <a:avLst/>
@@ -16908,67 +17071,45 @@
               <a:buNone/>
             </a:pPr>
             <a:r>
-              <a:rPr lang="en-US" sz="1400" dirty="0">
+              <a:rPr lang="en-US" sz="1350" dirty="0">
                 <a:solidFill>
                   <a:schemeClr val="tx1"/>
                 </a:solidFill>
               </a:rPr>
-              <a:t>새벽 2시 당직자가 "DB 프라이머리가 죽었다"고 물었는데 응답 지연 절차를 주면, 그 답은 장애를 키운다.</a:t>
+              <a:t>정답 런북 누락률 (base → final)</a:t>
             </a:r>
-            <a:endParaRPr lang="en-US" sz="1400" dirty="0"/>
-          </a:p>
-        </p:txBody>
-      </p:sp>
-      <p:sp>
-        <p:nvSpPr>
-          <p:cNvPr id="8" name="Text 6"/>
-          <p:cNvSpPr txBox="1"/>
-          <p:nvPr/>
-        </p:nvSpPr>
-        <p:spPr>
-          <a:xfrm>
-            <a:off x="822960" y="3703320"/>
-            <a:ext cx="3017520" cy="822960"/>
-          </a:xfrm>
-          <a:prstGeom prst="rect">
-            <a:avLst/>
-          </a:prstGeom>
-          <a:noFill/>
-          <a:ln/>
-        </p:spPr>
-        <p:txBody>
-          <a:bodyPr wrap="square" lIns="0" tIns="0" rIns="0" bIns="0" rtlCol="0" anchor="t"/>
-          <a:lstStyle/>
+            <a:endParaRPr lang="en-US" sz="1350" dirty="0"/>
+          </a:p>
           <a:p>
             <a:pPr indent="0" marL="0">
               <a:buNone/>
             </a:pPr>
             <a:r>
-              <a:rPr lang="en-US" sz="1300" b="1" dirty="0">
+              <a:rPr lang="en-US" sz="1350" dirty="0">
                 <a:solidFill>
-                  <a:schemeClr val="accent6"/>
+                  <a:schemeClr val="tx1"/>
                 </a:solidFill>
               </a:rPr>
-              <a:t>→ 정답 런북 누락률 · 무관 런북 혼입률</a:t>
+              <a:t>= 맞는 조치를 권고하지 못할 위험</a:t>
             </a:r>
-            <a:endParaRPr lang="en-US" sz="1300" dirty="0"/>
+            <a:endParaRPr lang="en-US" sz="1350" dirty="0"/>
           </a:p>
         </p:txBody>
       </p:sp>
       <p:sp>
         <p:nvSpPr>
-          <p:cNvPr id="9" name="q3-1"/>
+          <p:cNvPr id="6" name="stat-cost"/>
           <p:cNvSpPr/>
           <p:nvPr/>
         </p:nvSpPr>
         <p:spPr>
           <a:xfrm>
             <a:off x="4334256" y="1371600"/>
-            <a:ext cx="3520440" cy="3246120"/>
+            <a:ext cx="3520440" cy="1828800"/>
           </a:xfrm>
           <a:prstGeom prst="roundRect">
             <a:avLst>
-              <a:gd name="adj" fmla="val 3380"/>
+              <a:gd name="adj" fmla="val 6000"/>
             </a:avLst>
           </a:prstGeom>
           <a:solidFill>
@@ -16984,39 +17125,14 @@
       </p:sp>
       <p:sp>
         <p:nvSpPr>
-          <p:cNvPr id="10" name="q3-dot-1"/>
-          <p:cNvSpPr/>
+          <p:cNvPr id="7" name="Text 5"/>
+          <p:cNvSpPr txBox="1"/>
           <p:nvPr/>
         </p:nvSpPr>
         <p:spPr>
           <a:xfrm>
-            <a:off x="4608576" y="1600200"/>
-            <a:ext cx="502920" cy="502920"/>
-          </a:xfrm>
-          <a:prstGeom prst="ellipse">
-            <a:avLst/>
-          </a:prstGeom>
-          <a:solidFill>
-            <a:schemeClr val="accent4"/>
-          </a:solidFill>
-          <a:ln w="12700">
-            <a:solidFill>
-              <a:schemeClr val="accent4"/>
-            </a:solidFill>
-            <a:prstDash val="solid"/>
-          </a:ln>
-        </p:spPr>
-      </p:sp>
-      <p:sp>
-        <p:nvSpPr>
-          <p:cNvPr id="11" name="Text 9"/>
-          <p:cNvSpPr txBox="1"/>
-          <p:nvPr/>
-        </p:nvSpPr>
-        <p:spPr>
-          <a:xfrm>
-            <a:off x="4608576" y="1600200"/>
-            <a:ext cx="502920" cy="502920"/>
+            <a:off x="4608576" y="1572768"/>
+            <a:ext cx="2971800" cy="868680"/>
           </a:xfrm>
           <a:prstGeom prst="rect">
             <a:avLst/>
@@ -17028,67 +17144,31 @@
           <a:bodyPr wrap="square" lIns="0" tIns="0" rIns="0" bIns="0" rtlCol="0" anchor="ctr"/>
           <a:lstStyle/>
           <a:p>
-            <a:pPr algn="ctr" indent="0" marL="0">
-              <a:buNone/>
-            </a:pPr>
-            <a:r>
-              <a:rPr lang="en-US" sz="1800" b="1" dirty="0">
-                <a:solidFill>
-                  <a:schemeClr val="bg1"/>
-                </a:solidFill>
-              </a:rPr>
-              <a:t>2</a:t>
-            </a:r>
-            <a:endParaRPr lang="en-US" sz="1800" dirty="0"/>
-          </a:p>
-        </p:txBody>
-      </p:sp>
-      <p:sp>
-        <p:nvSpPr>
-          <p:cNvPr id="12" name="Text 10"/>
-          <p:cNvSpPr txBox="1"/>
-          <p:nvPr/>
-        </p:nvSpPr>
-        <p:spPr>
-          <a:xfrm>
-            <a:off x="5248656" y="1600200"/>
-            <a:ext cx="2468880" cy="502920"/>
-          </a:xfrm>
-          <a:prstGeom prst="rect">
-            <a:avLst/>
-          </a:prstGeom>
-          <a:noFill/>
-          <a:ln/>
-        </p:spPr>
-        <p:txBody>
-          <a:bodyPr wrap="square" lIns="0" tIns="0" rIns="0" bIns="0" rtlCol="0" anchor="ctr"/>
-          <a:lstStyle/>
-          <a:p>
             <a:pPr indent="0" marL="0">
               <a:buNone/>
             </a:pPr>
             <a:r>
-              <a:rPr lang="en-US" sz="1700" b="1" dirty="0">
+              <a:rPr lang="en-US" sz="3600" b="1" dirty="0">
                 <a:solidFill>
-                  <a:schemeClr val="tx2"/>
+                  <a:schemeClr val="accent6"/>
                 </a:solidFill>
               </a:rPr>
-              <a:t>그 판정을 믿어도 되나</a:t>
+              <a:t>-84%</a:t>
             </a:r>
-            <a:endParaRPr lang="en-US" sz="1700" dirty="0"/>
+            <a:endParaRPr lang="en-US" sz="3600" dirty="0"/>
           </a:p>
         </p:txBody>
       </p:sp>
       <p:sp>
         <p:nvSpPr>
-          <p:cNvPr id="13" name="Text 11"/>
+          <p:cNvPr id="8" name="Text 6"/>
           <p:cNvSpPr txBox="1"/>
           <p:nvPr/>
         </p:nvSpPr>
         <p:spPr>
           <a:xfrm>
-            <a:off x="4608576" y="2331720"/>
-            <a:ext cx="3017520" cy="1828800"/>
+            <a:off x="4608576" y="2468880"/>
+            <a:ext cx="2971800" cy="640080"/>
           </a:xfrm>
           <a:prstGeom prst="rect">
             <a:avLst/>
@@ -17104,67 +17184,45 @@
               <a:buNone/>
             </a:pPr>
             <a:r>
-              <a:rPr lang="en-US" sz="1400" dirty="0">
+              <a:rPr lang="en-US" sz="1350" dirty="0">
                 <a:solidFill>
                   <a:schemeClr val="tx1"/>
                 </a:solidFill>
               </a:rPr>
-              <a:t>"AI가 채점했더니 97점"은 채점한 AI가 관대하면 의미가 없다. 평가자 자체를 검증해야 한다.</a:t>
+              <a:t>장애 1건당 처리 비용 $0.00343 → $0.00057</a:t>
             </a:r>
-            <a:endParaRPr lang="en-US" sz="1400" dirty="0"/>
-          </a:p>
-        </p:txBody>
-      </p:sp>
-      <p:sp>
-        <p:nvSpPr>
-          <p:cNvPr id="14" name="Text 12"/>
-          <p:cNvSpPr txBox="1"/>
-          <p:nvPr/>
-        </p:nvSpPr>
-        <p:spPr>
-          <a:xfrm>
-            <a:off x="4608576" y="3703320"/>
-            <a:ext cx="3017520" cy="822960"/>
-          </a:xfrm>
-          <a:prstGeom prst="rect">
-            <a:avLst/>
-          </a:prstGeom>
-          <a:noFill/>
-          <a:ln/>
-        </p:spPr>
-        <p:txBody>
-          <a:bodyPr wrap="square" lIns="0" tIns="0" rIns="0" bIns="0" rtlCol="0" anchor="t"/>
-          <a:lstStyle/>
+            <a:endParaRPr lang="en-US" sz="1350" dirty="0"/>
+          </a:p>
           <a:p>
             <a:pPr indent="0" marL="0">
               <a:buNone/>
             </a:pPr>
             <a:r>
-              <a:rPr lang="en-US" sz="1300" b="1" dirty="0">
+              <a:rPr lang="en-US" sz="1350" dirty="0">
                 <a:solidFill>
-                  <a:schemeClr val="accent6"/>
+                  <a:schemeClr val="tx1"/>
                 </a:solidFill>
               </a:rPr>
-              <a:t>→ 독립 평가자와의 일치도 (kappa, 사람 표본은 예정) · Judge 무관 지표</a:t>
+              <a:t>(캐스케이드만 켜면 -73%)</a:t>
             </a:r>
-            <a:endParaRPr lang="en-US" sz="1300" dirty="0"/>
+            <a:endParaRPr lang="en-US" sz="1350" dirty="0"/>
           </a:p>
         </p:txBody>
       </p:sp>
       <p:sp>
         <p:nvSpPr>
-          <p:cNvPr id="15" name="q3-2"/>
+          <p:cNvPr id="9" name="stat-judge"/>
           <p:cNvSpPr/>
           <p:nvPr/>
         </p:nvSpPr>
         <p:spPr>
           <a:xfrm>
             <a:off x="8119872" y="1371600"/>
-            <a:ext cx="3520440" cy="3246120"/>
+            <a:ext cx="3520440" cy="1828800"/>
           </a:xfrm>
           <a:prstGeom prst="roundRect">
             <a:avLst>
-              <a:gd name="adj" fmla="val 3380"/>
+              <a:gd name="adj" fmla="val 6000"/>
             </a:avLst>
           </a:prstGeom>
           <a:solidFill>
@@ -17180,39 +17238,14 @@
       </p:sp>
       <p:sp>
         <p:nvSpPr>
-          <p:cNvPr id="16" name="q3-dot-2"/>
-          <p:cNvSpPr/>
+          <p:cNvPr id="10" name="Text 8"/>
+          <p:cNvSpPr txBox="1"/>
           <p:nvPr/>
         </p:nvSpPr>
         <p:spPr>
           <a:xfrm>
-            <a:off x="8394192" y="1600200"/>
-            <a:ext cx="502920" cy="502920"/>
-          </a:xfrm>
-          <a:prstGeom prst="ellipse">
-            <a:avLst/>
-          </a:prstGeom>
-          <a:solidFill>
-            <a:schemeClr val="accent2"/>
-          </a:solidFill>
-          <a:ln w="12700">
-            <a:solidFill>
-              <a:schemeClr val="accent2"/>
-            </a:solidFill>
-            <a:prstDash val="solid"/>
-          </a:ln>
-        </p:spPr>
-      </p:sp>
-      <p:sp>
-        <p:nvSpPr>
-          <p:cNvPr id="17" name="Text 15"/>
-          <p:cNvSpPr txBox="1"/>
-          <p:nvPr/>
-        </p:nvSpPr>
-        <p:spPr>
-          <a:xfrm>
-            <a:off x="8394192" y="1600200"/>
-            <a:ext cx="502920" cy="502920"/>
+            <a:off x="8394192" y="1572768"/>
+            <a:ext cx="2971800" cy="868680"/>
           </a:xfrm>
           <a:prstGeom prst="rect">
             <a:avLst/>
@@ -17224,31 +17257,201 @@
           <a:bodyPr wrap="square" lIns="0" tIns="0" rIns="0" bIns="0" rtlCol="0" anchor="ctr"/>
           <a:lstStyle/>
           <a:p>
-            <a:pPr algn="ctr" indent="0" marL="0">
+            <a:pPr indent="0" marL="0">
               <a:buNone/>
             </a:pPr>
             <a:r>
-              <a:rPr lang="en-US" sz="1800" b="1" dirty="0">
+              <a:rPr lang="en-US" sz="3600" b="1" dirty="0">
                 <a:solidFill>
-                  <a:schemeClr val="bg1"/>
+                  <a:schemeClr val="accent1"/>
                 </a:solidFill>
               </a:rPr>
-              <a:t>3</a:t>
+              <a:t>개선 미확인</a:t>
             </a:r>
-            <a:endParaRPr lang="en-US" sz="1800" dirty="0"/>
+            <a:endParaRPr lang="en-US" sz="3600" dirty="0"/>
           </a:p>
         </p:txBody>
       </p:sp>
       <p:sp>
         <p:nvSpPr>
-          <p:cNvPr id="18" name="Text 16"/>
+          <p:cNvPr id="11" name="Text 9"/>
           <p:cNvSpPr txBox="1"/>
           <p:nvPr/>
         </p:nvSpPr>
         <p:spPr>
           <a:xfrm>
-            <a:off x="9034272" y="1600200"/>
-            <a:ext cx="2468880" cy="502920"/>
+            <a:off x="8394192" y="2468880"/>
+            <a:ext cx="2971800" cy="640080"/>
+          </a:xfrm>
+          <a:prstGeom prst="rect">
+            <a:avLst/>
+          </a:prstGeom>
+          <a:noFill/>
+          <a:ln/>
+        </p:spPr>
+        <p:txBody>
+          <a:bodyPr wrap="square" lIns="0" tIns="0" rIns="0" bIns="0" rtlCol="0" anchor="t"/>
+          <a:lstStyle/>
+          <a:p>
+            <a:pPr indent="0" marL="0">
+              <a:buNone/>
+            </a:pPr>
+            <a:r>
+              <a:rPr lang="en-US" sz="1350" dirty="0">
+                <a:solidFill>
+                  <a:schemeClr val="tx1"/>
+                </a:solidFill>
+              </a:rPr>
+              <a:t>LLM Judge 단독: 품질 향상 확인 안 됨</a:t>
+            </a:r>
+            <a:endParaRPr lang="en-US" sz="1350" dirty="0"/>
+          </a:p>
+          <a:p>
+            <a:pPr indent="0" marL="0">
+              <a:buNone/>
+            </a:pPr>
+            <a:r>
+              <a:rPr lang="en-US" sz="1350" dirty="0">
+                <a:solidFill>
+                  <a:schemeClr val="tx1"/>
+                </a:solidFill>
+              </a:rPr>
+              <a:t>지연은 +2.3초 (유의)</a:t>
+            </a:r>
+            <a:endParaRPr lang="en-US" sz="1350" dirty="0"/>
+          </a:p>
+        </p:txBody>
+      </p:sp>
+      <p:sp>
+        <p:nvSpPr>
+          <p:cNvPr id="12" name="method"/>
+          <p:cNvSpPr/>
+          <p:nvPr/>
+        </p:nvSpPr>
+        <p:spPr>
+          <a:xfrm>
+            <a:off x="548640" y="3520440"/>
+            <a:ext cx="11064240" cy="1783080"/>
+          </a:xfrm>
+          <a:prstGeom prst="roundRect">
+            <a:avLst>
+              <a:gd name="adj" fmla="val 6154"/>
+            </a:avLst>
+          </a:prstGeom>
+          <a:solidFill>
+            <a:schemeClr val="bg2"/>
+          </a:solidFill>
+          <a:ln w="12700">
+            <a:solidFill>
+              <a:schemeClr val="bg2"/>
+            </a:solidFill>
+            <a:prstDash val="solid"/>
+          </a:ln>
+        </p:spPr>
+      </p:sp>
+      <p:sp>
+        <p:nvSpPr>
+          <p:cNvPr id="13" name="Text 11"/>
+          <p:cNvSpPr txBox="1"/>
+          <p:nvPr/>
+        </p:nvSpPr>
+        <p:spPr>
+          <a:xfrm>
+            <a:off x="822960" y="3657600"/>
+            <a:ext cx="10515600" cy="1600200"/>
+          </a:xfrm>
+          <a:prstGeom prst="rect">
+            <a:avLst/>
+          </a:prstGeom>
+          <a:noFill/>
+          <a:ln/>
+        </p:spPr>
+        <p:txBody>
+          <a:bodyPr wrap="square" lIns="0" tIns="0" rIns="0" bIns="0" rtlCol="0" anchor="t"/>
+          <a:lstStyle/>
+          <a:p>
+            <a:pPr indent="0" marL="0">
+              <a:spcAft>
+                <a:spcPts val="500"/>
+              </a:spcAft>
+              <a:buNone/>
+            </a:pPr>
+            <a:r>
+              <a:rPr lang="en-US" sz="1600" b="1" dirty="0">
+                <a:solidFill>
+                  <a:srgbClr val="16202C"/>
+                </a:solidFill>
+              </a:rPr>
+              <a:t>어떻게 증명했나</a:t>
+            </a:r>
+            <a:endParaRPr lang="en-US" sz="1450" dirty="0"/>
+          </a:p>
+          <a:p>
+            <a:pPr marL="342900" indent="-342900">
+              <a:spcAft>
+                <a:spcPts val="500"/>
+              </a:spcAft>
+              <a:buSzPct val="100000"/>
+              <a:buChar char="•"/>
+            </a:pPr>
+            <a:r>
+              <a:rPr lang="en-US" sz="1450" dirty="0">
+                <a:solidFill>
+                  <a:schemeClr val="tx1"/>
+                </a:solidFill>
+              </a:rPr>
+              <a:t>평가셋 60건을 dev 24건(기준값 조정용)과 holdout 36건(조정 전에 고정, 최종 보고용)으로 나눴다. 이 덱의 수치는 모두 holdout.</a:t>
+            </a:r>
+            <a:endParaRPr lang="en-US" sz="1450" dirty="0"/>
+          </a:p>
+          <a:p>
+            <a:pPr marL="342900" indent="-342900">
+              <a:spcAft>
+                <a:spcPts val="500"/>
+              </a:spcAft>
+              <a:buSzPct val="100000"/>
+              <a:buChar char="•"/>
+            </a:pPr>
+            <a:r>
+              <a:rPr lang="en-US" sz="1450" dirty="0">
+                <a:solidFill>
+                  <a:schemeClr val="tx1"/>
+                </a:solidFill>
+              </a:rPr>
+              <a:t>개선을 하나씩 켠 7구성을 각 3회 반복하고, 구성 간 차이는 같은 질의끼리 짝지은 bootstrap 95% 신뢰구간으로 판정했다.</a:t>
+            </a:r>
+            <a:endParaRPr lang="en-US" sz="1450" dirty="0"/>
+          </a:p>
+          <a:p>
+            <a:pPr marL="342900" indent="-342900">
+              <a:spcAft>
+                <a:spcPts val="500"/>
+              </a:spcAft>
+              <a:buSzPct val="100000"/>
+              <a:buChar char="•"/>
+            </a:pPr>
+            <a:r>
+              <a:rPr lang="en-US" sz="1450" dirty="0">
+                <a:solidFill>
+                  <a:schemeClr val="tx1"/>
+                </a:solidFill>
+              </a:rPr>
+              <a:t>평가자(LLM Judge)가 관대할 수 있어, Judge와 무관한 결정적 지표(정답 런북 누락·혼입, 런북 어구 포함)로 결론을 냈다.</a:t>
+            </a:r>
+            <a:endParaRPr lang="en-US" sz="1450" dirty="0"/>
+          </a:p>
+        </p:txBody>
+      </p:sp>
+      <p:sp>
+        <p:nvSpPr>
+          <p:cNvPr id="14" name="Text 12"/>
+          <p:cNvSpPr txBox="1"/>
+          <p:nvPr/>
+        </p:nvSpPr>
+        <p:spPr>
+          <a:xfrm>
+            <a:off x="548640" y="6053328"/>
+            <a:ext cx="11064240" cy="274320"/>
           </a:xfrm>
           <a:prstGeom prst="rect">
             <a:avLst/>
@@ -17264,122 +17467,14 @@
               <a:buNone/>
             </a:pPr>
             <a:r>
-              <a:rPr lang="en-US" sz="1700" b="1" dirty="0">
+              <a:rPr lang="en-US" sz="1050" dirty="0">
                 <a:solidFill>
-                  <a:schemeClr val="tx2"/>
+                  <a:schemeClr val="accent3"/>
                 </a:solidFill>
               </a:rPr>
-              <a:t>얼마에, 얼마나 빨리</a:t>
+              <a:t>출처: results/*_latest.json (7구성 x 60건 x 3회 = 1,260회, 실행 오류 0), results/stats_holdout.json, eval/extra_metrics.py</a:t>
             </a:r>
-            <a:endParaRPr lang="en-US" sz="1700" dirty="0"/>
-          </a:p>
-        </p:txBody>
-      </p:sp>
-      <p:sp>
-        <p:nvSpPr>
-          <p:cNvPr id="19" name="Text 17"/>
-          <p:cNvSpPr txBox="1"/>
-          <p:nvPr/>
-        </p:nvSpPr>
-        <p:spPr>
-          <a:xfrm>
-            <a:off x="8394192" y="2331720"/>
-            <a:ext cx="3017520" cy="1828800"/>
-          </a:xfrm>
-          <a:prstGeom prst="rect">
-            <a:avLst/>
-          </a:prstGeom>
-          <a:noFill/>
-          <a:ln/>
-        </p:spPr>
-        <p:txBody>
-          <a:bodyPr wrap="square" lIns="0" tIns="0" rIns="0" bIns="0" rtlCol="0" anchor="t"/>
-          <a:lstStyle/>
-          <a:p>
-            <a:pPr indent="0" marL="0">
-              <a:buNone/>
-            </a:pPr>
-            <a:r>
-              <a:rPr lang="en-US" sz="1400" dirty="0">
-                <a:solidFill>
-                  <a:schemeClr val="tx1"/>
-                </a:solidFill>
-              </a:rPr>
-              <a:t>품질을 올린 대가로 비용과 지연이 얼마나 늘었는지, 장애가 겹쳐 들어오거나 도구가 죽어도 버티는지.</a:t>
-            </a:r>
-            <a:endParaRPr lang="en-US" sz="1400" dirty="0"/>
-          </a:p>
-        </p:txBody>
-      </p:sp>
-      <p:sp>
-        <p:nvSpPr>
-          <p:cNvPr id="20" name="Text 18"/>
-          <p:cNvSpPr txBox="1"/>
-          <p:nvPr/>
-        </p:nvSpPr>
-        <p:spPr>
-          <a:xfrm>
-            <a:off x="8394192" y="3703320"/>
-            <a:ext cx="3017520" cy="822960"/>
-          </a:xfrm>
-          <a:prstGeom prst="rect">
-            <a:avLst/>
-          </a:prstGeom>
-          <a:noFill/>
-          <a:ln/>
-        </p:spPr>
-        <p:txBody>
-          <a:bodyPr wrap="square" lIns="0" tIns="0" rIns="0" bIns="0" rtlCol="0" anchor="t"/>
-          <a:lstStyle/>
-          <a:p>
-            <a:pPr indent="0" marL="0">
-              <a:buNone/>
-            </a:pPr>
-            <a:r>
-              <a:rPr lang="en-US" sz="1300" b="1" dirty="0">
-                <a:solidFill>
-                  <a:schemeClr val="accent6"/>
-                </a:solidFill>
-              </a:rPr>
-              <a:t>→ 장애 1건당 비용 · p95 지연 · 동시 처리 · 장애 주입</a:t>
-            </a:r>
-            <a:endParaRPr lang="en-US" sz="1300" dirty="0"/>
-          </a:p>
-        </p:txBody>
-      </p:sp>
-      <p:sp>
-        <p:nvSpPr>
-          <p:cNvPr id="21" name="Text 19"/>
-          <p:cNvSpPr txBox="1"/>
-          <p:nvPr/>
-        </p:nvSpPr>
-        <p:spPr>
-          <a:xfrm>
-            <a:off x="548640" y="4937760"/>
-            <a:ext cx="11064240" cy="457200"/>
-          </a:xfrm>
-          <a:prstGeom prst="rect">
-            <a:avLst/>
-          </a:prstGeom>
-          <a:noFill/>
-          <a:ln/>
-        </p:spPr>
-        <p:txBody>
-          <a:bodyPr wrap="square" lIns="0" tIns="0" rIns="0" bIns="0" rtlCol="0" anchor="ctr"/>
-          <a:lstStyle/>
-          <a:p>
-            <a:pPr indent="0" marL="0">
-              <a:buNone/>
-            </a:pPr>
-            <a:r>
-              <a:rPr lang="en-US" sz="1600" b="1" dirty="0">
-                <a:solidFill>
-                  <a:schemeClr val="tx2"/>
-                </a:solidFill>
-              </a:rPr>
-              <a:t>이 프로젝트는 기능을 더하는 것보다, 도입 판단에 쓸 수 있는 평가 체계를 만드는 데 무게를 뒀다.</a:t>
-            </a:r>
-            <a:endParaRPr lang="en-US" sz="1600" dirty="0"/>
+            <a:endParaRPr lang="en-US" sz="1050" dirty="0"/>
           </a:p>
         </p:txBody>
       </p:sp>
@@ -17485,7 +17580,7 @@
                   <a:schemeClr val="tx2"/>
                 </a:solidFill>
               </a:rPr>
-              <a:t>문제 1: base는 질문을 읽지 않고, 알림 키워드로 런북을 고른다</a:t>
+              <a:t>운영팀이 AI 에이전트 도입을 결정하려면 세 가지를 알아야 한다</a:t>
             </a:r>
             <a:endParaRPr lang="en-US" sz="2800" dirty="0"/>
           </a:p>
@@ -17493,18 +17588,18 @@
       </p:sp>
       <p:sp>
         <p:nvSpPr>
-          <p:cNvPr id="3" name="flow-0"/>
+          <p:cNvPr id="3" name="q3-0"/>
           <p:cNvSpPr/>
           <p:nvPr/>
         </p:nvSpPr>
         <p:spPr>
           <a:xfrm>
             <a:off x="548640" y="1371600"/>
-            <a:ext cx="2468880" cy="1737360"/>
+            <a:ext cx="3520440" cy="3246120"/>
           </a:xfrm>
           <a:prstGeom prst="roundRect">
             <a:avLst>
-              <a:gd name="adj" fmla="val 6316"/>
+              <a:gd name="adj" fmla="val 3380"/>
             </a:avLst>
           </a:prstGeom>
           <a:solidFill>
@@ -17520,14 +17615,39 @@
       </p:sp>
       <p:sp>
         <p:nvSpPr>
-          <p:cNvPr id="4" name="Text 2"/>
+          <p:cNvPr id="4" name="q3-dot-0"/>
+          <p:cNvSpPr/>
+          <p:nvPr/>
+        </p:nvSpPr>
+        <p:spPr>
+          <a:xfrm>
+            <a:off x="822960" y="1600200"/>
+            <a:ext cx="502920" cy="502920"/>
+          </a:xfrm>
+          <a:prstGeom prst="ellipse">
+            <a:avLst/>
+          </a:prstGeom>
+          <a:solidFill>
+            <a:schemeClr val="accent1"/>
+          </a:solidFill>
+          <a:ln w="12700">
+            <a:solidFill>
+              <a:schemeClr val="accent1"/>
+            </a:solidFill>
+            <a:prstDash val="solid"/>
+          </a:ln>
+        </p:spPr>
+      </p:sp>
+      <p:sp>
+        <p:nvSpPr>
+          <p:cNvPr id="5" name="Text 3"/>
           <p:cNvSpPr txBox="1"/>
           <p:nvPr/>
         </p:nvSpPr>
         <p:spPr>
           <a:xfrm>
-            <a:off x="731520" y="1508760"/>
-            <a:ext cx="2103120" cy="365760"/>
+            <a:off x="822960" y="1600200"/>
+            <a:ext cx="502920" cy="502920"/>
           </a:xfrm>
           <a:prstGeom prst="rect">
             <a:avLst/>
@@ -17539,31 +17659,67 @@
           <a:bodyPr wrap="square" lIns="0" tIns="0" rIns="0" bIns="0" rtlCol="0" anchor="ctr"/>
           <a:lstStyle/>
           <a:p>
+            <a:pPr algn="ctr" indent="0" marL="0">
+              <a:buNone/>
+            </a:pPr>
+            <a:r>
+              <a:rPr lang="en-US" sz="1800" b="1" dirty="0">
+                <a:solidFill>
+                  <a:schemeClr val="bg1"/>
+                </a:solidFill>
+              </a:rPr>
+              <a:t>1</a:t>
+            </a:r>
+            <a:endParaRPr lang="en-US" sz="1800" dirty="0"/>
+          </a:p>
+        </p:txBody>
+      </p:sp>
+      <p:sp>
+        <p:nvSpPr>
+          <p:cNvPr id="6" name="Text 4"/>
+          <p:cNvSpPr txBox="1"/>
+          <p:nvPr/>
+        </p:nvSpPr>
+        <p:spPr>
+          <a:xfrm>
+            <a:off x="1463040" y="1600200"/>
+            <a:ext cx="2468880" cy="502920"/>
+          </a:xfrm>
+          <a:prstGeom prst="rect">
+            <a:avLst/>
+          </a:prstGeom>
+          <a:noFill/>
+          <a:ln/>
+        </p:spPr>
+        <p:txBody>
+          <a:bodyPr wrap="square" lIns="0" tIns="0" rIns="0" bIns="0" rtlCol="0" anchor="ctr"/>
+          <a:lstStyle/>
+          <a:p>
             <a:pPr indent="0" marL="0">
               <a:buNone/>
             </a:pPr>
             <a:r>
-              <a:rPr lang="en-US" sz="1400" b="1" dirty="0">
+              <a:rPr lang="en-US" sz="1700" b="1" dirty="0">
                 <a:solidFill>
                   <a:schemeClr val="tx2"/>
                 </a:solidFill>
               </a:rPr>
-              <a:t>사용자 질의</a:t>
+              <a:t>맞는 조치를 권고하나</a:t>
             </a:r>
-            <a:endParaRPr lang="en-US" sz="1400" dirty="0"/>
+            <a:endParaRPr lang="en-US" sz="1700" dirty="0"/>
           </a:p>
         </p:txBody>
       </p:sp>
       <p:sp>
         <p:nvSpPr>
-          <p:cNvPr id="5" name="Text 3"/>
+          <p:cNvPr id="7" name="Text 5"/>
           <p:cNvSpPr txBox="1"/>
           <p:nvPr/>
         </p:nvSpPr>
         <p:spPr>
           <a:xfrm>
-            <a:off x="731520" y="1920240"/>
-            <a:ext cx="2103120" cy="1097280"/>
+            <a:off x="822960" y="2331720"/>
+            <a:ext cx="3017520" cy="1828800"/>
           </a:xfrm>
           <a:prstGeom prst="rect">
             <a:avLst/>
@@ -17579,70 +17735,67 @@
               <a:buNone/>
             </a:pPr>
             <a:r>
-              <a:rPr lang="en-US" sz="1500" dirty="0">
+              <a:rPr lang="en-US" sz="1400" dirty="0">
                 <a:solidFill>
                   <a:schemeClr val="tx1"/>
                 </a:solidFill>
               </a:rPr>
-              <a:t>"DB 프라이머리가</a:t>
+              <a:t>새벽 2시 당직자가 "DB 프라이머리가 죽었다"고 물었는데 응답 지연 절차를 주면, 그 답은 장애를 키운다.</a:t>
             </a:r>
-            <a:endParaRPr lang="en-US" sz="1500" dirty="0"/>
-          </a:p>
+            <a:endParaRPr lang="en-US" sz="1400" dirty="0"/>
+          </a:p>
+        </p:txBody>
+      </p:sp>
+      <p:sp>
+        <p:nvSpPr>
+          <p:cNvPr id="8" name="Text 6"/>
+          <p:cNvSpPr txBox="1"/>
+          <p:nvPr/>
+        </p:nvSpPr>
+        <p:spPr>
+          <a:xfrm>
+            <a:off x="822960" y="3703320"/>
+            <a:ext cx="3017520" cy="822960"/>
+          </a:xfrm>
+          <a:prstGeom prst="rect">
+            <a:avLst/>
+          </a:prstGeom>
+          <a:noFill/>
+          <a:ln/>
+        </p:spPr>
+        <p:txBody>
+          <a:bodyPr wrap="square" lIns="0" tIns="0" rIns="0" bIns="0" rtlCol="0" anchor="t"/>
+          <a:lstStyle/>
           <a:p>
             <a:pPr indent="0" marL="0">
               <a:buNone/>
             </a:pPr>
             <a:r>
-              <a:rPr lang="en-US" sz="1500" dirty="0">
+              <a:rPr lang="en-US" sz="1300" b="1" dirty="0">
                 <a:solidFill>
-                  <a:schemeClr val="tx1"/>
+                  <a:schemeClr val="accent6"/>
                 </a:solidFill>
               </a:rPr>
-              <a:t>다운됐습니다"</a:t>
+              <a:t>→ 정답 런북 누락률 · 무관 런북 혼입률</a:t>
             </a:r>
-            <a:endParaRPr lang="en-US" sz="1500" dirty="0"/>
+            <a:endParaRPr lang="en-US" sz="1300" dirty="0"/>
           </a:p>
         </p:txBody>
       </p:sp>
       <p:sp>
         <p:nvSpPr>
-          <p:cNvPr id="6" name="arrow-0"/>
+          <p:cNvPr id="9" name="q3-1"/>
           <p:cNvSpPr/>
           <p:nvPr/>
         </p:nvSpPr>
         <p:spPr>
           <a:xfrm>
-            <a:off x="3063240" y="2057400"/>
-            <a:ext cx="274320" cy="365760"/>
-          </a:xfrm>
-          <a:prstGeom prst="rightArrow">
-            <a:avLst/>
-          </a:prstGeom>
-          <a:solidFill>
-            <a:schemeClr val="accent3"/>
-          </a:solidFill>
-          <a:ln w="12700">
-            <a:solidFill>
-              <a:schemeClr val="accent3"/>
-            </a:solidFill>
-            <a:prstDash val="solid"/>
-          </a:ln>
-        </p:spPr>
-      </p:sp>
-      <p:sp>
-        <p:nvSpPr>
-          <p:cNvPr id="7" name="flow-1"/>
-          <p:cNvSpPr/>
-          <p:nvPr/>
-        </p:nvSpPr>
-        <p:spPr>
-          <a:xfrm>
-            <a:off x="3383280" y="1371600"/>
-            <a:ext cx="2468880" cy="1737360"/>
+            <a:off x="4334256" y="1371600"/>
+            <a:ext cx="3520440" cy="3246120"/>
           </a:xfrm>
           <a:prstGeom prst="roundRect">
             <a:avLst>
-              <a:gd name="adj" fmla="val 6316"/>
+              <a:gd name="adj" fmla="val 3380"/>
             </a:avLst>
           </a:prstGeom>
           <a:solidFill>
@@ -17658,14 +17811,39 @@
       </p:sp>
       <p:sp>
         <p:nvSpPr>
-          <p:cNvPr id="8" name="Text 6"/>
+          <p:cNvPr id="10" name="q3-dot-1"/>
+          <p:cNvSpPr/>
+          <p:nvPr/>
+        </p:nvSpPr>
+        <p:spPr>
+          <a:xfrm>
+            <a:off x="4608576" y="1600200"/>
+            <a:ext cx="502920" cy="502920"/>
+          </a:xfrm>
+          <a:prstGeom prst="ellipse">
+            <a:avLst/>
+          </a:prstGeom>
+          <a:solidFill>
+            <a:schemeClr val="accent4"/>
+          </a:solidFill>
+          <a:ln w="12700">
+            <a:solidFill>
+              <a:schemeClr val="accent4"/>
+            </a:solidFill>
+            <a:prstDash val="solid"/>
+          </a:ln>
+        </p:spPr>
+      </p:sp>
+      <p:sp>
+        <p:nvSpPr>
+          <p:cNvPr id="11" name="Text 9"/>
           <p:cNvSpPr txBox="1"/>
           <p:nvPr/>
         </p:nvSpPr>
         <p:spPr>
           <a:xfrm>
-            <a:off x="3566160" y="1508760"/>
-            <a:ext cx="2103120" cy="365760"/>
+            <a:off x="4608576" y="1600200"/>
+            <a:ext cx="502920" cy="502920"/>
           </a:xfrm>
           <a:prstGeom prst="rect">
             <a:avLst/>
@@ -17677,31 +17855,67 @@
           <a:bodyPr wrap="square" lIns="0" tIns="0" rIns="0" bIns="0" rtlCol="0" anchor="ctr"/>
           <a:lstStyle/>
           <a:p>
+            <a:pPr algn="ctr" indent="0" marL="0">
+              <a:buNone/>
+            </a:pPr>
+            <a:r>
+              <a:rPr lang="en-US" sz="1800" b="1" dirty="0">
+                <a:solidFill>
+                  <a:schemeClr val="bg1"/>
+                </a:solidFill>
+              </a:rPr>
+              <a:t>2</a:t>
+            </a:r>
+            <a:endParaRPr lang="en-US" sz="1800" dirty="0"/>
+          </a:p>
+        </p:txBody>
+      </p:sp>
+      <p:sp>
+        <p:nvSpPr>
+          <p:cNvPr id="12" name="Text 10"/>
+          <p:cNvSpPr txBox="1"/>
+          <p:nvPr/>
+        </p:nvSpPr>
+        <p:spPr>
+          <a:xfrm>
+            <a:off x="5248656" y="1600200"/>
+            <a:ext cx="2468880" cy="502920"/>
+          </a:xfrm>
+          <a:prstGeom prst="rect">
+            <a:avLst/>
+          </a:prstGeom>
+          <a:noFill/>
+          <a:ln/>
+        </p:spPr>
+        <p:txBody>
+          <a:bodyPr wrap="square" lIns="0" tIns="0" rIns="0" bIns="0" rtlCol="0" anchor="ctr"/>
+          <a:lstStyle/>
+          <a:p>
             <a:pPr indent="0" marL="0">
               <a:buNone/>
             </a:pPr>
             <a:r>
-              <a:rPr lang="en-US" sz="1400" b="1" dirty="0">
+              <a:rPr lang="en-US" sz="1700" b="1" dirty="0">
                 <a:solidFill>
                   <a:schemeClr val="tx2"/>
                 </a:solidFill>
               </a:rPr>
-              <a:t>planner</a:t>
+              <a:t>그 판정을 믿어도 되나</a:t>
             </a:r>
-            <a:endParaRPr lang="en-US" sz="1400" dirty="0"/>
+            <a:endParaRPr lang="en-US" sz="1700" dirty="0"/>
           </a:p>
         </p:txBody>
       </p:sp>
       <p:sp>
         <p:nvSpPr>
-          <p:cNvPr id="9" name="Text 7"/>
+          <p:cNvPr id="13" name="Text 11"/>
           <p:cNvSpPr txBox="1"/>
           <p:nvPr/>
         </p:nvSpPr>
         <p:spPr>
           <a:xfrm>
-            <a:off x="3566160" y="1920240"/>
-            <a:ext cx="2103120" cy="1097280"/>
+            <a:off x="4608576" y="2331720"/>
+            <a:ext cx="3017520" cy="1828800"/>
           </a:xfrm>
           <a:prstGeom prst="rect">
             <a:avLst/>
@@ -17717,70 +17931,67 @@
               <a:buNone/>
             </a:pPr>
             <a:r>
-              <a:rPr lang="en-US" sz="1500" dirty="0">
+              <a:rPr lang="en-US" sz="1400" dirty="0">
                 <a:solidFill>
                   <a:schemeClr val="tx1"/>
                 </a:solidFill>
               </a:rPr>
-              <a:t>시스템명 없음</a:t>
+              <a:t>"AI가 채점했더니 97점"은 채점한 AI가 관대하면 의미가 없다. 평가자 자체를 검증해야 한다.</a:t>
             </a:r>
-            <a:endParaRPr lang="en-US" sz="1500" dirty="0"/>
-          </a:p>
+            <a:endParaRPr lang="en-US" sz="1400" dirty="0"/>
+          </a:p>
+        </p:txBody>
+      </p:sp>
+      <p:sp>
+        <p:nvSpPr>
+          <p:cNvPr id="14" name="Text 12"/>
+          <p:cNvSpPr txBox="1"/>
+          <p:nvPr/>
+        </p:nvSpPr>
+        <p:spPr>
+          <a:xfrm>
+            <a:off x="4608576" y="3703320"/>
+            <a:ext cx="3017520" cy="822960"/>
+          </a:xfrm>
+          <a:prstGeom prst="rect">
+            <a:avLst/>
+          </a:prstGeom>
+          <a:noFill/>
+          <a:ln/>
+        </p:spPr>
+        <p:txBody>
+          <a:bodyPr wrap="square" lIns="0" tIns="0" rIns="0" bIns="0" rtlCol="0" anchor="t"/>
+          <a:lstStyle/>
           <a:p>
             <a:pPr indent="0" marL="0">
               <a:buNone/>
             </a:pPr>
             <a:r>
-              <a:rPr lang="en-US" sz="1500" dirty="0">
+              <a:rPr lang="en-US" sz="1300" b="1" dirty="0">
                 <a:solidFill>
-                  <a:schemeClr val="tx1"/>
+                  <a:schemeClr val="accent6"/>
                 </a:solidFill>
               </a:rPr>
-              <a:t>→ auth-service 폴백</a:t>
+              <a:t>→ 독립 평가자와의 일치도 (kappa, 사람 표본은 예정) · Judge 무관 지표</a:t>
             </a:r>
-            <a:endParaRPr lang="en-US" sz="1500" dirty="0"/>
+            <a:endParaRPr lang="en-US" sz="1300" dirty="0"/>
           </a:p>
         </p:txBody>
       </p:sp>
       <p:sp>
         <p:nvSpPr>
-          <p:cNvPr id="10" name="arrow-1"/>
+          <p:cNvPr id="15" name="q3-2"/>
           <p:cNvSpPr/>
           <p:nvPr/>
         </p:nvSpPr>
         <p:spPr>
           <a:xfrm>
-            <a:off x="5897880" y="2057400"/>
-            <a:ext cx="274320" cy="365760"/>
-          </a:xfrm>
-          <a:prstGeom prst="rightArrow">
-            <a:avLst/>
-          </a:prstGeom>
-          <a:solidFill>
-            <a:schemeClr val="accent3"/>
-          </a:solidFill>
-          <a:ln w="12700">
-            <a:solidFill>
-              <a:schemeClr val="accent3"/>
-            </a:solidFill>
-            <a:prstDash val="solid"/>
-          </a:ln>
-        </p:spPr>
-      </p:sp>
-      <p:sp>
-        <p:nvSpPr>
-          <p:cNvPr id="11" name="flow-2"/>
-          <p:cNvSpPr/>
-          <p:nvPr/>
-        </p:nvSpPr>
-        <p:spPr>
-          <a:xfrm>
-            <a:off x="6217920" y="1371600"/>
-            <a:ext cx="2468880" cy="1737360"/>
+            <a:off x="8119872" y="1371600"/>
+            <a:ext cx="3520440" cy="3246120"/>
           </a:xfrm>
           <a:prstGeom prst="roundRect">
             <a:avLst>
-              <a:gd name="adj" fmla="val 6316"/>
+              <a:gd name="adj" fmla="val 3380"/>
             </a:avLst>
           </a:prstGeom>
           <a:solidFill>
@@ -17796,14 +18007,39 @@
       </p:sp>
       <p:sp>
         <p:nvSpPr>
-          <p:cNvPr id="12" name="Text 10"/>
+          <p:cNvPr id="16" name="q3-dot-2"/>
+          <p:cNvSpPr/>
+          <p:nvPr/>
+        </p:nvSpPr>
+        <p:spPr>
+          <a:xfrm>
+            <a:off x="8394192" y="1600200"/>
+            <a:ext cx="502920" cy="502920"/>
+          </a:xfrm>
+          <a:prstGeom prst="ellipse">
+            <a:avLst/>
+          </a:prstGeom>
+          <a:solidFill>
+            <a:schemeClr val="accent2"/>
+          </a:solidFill>
+          <a:ln w="12700">
+            <a:solidFill>
+              <a:schemeClr val="accent2"/>
+            </a:solidFill>
+            <a:prstDash val="solid"/>
+          </a:ln>
+        </p:spPr>
+      </p:sp>
+      <p:sp>
+        <p:nvSpPr>
+          <p:cNvPr id="17" name="Text 15"/>
           <p:cNvSpPr txBox="1"/>
           <p:nvPr/>
         </p:nvSpPr>
         <p:spPr>
           <a:xfrm>
-            <a:off x="6400800" y="1508760"/>
-            <a:ext cx="2103120" cy="365760"/>
+            <a:off x="8394192" y="1600200"/>
+            <a:ext cx="502920" cy="502920"/>
           </a:xfrm>
           <a:prstGeom prst="rect">
             <a:avLst/>
@@ -17815,31 +18051,67 @@
           <a:bodyPr wrap="square" lIns="0" tIns="0" rIns="0" bIns="0" rtlCol="0" anchor="ctr"/>
           <a:lstStyle/>
           <a:p>
+            <a:pPr algn="ctr" indent="0" marL="0">
+              <a:buNone/>
+            </a:pPr>
+            <a:r>
+              <a:rPr lang="en-US" sz="1800" b="1" dirty="0">
+                <a:solidFill>
+                  <a:schemeClr val="bg1"/>
+                </a:solidFill>
+              </a:rPr>
+              <a:t>3</a:t>
+            </a:r>
+            <a:endParaRPr lang="en-US" sz="1800" dirty="0"/>
+          </a:p>
+        </p:txBody>
+      </p:sp>
+      <p:sp>
+        <p:nvSpPr>
+          <p:cNvPr id="18" name="Text 16"/>
+          <p:cNvSpPr txBox="1"/>
+          <p:nvPr/>
+        </p:nvSpPr>
+        <p:spPr>
+          <a:xfrm>
+            <a:off x="9034272" y="1600200"/>
+            <a:ext cx="2468880" cy="502920"/>
+          </a:xfrm>
+          <a:prstGeom prst="rect">
+            <a:avLst/>
+          </a:prstGeom>
+          <a:noFill/>
+          <a:ln/>
+        </p:spPr>
+        <p:txBody>
+          <a:bodyPr wrap="square" lIns="0" tIns="0" rIns="0" bIns="0" rtlCol="0" anchor="ctr"/>
+          <a:lstStyle/>
+          <a:p>
             <a:pPr indent="0" marL="0">
               <a:buNone/>
             </a:pPr>
             <a:r>
-              <a:rPr lang="en-US" sz="1400" b="1" dirty="0">
+              <a:rPr lang="en-US" sz="1700" b="1" dirty="0">
                 <a:solidFill>
                   <a:schemeClr val="tx2"/>
                 </a:solidFill>
               </a:rPr>
-              <a:t>모니터링 알림</a:t>
+              <a:t>얼마에, 얼마나 빨리</a:t>
             </a:r>
-            <a:endParaRPr lang="en-US" sz="1400" dirty="0"/>
+            <a:endParaRPr lang="en-US" sz="1700" dirty="0"/>
           </a:p>
         </p:txBody>
       </p:sp>
       <p:sp>
         <p:nvSpPr>
-          <p:cNvPr id="13" name="Text 11"/>
+          <p:cNvPr id="19" name="Text 17"/>
           <p:cNvSpPr txBox="1"/>
           <p:nvPr/>
         </p:nvSpPr>
         <p:spPr>
           <a:xfrm>
-            <a:off x="6400800" y="1920240"/>
-            <a:ext cx="2103120" cy="1097280"/>
+            <a:off x="8394192" y="2331720"/>
+            <a:ext cx="3017520" cy="1828800"/>
           </a:xfrm>
           <a:prstGeom prst="rect">
             <a:avLst/>
@@ -17855,93 +18127,63 @@
               <a:buNone/>
             </a:pPr>
             <a:r>
-              <a:rPr lang="en-US" sz="1500" dirty="0">
+              <a:rPr lang="en-US" sz="1400" dirty="0">
                 <a:solidFill>
                   <a:schemeClr val="tx1"/>
                 </a:solidFill>
               </a:rPr>
-              <a:t>"p95 latency 2.4s"</a:t>
+              <a:t>품질을 올린 대가로 비용과 지연이 얼마나 늘었는지, 장애가 겹쳐 들어오거나 도구가 죽어도 버티는지.</a:t>
             </a:r>
-            <a:endParaRPr lang="en-US" sz="1500" dirty="0"/>
-          </a:p>
+            <a:endParaRPr lang="en-US" sz="1400" dirty="0"/>
+          </a:p>
+        </p:txBody>
+      </p:sp>
+      <p:sp>
+        <p:nvSpPr>
+          <p:cNvPr id="20" name="Text 18"/>
+          <p:cNvSpPr txBox="1"/>
+          <p:nvPr/>
+        </p:nvSpPr>
+        <p:spPr>
+          <a:xfrm>
+            <a:off x="8394192" y="3703320"/>
+            <a:ext cx="3017520" cy="822960"/>
+          </a:xfrm>
+          <a:prstGeom prst="rect">
+            <a:avLst/>
+          </a:prstGeom>
+          <a:noFill/>
+          <a:ln/>
+        </p:spPr>
+        <p:txBody>
+          <a:bodyPr wrap="square" lIns="0" tIns="0" rIns="0" bIns="0" rtlCol="0" anchor="t"/>
+          <a:lstStyle/>
           <a:p>
             <a:pPr indent="0" marL="0">
               <a:buNone/>
             </a:pPr>
             <a:r>
-              <a:rPr lang="en-US" sz="1500" dirty="0">
+              <a:rPr lang="en-US" sz="1300" b="1" dirty="0">
                 <a:solidFill>
-                  <a:schemeClr val="tx1"/>
+                  <a:schemeClr val="accent6"/>
                 </a:solidFill>
               </a:rPr>
-              <a:t>키워드 'latency' 일치</a:t>
+              <a:t>→ 장애 1건당 비용 · p95 지연 · 동시 처리 · 장애 주입</a:t>
             </a:r>
-            <a:endParaRPr lang="en-US" sz="1500" dirty="0"/>
+            <a:endParaRPr lang="en-US" sz="1300" dirty="0"/>
           </a:p>
         </p:txBody>
       </p:sp>
       <p:sp>
         <p:nvSpPr>
-          <p:cNvPr id="14" name="arrow-2"/>
-          <p:cNvSpPr/>
+          <p:cNvPr id="21" name="Text 19"/>
+          <p:cNvSpPr txBox="1"/>
           <p:nvPr/>
         </p:nvSpPr>
         <p:spPr>
           <a:xfrm>
-            <a:off x="8732520" y="2057400"/>
-            <a:ext cx="274320" cy="365760"/>
-          </a:xfrm>
-          <a:prstGeom prst="rightArrow">
-            <a:avLst/>
-          </a:prstGeom>
-          <a:solidFill>
-            <a:schemeClr val="accent3"/>
-          </a:solidFill>
-          <a:ln w="12700">
-            <a:solidFill>
-              <a:schemeClr val="accent3"/>
-            </a:solidFill>
-            <a:prstDash val="solid"/>
-          </a:ln>
-        </p:spPr>
-      </p:sp>
-      <p:sp>
-        <p:nvSpPr>
-          <p:cNvPr id="15" name="flow-3"/>
-          <p:cNvSpPr/>
-          <p:nvPr/>
-        </p:nvSpPr>
-        <p:spPr>
-          <a:xfrm>
-            <a:off x="9052560" y="1371600"/>
-            <a:ext cx="2468880" cy="1737360"/>
-          </a:xfrm>
-          <a:prstGeom prst="roundRect">
-            <a:avLst>
-              <a:gd name="adj" fmla="val 6316"/>
-            </a:avLst>
-          </a:prstGeom>
-          <a:solidFill>
-            <a:schemeClr val="accent1"/>
-          </a:solidFill>
-          <a:ln w="12700">
-            <a:solidFill>
-              <a:schemeClr val="accent1"/>
-            </a:solidFill>
-            <a:prstDash val="solid"/>
-          </a:ln>
-        </p:spPr>
-      </p:sp>
-      <p:sp>
-        <p:nvSpPr>
-          <p:cNvPr id="16" name="Text 14"/>
-          <p:cNvSpPr txBox="1"/>
-          <p:nvPr/>
-        </p:nvSpPr>
-        <p:spPr>
-          <a:xfrm>
-            <a:off x="9235440" y="1508760"/>
-            <a:ext cx="2103120" cy="365760"/>
+            <a:off x="548640" y="4937760"/>
+            <a:ext cx="11064240" cy="457200"/>
           </a:xfrm>
           <a:prstGeom prst="rect">
             <a:avLst/>
@@ -17957,401 +18199,14 @@
               <a:buNone/>
             </a:pPr>
             <a:r>
-              <a:rPr lang="en-US" sz="1400" b="1" dirty="0">
+              <a:rPr lang="en-US" sz="1600" b="1" dirty="0">
                 <a:solidFill>
-                  <a:schemeClr val="bg1"/>
+                  <a:schemeClr val="tx2"/>
                 </a:solidFill>
               </a:rPr>
-              <a:t>선택된 런북</a:t>
+              <a:t>이 프로젝트는 기능을 더하는 것보다, 도입 판단에 쓸 수 있는 평가 체계를 만드는 데 무게를 뒀다.</a:t>
             </a:r>
-            <a:endParaRPr lang="en-US" sz="1400" dirty="0"/>
-          </a:p>
-        </p:txBody>
-      </p:sp>
-      <p:sp>
-        <p:nvSpPr>
-          <p:cNvPr id="17" name="Text 15"/>
-          <p:cNvSpPr txBox="1"/>
-          <p:nvPr/>
-        </p:nvSpPr>
-        <p:spPr>
-          <a:xfrm>
-            <a:off x="9235440" y="1920240"/>
-            <a:ext cx="2103120" cy="1097280"/>
-          </a:xfrm>
-          <a:prstGeom prst="rect">
-            <a:avLst/>
-          </a:prstGeom>
-          <a:noFill/>
-          <a:ln/>
-        </p:spPr>
-        <p:txBody>
-          <a:bodyPr wrap="square" lIns="0" tIns="0" rIns="0" bIns="0" rtlCol="0" anchor="t"/>
-          <a:lstStyle/>
-          <a:p>
-            <a:pPr indent="0" marL="0">
-              <a:buNone/>
-            </a:pPr>
-            <a:r>
-              <a:rPr lang="en-US" sz="1500" dirty="0">
-                <a:solidFill>
-                  <a:schemeClr val="bg1"/>
-                </a:solidFill>
-              </a:rPr>
-              <a:t>high-latency</a:t>
-            </a:r>
-            <a:endParaRPr lang="en-US" sz="1500" dirty="0"/>
-          </a:p>
-          <a:p>
-            <a:pPr indent="0" marL="0">
-              <a:buNone/>
-            </a:pPr>
-            <a:r>
-              <a:rPr lang="en-US" sz="1500" dirty="0">
-                <a:solidFill>
-                  <a:schemeClr val="bg1"/>
-                </a:solidFill>
-              </a:rPr>
-              <a:t>(응답 지연 절차)</a:t>
-            </a:r>
-            <a:endParaRPr lang="en-US" sz="1500" dirty="0"/>
-          </a:p>
-        </p:txBody>
-      </p:sp>
-      <p:sp>
-        <p:nvSpPr>
-          <p:cNvPr id="18" name="stat-basemiss"/>
-          <p:cNvSpPr/>
-          <p:nvPr/>
-        </p:nvSpPr>
-        <p:spPr>
-          <a:xfrm>
-            <a:off x="548640" y="3429000"/>
-            <a:ext cx="3520440" cy="1828800"/>
-          </a:xfrm>
-          <a:prstGeom prst="roundRect">
-            <a:avLst>
-              <a:gd name="adj" fmla="val 6000"/>
-            </a:avLst>
-          </a:prstGeom>
-          <a:solidFill>
-            <a:schemeClr val="bg2"/>
-          </a:solidFill>
-          <a:ln w="12700">
-            <a:solidFill>
-              <a:schemeClr val="bg2"/>
-            </a:solidFill>
-            <a:prstDash val="solid"/>
-          </a:ln>
-        </p:spPr>
-      </p:sp>
-      <p:sp>
-        <p:nvSpPr>
-          <p:cNvPr id="19" name="Text 17"/>
-          <p:cNvSpPr txBox="1"/>
-          <p:nvPr/>
-        </p:nvSpPr>
-        <p:spPr>
-          <a:xfrm>
-            <a:off x="822960" y="3630168"/>
-            <a:ext cx="2971800" cy="868680"/>
-          </a:xfrm>
-          <a:prstGeom prst="rect">
-            <a:avLst/>
-          </a:prstGeom>
-          <a:noFill/>
-          <a:ln/>
-        </p:spPr>
-        <p:txBody>
-          <a:bodyPr wrap="square" lIns="0" tIns="0" rIns="0" bIns="0" rtlCol="0" anchor="ctr"/>
-          <a:lstStyle/>
-          <a:p>
-            <a:pPr indent="0" marL="0">
-              <a:buNone/>
-            </a:pPr>
-            <a:r>
-              <a:rPr lang="en-US" sz="3600" b="1" dirty="0">
-                <a:solidFill>
-                  <a:schemeClr val="accent1"/>
-                </a:solidFill>
-              </a:rPr>
-              <a:t>56%</a:t>
-            </a:r>
-            <a:endParaRPr lang="en-US" sz="3600" dirty="0"/>
-          </a:p>
-        </p:txBody>
-      </p:sp>
-      <p:sp>
-        <p:nvSpPr>
-          <p:cNvPr id="20" name="Text 18"/>
-          <p:cNvSpPr txBox="1"/>
-          <p:nvPr/>
-        </p:nvSpPr>
-        <p:spPr>
-          <a:xfrm>
-            <a:off x="822960" y="4526280"/>
-            <a:ext cx="2971800" cy="640080"/>
-          </a:xfrm>
-          <a:prstGeom prst="rect">
-            <a:avLst/>
-          </a:prstGeom>
-          <a:noFill/>
-          <a:ln/>
-        </p:spPr>
-        <p:txBody>
-          <a:bodyPr wrap="square" lIns="0" tIns="0" rIns="0" bIns="0" rtlCol="0" anchor="t"/>
-          <a:lstStyle/>
-          <a:p>
-            <a:pPr indent="0" marL="0">
-              <a:buNone/>
-            </a:pPr>
-            <a:r>
-              <a:rPr lang="en-US" sz="1350" dirty="0">
-                <a:solidFill>
-                  <a:schemeClr val="tx1"/>
-                </a:solidFill>
-              </a:rPr>
-              <a:t>holdout에서 base가 정답 런북을</a:t>
-            </a:r>
-            <a:endParaRPr lang="en-US" sz="1350" dirty="0"/>
-          </a:p>
-          <a:p>
-            <a:pPr indent="0" marL="0">
-              <a:buNone/>
-            </a:pPr>
-            <a:r>
-              <a:rPr lang="en-US" sz="1350" dirty="0">
-                <a:solidFill>
-                  <a:schemeClr val="tx1"/>
-                </a:solidFill>
-              </a:rPr>
-              <a:t>근거에 못 넣은 비율</a:t>
-            </a:r>
-            <a:endParaRPr lang="en-US" sz="1350" dirty="0"/>
-          </a:p>
-        </p:txBody>
-      </p:sp>
-      <p:sp>
-        <p:nvSpPr>
-          <p:cNvPr id="21" name="stat-bias"/>
-          <p:cNvSpPr/>
-          <p:nvPr/>
-        </p:nvSpPr>
-        <p:spPr>
-          <a:xfrm>
-            <a:off x="4334256" y="3429000"/>
-            <a:ext cx="3520440" cy="1828800"/>
-          </a:xfrm>
-          <a:prstGeom prst="roundRect">
-            <a:avLst>
-              <a:gd name="adj" fmla="val 6000"/>
-            </a:avLst>
-          </a:prstGeom>
-          <a:solidFill>
-            <a:schemeClr val="bg2"/>
-          </a:solidFill>
-          <a:ln w="12700">
-            <a:solidFill>
-              <a:schemeClr val="bg2"/>
-            </a:solidFill>
-            <a:prstDash val="solid"/>
-          </a:ln>
-        </p:spPr>
-      </p:sp>
-      <p:sp>
-        <p:nvSpPr>
-          <p:cNvPr id="22" name="Text 20"/>
-          <p:cNvSpPr txBox="1"/>
-          <p:nvPr/>
-        </p:nvSpPr>
-        <p:spPr>
-          <a:xfrm>
-            <a:off x="4608576" y="3630168"/>
-            <a:ext cx="2971800" cy="868680"/>
-          </a:xfrm>
-          <a:prstGeom prst="rect">
-            <a:avLst/>
-          </a:prstGeom>
-          <a:noFill/>
-          <a:ln/>
-        </p:spPr>
-        <p:txBody>
-          <a:bodyPr wrap="square" lIns="0" tIns="0" rIns="0" bIns="0" rtlCol="0" anchor="ctr"/>
-          <a:lstStyle/>
-          <a:p>
-            <a:pPr indent="0" marL="0">
-              <a:buNone/>
-            </a:pPr>
-            <a:r>
-              <a:rPr lang="en-US" sz="3600" b="1" dirty="0">
-                <a:solidFill>
-                  <a:schemeClr val="accent1"/>
-                </a:solidFill>
-              </a:rPr>
-              <a:t>78% vs 11%</a:t>
-            </a:r>
-            <a:endParaRPr lang="en-US" sz="3600" dirty="0"/>
-          </a:p>
-        </p:txBody>
-      </p:sp>
-      <p:sp>
-        <p:nvSpPr>
-          <p:cNvPr id="23" name="Text 21"/>
-          <p:cNvSpPr txBox="1"/>
-          <p:nvPr/>
-        </p:nvSpPr>
-        <p:spPr>
-          <a:xfrm>
-            <a:off x="4608576" y="4526280"/>
-            <a:ext cx="2971800" cy="640080"/>
-          </a:xfrm>
-          <a:prstGeom prst="rect">
-            <a:avLst/>
-          </a:prstGeom>
-          <a:noFill/>
-          <a:ln/>
-        </p:spPr>
-        <p:txBody>
-          <a:bodyPr wrap="square" lIns="0" tIns="0" rIns="0" bIns="0" rtlCol="0" anchor="t"/>
-          <a:lstStyle/>
-          <a:p>
-            <a:pPr indent="0" marL="0">
-              <a:buNone/>
-            </a:pPr>
-            <a:r>
-              <a:rPr lang="en-US" sz="1350" dirty="0">
-                <a:solidFill>
-                  <a:schemeClr val="tx1"/>
-                </a:solidFill>
-              </a:rPr>
-              <a:t>알림 문구대로 물을 때 vs 자기 말로</a:t>
-            </a:r>
-            <a:endParaRPr lang="en-US" sz="1350" dirty="0"/>
-          </a:p>
-          <a:p>
-            <a:pPr indent="0" marL="0">
-              <a:buNone/>
-            </a:pPr>
-            <a:r>
-              <a:rPr lang="en-US" sz="1350" dirty="0">
-                <a:solidFill>
-                  <a:schemeClr val="tx1"/>
-                </a:solidFill>
-              </a:rPr>
-              <a:t>물을 때 base Recall@1 (편향 검증)</a:t>
-            </a:r>
-            <a:endParaRPr lang="en-US" sz="1350" dirty="0"/>
-          </a:p>
-        </p:txBody>
-      </p:sp>
-      <p:sp>
-        <p:nvSpPr>
-          <p:cNvPr id="24" name="Text 22"/>
-          <p:cNvSpPr txBox="1"/>
-          <p:nvPr/>
-        </p:nvSpPr>
-        <p:spPr>
-          <a:xfrm>
-            <a:off x="8229600" y="3429000"/>
-            <a:ext cx="3410712" cy="2377440"/>
-          </a:xfrm>
-          <a:prstGeom prst="rect">
-            <a:avLst/>
-          </a:prstGeom>
-          <a:noFill/>
-          <a:ln/>
-        </p:spPr>
-        <p:txBody>
-          <a:bodyPr wrap="square" lIns="0" tIns="0" rIns="0" bIns="0" rtlCol="0" anchor="t"/>
-          <a:lstStyle/>
-          <a:p>
-            <a:pPr indent="0" marL="0">
-              <a:spcAft>
-                <a:spcPts val="500"/>
-              </a:spcAft>
-              <a:buNone/>
-            </a:pPr>
-            <a:r>
-              <a:rPr lang="en-US" sz="1350" b="1" dirty="0">
-                <a:solidFill>
-                  <a:schemeClr val="tx1"/>
-                </a:solidFill>
-              </a:rPr>
-              <a:t>원인 (src/agent/graph.py:192-213)</a:t>
-            </a:r>
-            <a:endParaRPr lang="en-US" sz="1350" dirty="0"/>
-          </a:p>
-          <a:p>
-            <a:pPr marL="342900" indent="-342900">
-              <a:spcAft>
-                <a:spcPts val="500"/>
-              </a:spcAft>
-              <a:buSzPct val="100000"/>
-              <a:buChar char="•"/>
-            </a:pPr>
-            <a:r>
-              <a:rPr lang="en-US" sz="1350" dirty="0">
-                <a:solidFill>
-                  <a:schemeClr val="tx1"/>
-                </a:solidFill>
-              </a:rPr>
-              <a:t>조사한 시스템의 알림 문구에서 키워드를 순서대로 찾아 첫 일치로 런북 1개를 고른다.</a:t>
-            </a:r>
-            <a:endParaRPr lang="en-US" sz="1350" dirty="0"/>
-          </a:p>
-          <a:p>
-            <a:pPr marL="342900" indent="-342900">
-              <a:spcAft>
-                <a:spcPts val="500"/>
-              </a:spcAft>
-              <a:buSzPct val="100000"/>
-              <a:buChar char="•"/>
-            </a:pPr>
-            <a:r>
-              <a:rPr lang="en-US" sz="1350" dirty="0">
-                <a:solidFill>
-                  <a:schemeClr val="tx1"/>
-                </a:solidFill>
-              </a:rPr>
-              <a:t>질의 문장은 쓰지 않는다. 당직자가 알림과 다른 말로 물으면 거의 맞히지 못한다.</a:t>
-            </a:r>
-            <a:endParaRPr lang="en-US" sz="1350" dirty="0"/>
-          </a:p>
-        </p:txBody>
-      </p:sp>
-      <p:sp>
-        <p:nvSpPr>
-          <p:cNvPr id="25" name="Text 23"/>
-          <p:cNvSpPr txBox="1"/>
-          <p:nvPr/>
-        </p:nvSpPr>
-        <p:spPr>
-          <a:xfrm>
-            <a:off x="548640" y="6053328"/>
-            <a:ext cx="11064240" cy="274320"/>
-          </a:xfrm>
-          <a:prstGeom prst="rect">
-            <a:avLst/>
-          </a:prstGeom>
-          <a:noFill/>
-          <a:ln/>
-        </p:spPr>
-        <p:txBody>
-          <a:bodyPr wrap="square" lIns="0" tIns="0" rIns="0" bIns="0" rtlCol="0" anchor="ctr"/>
-          <a:lstStyle/>
-          <a:p>
-            <a:pPr indent="0" marL="0">
-              <a:buNone/>
-            </a:pPr>
-            <a:r>
-              <a:rPr lang="en-US" sz="1050" dirty="0">
-                <a:solidFill>
-                  <a:schemeClr val="accent3"/>
-                </a:solidFill>
-              </a:rPr>
-              <a:t>holdout 정상 질의 aligned 9건 / paraphrased 9건, 3회 평균</a:t>
-            </a:r>
-            <a:endParaRPr lang="en-US" sz="1050" dirty="0"/>
+            <a:endParaRPr lang="en-US" sz="1600" dirty="0"/>
           </a:p>
         </p:txBody>
       </p:sp>
@@ -18457,7 +18312,7 @@
                   <a:schemeClr val="tx2"/>
                 </a:solidFill>
               </a:rPr>
-              <a:t>문제 2: 검증은 형식만 보고, 모델 분리는 이미 돼 있었다</a:t>
+              <a:t>문제 1: base는 질문을 읽지 않고, 알림 키워드로 런북을 고른다</a:t>
             </a:r>
             <a:endParaRPr lang="en-US" sz="2800" dirty="0"/>
           </a:p>
@@ -18465,18 +18320,18 @@
       </p:sp>
       <p:sp>
         <p:nvSpPr>
-          <p:cNvPr id="3" name="validator-card"/>
+          <p:cNvPr id="3" name="flow-0"/>
           <p:cNvSpPr/>
           <p:nvPr/>
         </p:nvSpPr>
         <p:spPr>
           <a:xfrm>
             <a:off x="548640" y="1371600"/>
-            <a:ext cx="5394960" cy="3474720"/>
+            <a:ext cx="2468880" cy="1737360"/>
           </a:xfrm>
           <a:prstGeom prst="roundRect">
             <a:avLst>
-              <a:gd name="adj" fmla="val 3158"/>
+              <a:gd name="adj" fmla="val 6316"/>
             </a:avLst>
           </a:prstGeom>
           <a:solidFill>
@@ -18498,8 +18353,8 @@
         </p:nvSpPr>
         <p:spPr>
           <a:xfrm>
-            <a:off x="822960" y="1554480"/>
-            <a:ext cx="4846320" cy="457200"/>
+            <a:off x="731520" y="1508760"/>
+            <a:ext cx="2103120" cy="365760"/>
           </a:xfrm>
           <a:prstGeom prst="rect">
             <a:avLst/>
@@ -18515,14 +18370,14 @@
               <a:buNone/>
             </a:pPr>
             <a:r>
-              <a:rPr lang="en-US" sz="2000" b="1" dirty="0">
+              <a:rPr lang="en-US" sz="1400" b="1" dirty="0">
                 <a:solidFill>
                   <a:schemeClr val="tx2"/>
                 </a:solidFill>
               </a:rPr>
-              <a:t>규칙 Validator</a:t>
+              <a:t>사용자 질의</a:t>
             </a:r>
-            <a:endParaRPr lang="en-US" sz="2000" dirty="0"/>
+            <a:endParaRPr lang="en-US" sz="1400" dirty="0"/>
           </a:p>
         </p:txBody>
       </p:sp>
@@ -18534,47 +18389,8 @@
         </p:nvSpPr>
         <p:spPr>
           <a:xfrm>
-            <a:off x="822960" y="2103120"/>
-            <a:ext cx="4846320" cy="457200"/>
-          </a:xfrm>
-          <a:prstGeom prst="rect">
-            <a:avLst/>
-          </a:prstGeom>
-          <a:noFill/>
-          <a:ln/>
-        </p:spPr>
-        <p:txBody>
-          <a:bodyPr wrap="square" lIns="0" tIns="0" rIns="0" bIns="0" rtlCol="0" anchor="ctr"/>
-          <a:lstStyle/>
-          <a:p>
-            <a:pPr indent="0" marL="0">
-              <a:buNone/>
-            </a:pPr>
-            <a:r>
-              <a:rPr lang="en-US" sz="1500" dirty="0">
-                <a:solidFill>
-                  <a:schemeClr val="accent1"/>
-                </a:solidFill>
-                <a:latin typeface="Courier New" pitchFamily="34" charset="0"/>
-                <a:ea typeface="Courier New" pitchFamily="34" charset="-122"/>
-                <a:cs typeface="Courier New" pitchFamily="34" charset="-120"/>
-              </a:rPr>
-              <a:t>len(draft) &gt;= 30 and "1)" in draft</a:t>
-            </a:r>
-            <a:endParaRPr lang="en-US" sz="1500" dirty="0"/>
-          </a:p>
-        </p:txBody>
-      </p:sp>
-      <p:sp>
-        <p:nvSpPr>
-          <p:cNvPr id="6" name="Text 4"/>
-          <p:cNvSpPr txBox="1"/>
-          <p:nvPr/>
-        </p:nvSpPr>
-        <p:spPr>
-          <a:xfrm>
-            <a:off x="822960" y="2743200"/>
-            <a:ext cx="4846320" cy="2011680"/>
+            <a:off x="731520" y="1920240"/>
+            <a:ext cx="2103120" cy="1097280"/>
           </a:xfrm>
           <a:prstGeom prst="rect">
             <a:avLst/>
@@ -18586,12 +18402,8 @@
           <a:bodyPr wrap="square" lIns="0" tIns="0" rIns="0" bIns="0" rtlCol="0" anchor="t"/>
           <a:lstStyle/>
           <a:p>
-            <a:pPr marL="342900" indent="-342900">
-              <a:spcAft>
-                <a:spcPts val="800"/>
-              </a:spcAft>
-              <a:buSzPct val="100000"/>
-              <a:buChar char="•"/>
+            <a:pPr indent="0" marL="0">
+              <a:buNone/>
             </a:pPr>
             <a:r>
               <a:rPr lang="en-US" sz="1500" dirty="0">
@@ -18599,17 +18411,13 @@
                   <a:schemeClr val="tx1"/>
                 </a:solidFill>
               </a:rPr>
-              <a:t>질문과 맞는지, 근거에 있는지는 보지 않는다.</a:t>
+              <a:t>"DB 프라이머리가</a:t>
             </a:r>
             <a:endParaRPr lang="en-US" sz="1500" dirty="0"/>
           </a:p>
           <a:p>
-            <a:pPr marL="342900" indent="-342900">
-              <a:spcAft>
-                <a:spcPts val="800"/>
-              </a:spcAft>
-              <a:buSzPct val="100000"/>
-              <a:buChar char="•"/>
+            <a:pPr indent="0" marL="0">
+              <a:buNone/>
             </a:pPr>
             <a:r>
               <a:rPr lang="en-US" sz="1500" dirty="0">
@@ -18617,7 +18425,7 @@
                   <a:schemeClr val="tx1"/>
                 </a:solidFill>
               </a:rPr>
-              <a:t>실측: base 60건 x 3회에서 반려 0회. 응답 지연 절차로 DB 다운에 답해도 통과한다.</a:t>
+              <a:t>다운됐습니다"</a:t>
             </a:r>
             <a:endParaRPr lang="en-US" sz="1500" dirty="0"/>
           </a:p>
@@ -18625,18 +18433,43 @@
       </p:sp>
       <p:sp>
         <p:nvSpPr>
-          <p:cNvPr id="7" name="tiering-card"/>
+          <p:cNvPr id="6" name="arrow-0"/>
           <p:cNvSpPr/>
           <p:nvPr/>
         </p:nvSpPr>
         <p:spPr>
           <a:xfrm>
-            <a:off x="6245352" y="1371600"/>
-            <a:ext cx="5394960" cy="3474720"/>
+            <a:off x="3063240" y="2057400"/>
+            <a:ext cx="274320" cy="365760"/>
+          </a:xfrm>
+          <a:prstGeom prst="rightArrow">
+            <a:avLst/>
+          </a:prstGeom>
+          <a:solidFill>
+            <a:schemeClr val="accent3"/>
+          </a:solidFill>
+          <a:ln w="12700">
+            <a:solidFill>
+              <a:schemeClr val="accent3"/>
+            </a:solidFill>
+            <a:prstDash val="solid"/>
+          </a:ln>
+        </p:spPr>
+      </p:sp>
+      <p:sp>
+        <p:nvSpPr>
+          <p:cNvPr id="7" name="flow-1"/>
+          <p:cNvSpPr/>
+          <p:nvPr/>
+        </p:nvSpPr>
+        <p:spPr>
+          <a:xfrm>
+            <a:off x="3383280" y="1371600"/>
+            <a:ext cx="2468880" cy="1737360"/>
           </a:xfrm>
           <a:prstGeom prst="roundRect">
             <a:avLst>
-              <a:gd name="adj" fmla="val 3158"/>
+              <a:gd name="adj" fmla="val 6316"/>
             </a:avLst>
           </a:prstGeom>
           <a:solidFill>
@@ -18658,8 +18491,8 @@
         </p:nvSpPr>
         <p:spPr>
           <a:xfrm>
-            <a:off x="6519672" y="1554480"/>
-            <a:ext cx="4846320" cy="457200"/>
+            <a:off x="3566160" y="1508760"/>
+            <a:ext cx="2103120" cy="365760"/>
           </a:xfrm>
           <a:prstGeom prst="rect">
             <a:avLst/>
@@ -18675,14 +18508,14 @@
               <a:buNone/>
             </a:pPr>
             <a:r>
-              <a:rPr lang="en-US" sz="2000" b="1" dirty="0">
+              <a:rPr lang="en-US" sz="1400" b="1" dirty="0">
                 <a:solidFill>
                   <a:schemeClr val="tx2"/>
                 </a:solidFill>
               </a:rPr>
-              <a:t>계획했던 비용 개선</a:t>
+              <a:t>planner</a:t>
             </a:r>
-            <a:endParaRPr lang="en-US" sz="2000" dirty="0"/>
+            <a:endParaRPr lang="en-US" sz="1400" dirty="0"/>
           </a:p>
         </p:txBody>
       </p:sp>
@@ -18694,8 +18527,110 @@
         </p:nvSpPr>
         <p:spPr>
           <a:xfrm>
-            <a:off x="6519672" y="2103120"/>
-            <a:ext cx="4846320" cy="457200"/>
+            <a:off x="3566160" y="1920240"/>
+            <a:ext cx="2103120" cy="1097280"/>
+          </a:xfrm>
+          <a:prstGeom prst="rect">
+            <a:avLst/>
+          </a:prstGeom>
+          <a:noFill/>
+          <a:ln/>
+        </p:spPr>
+        <p:txBody>
+          <a:bodyPr wrap="square" lIns="0" tIns="0" rIns="0" bIns="0" rtlCol="0" anchor="t"/>
+          <a:lstStyle/>
+          <a:p>
+            <a:pPr indent="0" marL="0">
+              <a:buNone/>
+            </a:pPr>
+            <a:r>
+              <a:rPr lang="en-US" sz="1500" dirty="0">
+                <a:solidFill>
+                  <a:schemeClr val="tx1"/>
+                </a:solidFill>
+              </a:rPr>
+              <a:t>시스템명 없음</a:t>
+            </a:r>
+            <a:endParaRPr lang="en-US" sz="1500" dirty="0"/>
+          </a:p>
+          <a:p>
+            <a:pPr indent="0" marL="0">
+              <a:buNone/>
+            </a:pPr>
+            <a:r>
+              <a:rPr lang="en-US" sz="1500" dirty="0">
+                <a:solidFill>
+                  <a:schemeClr val="tx1"/>
+                </a:solidFill>
+              </a:rPr>
+              <a:t>→ auth-service 폴백</a:t>
+            </a:r>
+            <a:endParaRPr lang="en-US" sz="1500" dirty="0"/>
+          </a:p>
+        </p:txBody>
+      </p:sp>
+      <p:sp>
+        <p:nvSpPr>
+          <p:cNvPr id="10" name="arrow-1"/>
+          <p:cNvSpPr/>
+          <p:nvPr/>
+        </p:nvSpPr>
+        <p:spPr>
+          <a:xfrm>
+            <a:off x="5897880" y="2057400"/>
+            <a:ext cx="274320" cy="365760"/>
+          </a:xfrm>
+          <a:prstGeom prst="rightArrow">
+            <a:avLst/>
+          </a:prstGeom>
+          <a:solidFill>
+            <a:schemeClr val="accent3"/>
+          </a:solidFill>
+          <a:ln w="12700">
+            <a:solidFill>
+              <a:schemeClr val="accent3"/>
+            </a:solidFill>
+            <a:prstDash val="solid"/>
+          </a:ln>
+        </p:spPr>
+      </p:sp>
+      <p:sp>
+        <p:nvSpPr>
+          <p:cNvPr id="11" name="flow-2"/>
+          <p:cNvSpPr/>
+          <p:nvPr/>
+        </p:nvSpPr>
+        <p:spPr>
+          <a:xfrm>
+            <a:off x="6217920" y="1371600"/>
+            <a:ext cx="2468880" cy="1737360"/>
+          </a:xfrm>
+          <a:prstGeom prst="roundRect">
+            <a:avLst>
+              <a:gd name="adj" fmla="val 6316"/>
+            </a:avLst>
+          </a:prstGeom>
+          <a:solidFill>
+            <a:schemeClr val="bg2"/>
+          </a:solidFill>
+          <a:ln w="12700">
+            <a:solidFill>
+              <a:schemeClr val="bg2"/>
+            </a:solidFill>
+            <a:prstDash val="solid"/>
+          </a:ln>
+        </p:spPr>
+      </p:sp>
+      <p:sp>
+        <p:nvSpPr>
+          <p:cNvPr id="12" name="Text 10"/>
+          <p:cNvSpPr txBox="1"/>
+          <p:nvPr/>
+        </p:nvSpPr>
+        <p:spPr>
+          <a:xfrm>
+            <a:off x="6400800" y="1508760"/>
+            <a:ext cx="2103120" cy="365760"/>
           </a:xfrm>
           <a:prstGeom prst="rect">
             <a:avLst/>
@@ -18711,30 +18646,27 @@
               <a:buNone/>
             </a:pPr>
             <a:r>
-              <a:rPr lang="en-US" sz="1500" dirty="0">
+              <a:rPr lang="en-US" sz="1400" b="1" dirty="0">
                 <a:solidFill>
-                  <a:schemeClr val="accent2"/>
+                  <a:schemeClr val="tx2"/>
                 </a:solidFill>
-                <a:latin typeface="Courier New" pitchFamily="34" charset="0"/>
-                <a:ea typeface="Courier New" pitchFamily="34" charset="-122"/>
-                <a:cs typeface="Courier New" pitchFamily="34" charset="-120"/>
               </a:rPr>
-              <a:t>fast = gpt-4o-mini / quality = gpt-4o</a:t>
+              <a:t>모니터링 알림</a:t>
             </a:r>
-            <a:endParaRPr lang="en-US" sz="1500" dirty="0"/>
+            <a:endParaRPr lang="en-US" sz="1400" dirty="0"/>
           </a:p>
         </p:txBody>
       </p:sp>
       <p:sp>
         <p:nvSpPr>
-          <p:cNvPr id="10" name="Text 8"/>
+          <p:cNvPr id="13" name="Text 11"/>
           <p:cNvSpPr txBox="1"/>
           <p:nvPr/>
         </p:nvSpPr>
         <p:spPr>
           <a:xfrm>
-            <a:off x="6519672" y="2743200"/>
-            <a:ext cx="4846320" cy="2011680"/>
+            <a:off x="6400800" y="1920240"/>
+            <a:ext cx="2103120" cy="1097280"/>
           </a:xfrm>
           <a:prstGeom prst="rect">
             <a:avLst/>
@@ -18746,12 +18678,8 @@
           <a:bodyPr wrap="square" lIns="0" tIns="0" rIns="0" bIns="0" rtlCol="0" anchor="t"/>
           <a:lstStyle/>
           <a:p>
-            <a:pPr marL="342900" indent="-342900">
-              <a:spcAft>
-                <a:spcPts val="800"/>
-              </a:spcAft>
-              <a:buSzPct val="100000"/>
-              <a:buChar char="•"/>
+            <a:pPr indent="0" marL="0">
+              <a:buNone/>
             </a:pPr>
             <a:r>
               <a:rPr lang="en-US" sz="1500" dirty="0">
@@ -18759,17 +18687,13 @@
                   <a:schemeClr val="tx1"/>
                 </a:solidFill>
               </a:rPr>
-              <a:t>'역할별 모델 분리'는 base에 이미 있었다 (src/server.py:50-56).</a:t>
+              <a:t>"p95 latency 2.4s"</a:t>
             </a:r>
             <a:endParaRPr lang="en-US" sz="1500" dirty="0"/>
           </a:p>
           <a:p>
-            <a:pPr marL="342900" indent="-342900">
-              <a:spcAft>
-                <a:spcPts val="800"/>
-              </a:spcAft>
-              <a:buSzPct val="100000"/>
-              <a:buChar char="•"/>
+            <a:pPr indent="0" marL="0">
+              <a:buNone/>
             </a:pPr>
             <a:r>
               <a:rPr lang="en-US" sz="1500" dirty="0">
@@ -18777,7 +18701,7 @@
                   <a:schemeClr val="tx1"/>
                 </a:solidFill>
               </a:rPr>
-              <a:t>그래서 비용 축을 다시 정했다: 1차 초안은 저가 모델, 반려될 때만 gpt-4o (캐스케이드) + 반복 질의 캐시.</a:t>
+              <a:t>키워드 'latency' 일치</a:t>
             </a:r>
             <a:endParaRPr lang="en-US" sz="1500" dirty="0"/>
           </a:p>
@@ -18785,14 +18709,66 @@
       </p:sp>
       <p:sp>
         <p:nvSpPr>
-          <p:cNvPr id="11" name="Text 9"/>
+          <p:cNvPr id="14" name="arrow-2"/>
+          <p:cNvSpPr/>
+          <p:nvPr/>
+        </p:nvSpPr>
+        <p:spPr>
+          <a:xfrm>
+            <a:off x="8732520" y="2057400"/>
+            <a:ext cx="274320" cy="365760"/>
+          </a:xfrm>
+          <a:prstGeom prst="rightArrow">
+            <a:avLst/>
+          </a:prstGeom>
+          <a:solidFill>
+            <a:schemeClr val="accent3"/>
+          </a:solidFill>
+          <a:ln w="12700">
+            <a:solidFill>
+              <a:schemeClr val="accent3"/>
+            </a:solidFill>
+            <a:prstDash val="solid"/>
+          </a:ln>
+        </p:spPr>
+      </p:sp>
+      <p:sp>
+        <p:nvSpPr>
+          <p:cNvPr id="15" name="flow-3"/>
+          <p:cNvSpPr/>
+          <p:nvPr/>
+        </p:nvSpPr>
+        <p:spPr>
+          <a:xfrm>
+            <a:off x="9052560" y="1371600"/>
+            <a:ext cx="2468880" cy="1737360"/>
+          </a:xfrm>
+          <a:prstGeom prst="roundRect">
+            <a:avLst>
+              <a:gd name="adj" fmla="val 6316"/>
+            </a:avLst>
+          </a:prstGeom>
+          <a:solidFill>
+            <a:schemeClr val="accent1"/>
+          </a:solidFill>
+          <a:ln w="12700">
+            <a:solidFill>
+              <a:schemeClr val="accent1"/>
+            </a:solidFill>
+            <a:prstDash val="solid"/>
+          </a:ln>
+        </p:spPr>
+      </p:sp>
+      <p:sp>
+        <p:nvSpPr>
+          <p:cNvPr id="16" name="Text 14"/>
           <p:cNvSpPr txBox="1"/>
           <p:nvPr/>
         </p:nvSpPr>
         <p:spPr>
           <a:xfrm>
-            <a:off x="548640" y="5166360"/>
-            <a:ext cx="11064240" cy="548640"/>
+            <a:off x="9235440" y="1508760"/>
+            <a:ext cx="2103120" cy="365760"/>
           </a:xfrm>
           <a:prstGeom prst="rect">
             <a:avLst/>
@@ -18808,14 +18784,401 @@
               <a:buNone/>
             </a:pPr>
             <a:r>
-              <a:rPr lang="en-US" sz="1600" b="1" dirty="0">
+              <a:rPr lang="en-US" sz="1400" b="1" dirty="0">
                 <a:solidFill>
-                  <a:schemeClr val="accent6"/>
+                  <a:schemeClr val="bg1"/>
                 </a:solidFill>
               </a:rPr>
-              <a:t>→ 개선 대상: 런북 선택(RAG) · 검증 기준(LLM Judge) · 비용(캐스케이드·캐시) · 운영 안정성(비동기·부분 실패)</a:t>
+              <a:t>선택된 런북</a:t>
             </a:r>
-            <a:endParaRPr lang="en-US" sz="1600" dirty="0"/>
+            <a:endParaRPr lang="en-US" sz="1400" dirty="0"/>
+          </a:p>
+        </p:txBody>
+      </p:sp>
+      <p:sp>
+        <p:nvSpPr>
+          <p:cNvPr id="17" name="Text 15"/>
+          <p:cNvSpPr txBox="1"/>
+          <p:nvPr/>
+        </p:nvSpPr>
+        <p:spPr>
+          <a:xfrm>
+            <a:off x="9235440" y="1920240"/>
+            <a:ext cx="2103120" cy="1097280"/>
+          </a:xfrm>
+          <a:prstGeom prst="rect">
+            <a:avLst/>
+          </a:prstGeom>
+          <a:noFill/>
+          <a:ln/>
+        </p:spPr>
+        <p:txBody>
+          <a:bodyPr wrap="square" lIns="0" tIns="0" rIns="0" bIns="0" rtlCol="0" anchor="t"/>
+          <a:lstStyle/>
+          <a:p>
+            <a:pPr indent="0" marL="0">
+              <a:buNone/>
+            </a:pPr>
+            <a:r>
+              <a:rPr lang="en-US" sz="1500" dirty="0">
+                <a:solidFill>
+                  <a:schemeClr val="bg1"/>
+                </a:solidFill>
+              </a:rPr>
+              <a:t>high-latency</a:t>
+            </a:r>
+            <a:endParaRPr lang="en-US" sz="1500" dirty="0"/>
+          </a:p>
+          <a:p>
+            <a:pPr indent="0" marL="0">
+              <a:buNone/>
+            </a:pPr>
+            <a:r>
+              <a:rPr lang="en-US" sz="1500" dirty="0">
+                <a:solidFill>
+                  <a:schemeClr val="bg1"/>
+                </a:solidFill>
+              </a:rPr>
+              <a:t>(응답 지연 절차)</a:t>
+            </a:r>
+            <a:endParaRPr lang="en-US" sz="1500" dirty="0"/>
+          </a:p>
+        </p:txBody>
+      </p:sp>
+      <p:sp>
+        <p:nvSpPr>
+          <p:cNvPr id="18" name="stat-basemiss"/>
+          <p:cNvSpPr/>
+          <p:nvPr/>
+        </p:nvSpPr>
+        <p:spPr>
+          <a:xfrm>
+            <a:off x="548640" y="3429000"/>
+            <a:ext cx="3520440" cy="1828800"/>
+          </a:xfrm>
+          <a:prstGeom prst="roundRect">
+            <a:avLst>
+              <a:gd name="adj" fmla="val 6000"/>
+            </a:avLst>
+          </a:prstGeom>
+          <a:solidFill>
+            <a:schemeClr val="bg2"/>
+          </a:solidFill>
+          <a:ln w="12700">
+            <a:solidFill>
+              <a:schemeClr val="bg2"/>
+            </a:solidFill>
+            <a:prstDash val="solid"/>
+          </a:ln>
+        </p:spPr>
+      </p:sp>
+      <p:sp>
+        <p:nvSpPr>
+          <p:cNvPr id="19" name="Text 17"/>
+          <p:cNvSpPr txBox="1"/>
+          <p:nvPr/>
+        </p:nvSpPr>
+        <p:spPr>
+          <a:xfrm>
+            <a:off x="822960" y="3630168"/>
+            <a:ext cx="2971800" cy="868680"/>
+          </a:xfrm>
+          <a:prstGeom prst="rect">
+            <a:avLst/>
+          </a:prstGeom>
+          <a:noFill/>
+          <a:ln/>
+        </p:spPr>
+        <p:txBody>
+          <a:bodyPr wrap="square" lIns="0" tIns="0" rIns="0" bIns="0" rtlCol="0" anchor="ctr"/>
+          <a:lstStyle/>
+          <a:p>
+            <a:pPr indent="0" marL="0">
+              <a:buNone/>
+            </a:pPr>
+            <a:r>
+              <a:rPr lang="en-US" sz="3600" b="1" dirty="0">
+                <a:solidFill>
+                  <a:schemeClr val="accent1"/>
+                </a:solidFill>
+              </a:rPr>
+              <a:t>56%</a:t>
+            </a:r>
+            <a:endParaRPr lang="en-US" sz="3600" dirty="0"/>
+          </a:p>
+        </p:txBody>
+      </p:sp>
+      <p:sp>
+        <p:nvSpPr>
+          <p:cNvPr id="20" name="Text 18"/>
+          <p:cNvSpPr txBox="1"/>
+          <p:nvPr/>
+        </p:nvSpPr>
+        <p:spPr>
+          <a:xfrm>
+            <a:off x="822960" y="4526280"/>
+            <a:ext cx="2971800" cy="640080"/>
+          </a:xfrm>
+          <a:prstGeom prst="rect">
+            <a:avLst/>
+          </a:prstGeom>
+          <a:noFill/>
+          <a:ln/>
+        </p:spPr>
+        <p:txBody>
+          <a:bodyPr wrap="square" lIns="0" tIns="0" rIns="0" bIns="0" rtlCol="0" anchor="t"/>
+          <a:lstStyle/>
+          <a:p>
+            <a:pPr indent="0" marL="0">
+              <a:buNone/>
+            </a:pPr>
+            <a:r>
+              <a:rPr lang="en-US" sz="1350" dirty="0">
+                <a:solidFill>
+                  <a:schemeClr val="tx1"/>
+                </a:solidFill>
+              </a:rPr>
+              <a:t>holdout에서 base가 정답 런북을</a:t>
+            </a:r>
+            <a:endParaRPr lang="en-US" sz="1350" dirty="0"/>
+          </a:p>
+          <a:p>
+            <a:pPr indent="0" marL="0">
+              <a:buNone/>
+            </a:pPr>
+            <a:r>
+              <a:rPr lang="en-US" sz="1350" dirty="0">
+                <a:solidFill>
+                  <a:schemeClr val="tx1"/>
+                </a:solidFill>
+              </a:rPr>
+              <a:t>근거에 못 넣은 비율</a:t>
+            </a:r>
+            <a:endParaRPr lang="en-US" sz="1350" dirty="0"/>
+          </a:p>
+        </p:txBody>
+      </p:sp>
+      <p:sp>
+        <p:nvSpPr>
+          <p:cNvPr id="21" name="stat-bias"/>
+          <p:cNvSpPr/>
+          <p:nvPr/>
+        </p:nvSpPr>
+        <p:spPr>
+          <a:xfrm>
+            <a:off x="4334256" y="3429000"/>
+            <a:ext cx="3520440" cy="1828800"/>
+          </a:xfrm>
+          <a:prstGeom prst="roundRect">
+            <a:avLst>
+              <a:gd name="adj" fmla="val 6000"/>
+            </a:avLst>
+          </a:prstGeom>
+          <a:solidFill>
+            <a:schemeClr val="bg2"/>
+          </a:solidFill>
+          <a:ln w="12700">
+            <a:solidFill>
+              <a:schemeClr val="bg2"/>
+            </a:solidFill>
+            <a:prstDash val="solid"/>
+          </a:ln>
+        </p:spPr>
+      </p:sp>
+      <p:sp>
+        <p:nvSpPr>
+          <p:cNvPr id="22" name="Text 20"/>
+          <p:cNvSpPr txBox="1"/>
+          <p:nvPr/>
+        </p:nvSpPr>
+        <p:spPr>
+          <a:xfrm>
+            <a:off x="4608576" y="3630168"/>
+            <a:ext cx="2971800" cy="868680"/>
+          </a:xfrm>
+          <a:prstGeom prst="rect">
+            <a:avLst/>
+          </a:prstGeom>
+          <a:noFill/>
+          <a:ln/>
+        </p:spPr>
+        <p:txBody>
+          <a:bodyPr wrap="square" lIns="0" tIns="0" rIns="0" bIns="0" rtlCol="0" anchor="ctr"/>
+          <a:lstStyle/>
+          <a:p>
+            <a:pPr indent="0" marL="0">
+              <a:buNone/>
+            </a:pPr>
+            <a:r>
+              <a:rPr lang="en-US" sz="3600" b="1" dirty="0">
+                <a:solidFill>
+                  <a:schemeClr val="accent1"/>
+                </a:solidFill>
+              </a:rPr>
+              <a:t>78% vs 11%</a:t>
+            </a:r>
+            <a:endParaRPr lang="en-US" sz="3600" dirty="0"/>
+          </a:p>
+        </p:txBody>
+      </p:sp>
+      <p:sp>
+        <p:nvSpPr>
+          <p:cNvPr id="23" name="Text 21"/>
+          <p:cNvSpPr txBox="1"/>
+          <p:nvPr/>
+        </p:nvSpPr>
+        <p:spPr>
+          <a:xfrm>
+            <a:off x="4608576" y="4526280"/>
+            <a:ext cx="2971800" cy="640080"/>
+          </a:xfrm>
+          <a:prstGeom prst="rect">
+            <a:avLst/>
+          </a:prstGeom>
+          <a:noFill/>
+          <a:ln/>
+        </p:spPr>
+        <p:txBody>
+          <a:bodyPr wrap="square" lIns="0" tIns="0" rIns="0" bIns="0" rtlCol="0" anchor="t"/>
+          <a:lstStyle/>
+          <a:p>
+            <a:pPr indent="0" marL="0">
+              <a:buNone/>
+            </a:pPr>
+            <a:r>
+              <a:rPr lang="en-US" sz="1350" dirty="0">
+                <a:solidFill>
+                  <a:schemeClr val="tx1"/>
+                </a:solidFill>
+              </a:rPr>
+              <a:t>알림 문구대로 물을 때 vs 자기 말로</a:t>
+            </a:r>
+            <a:endParaRPr lang="en-US" sz="1350" dirty="0"/>
+          </a:p>
+          <a:p>
+            <a:pPr indent="0" marL="0">
+              <a:buNone/>
+            </a:pPr>
+            <a:r>
+              <a:rPr lang="en-US" sz="1350" dirty="0">
+                <a:solidFill>
+                  <a:schemeClr val="tx1"/>
+                </a:solidFill>
+              </a:rPr>
+              <a:t>물을 때 base Recall@1 (편향 검증)</a:t>
+            </a:r>
+            <a:endParaRPr lang="en-US" sz="1350" dirty="0"/>
+          </a:p>
+        </p:txBody>
+      </p:sp>
+      <p:sp>
+        <p:nvSpPr>
+          <p:cNvPr id="24" name="Text 22"/>
+          <p:cNvSpPr txBox="1"/>
+          <p:nvPr/>
+        </p:nvSpPr>
+        <p:spPr>
+          <a:xfrm>
+            <a:off x="8229600" y="3429000"/>
+            <a:ext cx="3410712" cy="2377440"/>
+          </a:xfrm>
+          <a:prstGeom prst="rect">
+            <a:avLst/>
+          </a:prstGeom>
+          <a:noFill/>
+          <a:ln/>
+        </p:spPr>
+        <p:txBody>
+          <a:bodyPr wrap="square" lIns="0" tIns="0" rIns="0" bIns="0" rtlCol="0" anchor="t"/>
+          <a:lstStyle/>
+          <a:p>
+            <a:pPr indent="0" marL="0">
+              <a:spcAft>
+                <a:spcPts val="500"/>
+              </a:spcAft>
+              <a:buNone/>
+            </a:pPr>
+            <a:r>
+              <a:rPr lang="en-US" sz="1350" b="1" dirty="0">
+                <a:solidFill>
+                  <a:schemeClr val="tx1"/>
+                </a:solidFill>
+              </a:rPr>
+              <a:t>원인 (src/agent/graph.py:192-213)</a:t>
+            </a:r>
+            <a:endParaRPr lang="en-US" sz="1350" dirty="0"/>
+          </a:p>
+          <a:p>
+            <a:pPr marL="342900" indent="-342900">
+              <a:spcAft>
+                <a:spcPts val="500"/>
+              </a:spcAft>
+              <a:buSzPct val="100000"/>
+              <a:buChar char="•"/>
+            </a:pPr>
+            <a:r>
+              <a:rPr lang="en-US" sz="1350" dirty="0">
+                <a:solidFill>
+                  <a:schemeClr val="tx1"/>
+                </a:solidFill>
+              </a:rPr>
+              <a:t>조사한 시스템의 알림 문구에서 키워드를 순서대로 찾아 첫 일치로 런북 1개를 고른다.</a:t>
+            </a:r>
+            <a:endParaRPr lang="en-US" sz="1350" dirty="0"/>
+          </a:p>
+          <a:p>
+            <a:pPr marL="342900" indent="-342900">
+              <a:spcAft>
+                <a:spcPts val="500"/>
+              </a:spcAft>
+              <a:buSzPct val="100000"/>
+              <a:buChar char="•"/>
+            </a:pPr>
+            <a:r>
+              <a:rPr lang="en-US" sz="1350" dirty="0">
+                <a:solidFill>
+                  <a:schemeClr val="tx1"/>
+                </a:solidFill>
+              </a:rPr>
+              <a:t>질의 문장은 쓰지 않는다. 당직자가 알림과 다른 말로 물으면 거의 맞히지 못한다.</a:t>
+            </a:r>
+            <a:endParaRPr lang="en-US" sz="1350" dirty="0"/>
+          </a:p>
+        </p:txBody>
+      </p:sp>
+      <p:sp>
+        <p:nvSpPr>
+          <p:cNvPr id="25" name="Text 23"/>
+          <p:cNvSpPr txBox="1"/>
+          <p:nvPr/>
+        </p:nvSpPr>
+        <p:spPr>
+          <a:xfrm>
+            <a:off x="548640" y="6053328"/>
+            <a:ext cx="11064240" cy="274320"/>
+          </a:xfrm>
+          <a:prstGeom prst="rect">
+            <a:avLst/>
+          </a:prstGeom>
+          <a:noFill/>
+          <a:ln/>
+        </p:spPr>
+        <p:txBody>
+          <a:bodyPr wrap="square" lIns="0" tIns="0" rIns="0" bIns="0" rtlCol="0" anchor="ctr"/>
+          <a:lstStyle/>
+          <a:p>
+            <a:pPr indent="0" marL="0">
+              <a:buNone/>
+            </a:pPr>
+            <a:r>
+              <a:rPr lang="en-US" sz="1050" dirty="0">
+                <a:solidFill>
+                  <a:schemeClr val="accent3"/>
+                </a:solidFill>
+              </a:rPr>
+              <a:t>holdout 정상 질의 aligned 9건 / paraphrased 9건, 3회 평균</a:t>
+            </a:r>
+            <a:endParaRPr lang="en-US" sz="1050" dirty="0"/>
           </a:p>
         </p:txBody>
       </p:sp>
@@ -18921,6 +19284,470 @@
                   <a:schemeClr val="tx2"/>
                 </a:solidFill>
               </a:rPr>
+              <a:t>문제 2: 검증은 형식만 보고, 모델 분리는 이미 돼 있었다</a:t>
+            </a:r>
+            <a:endParaRPr lang="en-US" sz="2800" dirty="0"/>
+          </a:p>
+        </p:txBody>
+      </p:sp>
+      <p:sp>
+        <p:nvSpPr>
+          <p:cNvPr id="3" name="validator-card"/>
+          <p:cNvSpPr/>
+          <p:nvPr/>
+        </p:nvSpPr>
+        <p:spPr>
+          <a:xfrm>
+            <a:off x="548640" y="1371600"/>
+            <a:ext cx="5394960" cy="3474720"/>
+          </a:xfrm>
+          <a:prstGeom prst="roundRect">
+            <a:avLst>
+              <a:gd name="adj" fmla="val 3158"/>
+            </a:avLst>
+          </a:prstGeom>
+          <a:solidFill>
+            <a:schemeClr val="bg2"/>
+          </a:solidFill>
+          <a:ln w="12700">
+            <a:solidFill>
+              <a:schemeClr val="bg2"/>
+            </a:solidFill>
+            <a:prstDash val="solid"/>
+          </a:ln>
+        </p:spPr>
+      </p:sp>
+      <p:sp>
+        <p:nvSpPr>
+          <p:cNvPr id="4" name="Text 2"/>
+          <p:cNvSpPr txBox="1"/>
+          <p:nvPr/>
+        </p:nvSpPr>
+        <p:spPr>
+          <a:xfrm>
+            <a:off x="822960" y="1554480"/>
+            <a:ext cx="4846320" cy="457200"/>
+          </a:xfrm>
+          <a:prstGeom prst="rect">
+            <a:avLst/>
+          </a:prstGeom>
+          <a:noFill/>
+          <a:ln/>
+        </p:spPr>
+        <p:txBody>
+          <a:bodyPr wrap="square" lIns="0" tIns="0" rIns="0" bIns="0" rtlCol="0" anchor="ctr"/>
+          <a:lstStyle/>
+          <a:p>
+            <a:pPr indent="0" marL="0">
+              <a:buNone/>
+            </a:pPr>
+            <a:r>
+              <a:rPr lang="en-US" sz="2000" b="1" dirty="0">
+                <a:solidFill>
+                  <a:schemeClr val="tx2"/>
+                </a:solidFill>
+              </a:rPr>
+              <a:t>규칙 Validator</a:t>
+            </a:r>
+            <a:endParaRPr lang="en-US" sz="2000" dirty="0"/>
+          </a:p>
+        </p:txBody>
+      </p:sp>
+      <p:sp>
+        <p:nvSpPr>
+          <p:cNvPr id="5" name="Text 3"/>
+          <p:cNvSpPr txBox="1"/>
+          <p:nvPr/>
+        </p:nvSpPr>
+        <p:spPr>
+          <a:xfrm>
+            <a:off x="822960" y="2103120"/>
+            <a:ext cx="4846320" cy="457200"/>
+          </a:xfrm>
+          <a:prstGeom prst="rect">
+            <a:avLst/>
+          </a:prstGeom>
+          <a:noFill/>
+          <a:ln/>
+        </p:spPr>
+        <p:txBody>
+          <a:bodyPr wrap="square" lIns="0" tIns="0" rIns="0" bIns="0" rtlCol="0" anchor="ctr"/>
+          <a:lstStyle/>
+          <a:p>
+            <a:pPr indent="0" marL="0">
+              <a:buNone/>
+            </a:pPr>
+            <a:r>
+              <a:rPr lang="en-US" sz="1500" dirty="0">
+                <a:solidFill>
+                  <a:schemeClr val="accent1"/>
+                </a:solidFill>
+                <a:latin typeface="Courier New" pitchFamily="34" charset="0"/>
+                <a:ea typeface="Courier New" pitchFamily="34" charset="-122"/>
+                <a:cs typeface="Courier New" pitchFamily="34" charset="-120"/>
+              </a:rPr>
+              <a:t>len(draft) &gt;= 30 and "1)" in draft</a:t>
+            </a:r>
+            <a:endParaRPr lang="en-US" sz="1500" dirty="0"/>
+          </a:p>
+        </p:txBody>
+      </p:sp>
+      <p:sp>
+        <p:nvSpPr>
+          <p:cNvPr id="6" name="Text 4"/>
+          <p:cNvSpPr txBox="1"/>
+          <p:nvPr/>
+        </p:nvSpPr>
+        <p:spPr>
+          <a:xfrm>
+            <a:off x="822960" y="2743200"/>
+            <a:ext cx="4846320" cy="2011680"/>
+          </a:xfrm>
+          <a:prstGeom prst="rect">
+            <a:avLst/>
+          </a:prstGeom>
+          <a:noFill/>
+          <a:ln/>
+        </p:spPr>
+        <p:txBody>
+          <a:bodyPr wrap="square" lIns="0" tIns="0" rIns="0" bIns="0" rtlCol="0" anchor="t"/>
+          <a:lstStyle/>
+          <a:p>
+            <a:pPr marL="342900" indent="-342900">
+              <a:spcAft>
+                <a:spcPts val="800"/>
+              </a:spcAft>
+              <a:buSzPct val="100000"/>
+              <a:buChar char="•"/>
+            </a:pPr>
+            <a:r>
+              <a:rPr lang="en-US" sz="1500" dirty="0">
+                <a:solidFill>
+                  <a:schemeClr val="tx1"/>
+                </a:solidFill>
+              </a:rPr>
+              <a:t>질문과 맞는지, 근거에 있는지는 보지 않는다.</a:t>
+            </a:r>
+            <a:endParaRPr lang="en-US" sz="1500" dirty="0"/>
+          </a:p>
+          <a:p>
+            <a:pPr marL="342900" indent="-342900">
+              <a:spcAft>
+                <a:spcPts val="800"/>
+              </a:spcAft>
+              <a:buSzPct val="100000"/>
+              <a:buChar char="•"/>
+            </a:pPr>
+            <a:r>
+              <a:rPr lang="en-US" sz="1500" dirty="0">
+                <a:solidFill>
+                  <a:schemeClr val="tx1"/>
+                </a:solidFill>
+              </a:rPr>
+              <a:t>실측: base 60건 x 3회에서 반려 0회. 응답 지연 절차로 DB 다운에 답해도 통과한다.</a:t>
+            </a:r>
+            <a:endParaRPr lang="en-US" sz="1500" dirty="0"/>
+          </a:p>
+        </p:txBody>
+      </p:sp>
+      <p:sp>
+        <p:nvSpPr>
+          <p:cNvPr id="7" name="tiering-card"/>
+          <p:cNvSpPr/>
+          <p:nvPr/>
+        </p:nvSpPr>
+        <p:spPr>
+          <a:xfrm>
+            <a:off x="6245352" y="1371600"/>
+            <a:ext cx="5394960" cy="3474720"/>
+          </a:xfrm>
+          <a:prstGeom prst="roundRect">
+            <a:avLst>
+              <a:gd name="adj" fmla="val 3158"/>
+            </a:avLst>
+          </a:prstGeom>
+          <a:solidFill>
+            <a:schemeClr val="bg2"/>
+          </a:solidFill>
+          <a:ln w="12700">
+            <a:solidFill>
+              <a:schemeClr val="bg2"/>
+            </a:solidFill>
+            <a:prstDash val="solid"/>
+          </a:ln>
+        </p:spPr>
+      </p:sp>
+      <p:sp>
+        <p:nvSpPr>
+          <p:cNvPr id="8" name="Text 6"/>
+          <p:cNvSpPr txBox="1"/>
+          <p:nvPr/>
+        </p:nvSpPr>
+        <p:spPr>
+          <a:xfrm>
+            <a:off x="6519672" y="1554480"/>
+            <a:ext cx="4846320" cy="457200"/>
+          </a:xfrm>
+          <a:prstGeom prst="rect">
+            <a:avLst/>
+          </a:prstGeom>
+          <a:noFill/>
+          <a:ln/>
+        </p:spPr>
+        <p:txBody>
+          <a:bodyPr wrap="square" lIns="0" tIns="0" rIns="0" bIns="0" rtlCol="0" anchor="ctr"/>
+          <a:lstStyle/>
+          <a:p>
+            <a:pPr indent="0" marL="0">
+              <a:buNone/>
+            </a:pPr>
+            <a:r>
+              <a:rPr lang="en-US" sz="2000" b="1" dirty="0">
+                <a:solidFill>
+                  <a:schemeClr val="tx2"/>
+                </a:solidFill>
+              </a:rPr>
+              <a:t>계획했던 비용 개선</a:t>
+            </a:r>
+            <a:endParaRPr lang="en-US" sz="2000" dirty="0"/>
+          </a:p>
+        </p:txBody>
+      </p:sp>
+      <p:sp>
+        <p:nvSpPr>
+          <p:cNvPr id="9" name="Text 7"/>
+          <p:cNvSpPr txBox="1"/>
+          <p:nvPr/>
+        </p:nvSpPr>
+        <p:spPr>
+          <a:xfrm>
+            <a:off x="6519672" y="2103120"/>
+            <a:ext cx="4846320" cy="457200"/>
+          </a:xfrm>
+          <a:prstGeom prst="rect">
+            <a:avLst/>
+          </a:prstGeom>
+          <a:noFill/>
+          <a:ln/>
+        </p:spPr>
+        <p:txBody>
+          <a:bodyPr wrap="square" lIns="0" tIns="0" rIns="0" bIns="0" rtlCol="0" anchor="ctr"/>
+          <a:lstStyle/>
+          <a:p>
+            <a:pPr indent="0" marL="0">
+              <a:buNone/>
+            </a:pPr>
+            <a:r>
+              <a:rPr lang="en-US" sz="1500" dirty="0">
+                <a:solidFill>
+                  <a:schemeClr val="accent2"/>
+                </a:solidFill>
+                <a:latin typeface="Courier New" pitchFamily="34" charset="0"/>
+                <a:ea typeface="Courier New" pitchFamily="34" charset="-122"/>
+                <a:cs typeface="Courier New" pitchFamily="34" charset="-120"/>
+              </a:rPr>
+              <a:t>fast = gpt-4o-mini / quality = gpt-4o</a:t>
+            </a:r>
+            <a:endParaRPr lang="en-US" sz="1500" dirty="0"/>
+          </a:p>
+        </p:txBody>
+      </p:sp>
+      <p:sp>
+        <p:nvSpPr>
+          <p:cNvPr id="10" name="Text 8"/>
+          <p:cNvSpPr txBox="1"/>
+          <p:nvPr/>
+        </p:nvSpPr>
+        <p:spPr>
+          <a:xfrm>
+            <a:off x="6519672" y="2743200"/>
+            <a:ext cx="4846320" cy="2011680"/>
+          </a:xfrm>
+          <a:prstGeom prst="rect">
+            <a:avLst/>
+          </a:prstGeom>
+          <a:noFill/>
+          <a:ln/>
+        </p:spPr>
+        <p:txBody>
+          <a:bodyPr wrap="square" lIns="0" tIns="0" rIns="0" bIns="0" rtlCol="0" anchor="t"/>
+          <a:lstStyle/>
+          <a:p>
+            <a:pPr marL="342900" indent="-342900">
+              <a:spcAft>
+                <a:spcPts val="800"/>
+              </a:spcAft>
+              <a:buSzPct val="100000"/>
+              <a:buChar char="•"/>
+            </a:pPr>
+            <a:r>
+              <a:rPr lang="en-US" sz="1500" dirty="0">
+                <a:solidFill>
+                  <a:schemeClr val="tx1"/>
+                </a:solidFill>
+              </a:rPr>
+              <a:t>'역할별 모델 분리'는 base에 이미 있었다 (src/server.py:50-56).</a:t>
+            </a:r>
+            <a:endParaRPr lang="en-US" sz="1500" dirty="0"/>
+          </a:p>
+          <a:p>
+            <a:pPr marL="342900" indent="-342900">
+              <a:spcAft>
+                <a:spcPts val="800"/>
+              </a:spcAft>
+              <a:buSzPct val="100000"/>
+              <a:buChar char="•"/>
+            </a:pPr>
+            <a:r>
+              <a:rPr lang="en-US" sz="1500" dirty="0">
+                <a:solidFill>
+                  <a:schemeClr val="tx1"/>
+                </a:solidFill>
+              </a:rPr>
+              <a:t>그래서 비용 축을 다시 정했다: 1차 초안은 저가 모델, 반려될 때만 gpt-4o (캐스케이드) + 반복 질의 캐시.</a:t>
+            </a:r>
+            <a:endParaRPr lang="en-US" sz="1500" dirty="0"/>
+          </a:p>
+        </p:txBody>
+      </p:sp>
+      <p:sp>
+        <p:nvSpPr>
+          <p:cNvPr id="11" name="Text 9"/>
+          <p:cNvSpPr txBox="1"/>
+          <p:nvPr/>
+        </p:nvSpPr>
+        <p:spPr>
+          <a:xfrm>
+            <a:off x="548640" y="5166360"/>
+            <a:ext cx="11064240" cy="548640"/>
+          </a:xfrm>
+          <a:prstGeom prst="rect">
+            <a:avLst/>
+          </a:prstGeom>
+          <a:noFill/>
+          <a:ln/>
+        </p:spPr>
+        <p:txBody>
+          <a:bodyPr wrap="square" lIns="0" tIns="0" rIns="0" bIns="0" rtlCol="0" anchor="ctr"/>
+          <a:lstStyle/>
+          <a:p>
+            <a:pPr indent="0" marL="0">
+              <a:buNone/>
+            </a:pPr>
+            <a:r>
+              <a:rPr lang="en-US" sz="1600" b="1" dirty="0">
+                <a:solidFill>
+                  <a:schemeClr val="accent6"/>
+                </a:solidFill>
+              </a:rPr>
+              <a:t>→ 개선 대상: 런북 선택(RAG) · 검증 기준(LLM Judge) · 비용(캐스케이드·캐시) · 운영 안정성(비동기·부분 실패)</a:t>
+            </a:r>
+            <a:endParaRPr lang="en-US" sz="1600" dirty="0"/>
+          </a:p>
+        </p:txBody>
+      </p:sp>
+      <p:sp>
+        <p:nvSpPr>
+          <p:cNvPr id="25" name="Slide Number Placeholder 0"/>
+          <p:cNvSpPr>
+            <a:spLocks noGrp="1"/>
+          </p:cNvSpPr>
+          <p:nvPr>
+            <p:ph type="sldNum" sz="quarter" idx="4294967295"/>
+          </p:nvPr>
+        </p:nvSpPr>
+        <p:spPr>
+          <a:xfrm>
+            <a:off x="11155680" y="6400800"/>
+            <a:ext cx="457200" cy="274320"/>
+          </a:xfrm>
+          <a:prstGeom prst="rect">
+            <a:avLst/>
+          </a:prstGeom>
+          <a:extLst>
+            <a:ext uri="{C572A759-6A51-4108-AA02-DFA0A04FC94B}">
+              <ma14:wrappingTextBoxFlag xmlns:ma14="http://schemas.microsoft.com/office/mac/drawingml/2011/main" val="0"/>
+            </a:ext>
+          </a:extLst>
+        </p:spPr>
+        <p:txBody>
+          <a:bodyPr/>
+          <a:lstStyle>
+            <a:lvl1pPr>
+              <a:defRPr sz="1000">
+                <a:solidFill>
+                  <a:schemeClr val="accent3"/>
+                </a:solidFill>
+              </a:defRPr>
+            </a:lvl1pPr>
+          </a:lstStyle>
+          <a:p>
+            <a:pPr algn="r"/>
+            <a:fld id="{F7021451-1387-4CA6-816F-3879F97B5CBC}" type="slidenum">
+              <a:rPr b="0" lang="en-US"/>
+              <a:t>7</a:t>
+            </a:fld>
+            <a:endParaRPr lang="en-US"/>
+          </a:p>
+        </p:txBody>
+      </p:sp>
+    </p:spTree>
+  </p:cSld>
+  <p:clrMapOvr>
+    <a:masterClrMapping/>
+  </p:clrMapOvr>
+</p:sld>
+</file>
+
+<file path=ppt/slides/slide8.xml><?xml version="1.0" encoding="utf-8"?>
+<p:sld xmlns:a="http://schemas.openxmlformats.org/drawingml/2006/main" xmlns:r="http://schemas.openxmlformats.org/officeDocument/2006/relationships" xmlns:p="http://schemas.openxmlformats.org/presentationml/2006/main">
+  <p:cSld name="Slide 8">
+    <p:spTree>
+      <p:nvGrpSpPr>
+        <p:cNvPr id="1" name=""/>
+        <p:cNvGrpSpPr/>
+        <p:nvPr/>
+      </p:nvGrpSpPr>
+      <p:grpSpPr>
+        <a:xfrm>
+          <a:off x="0" y="0"/>
+          <a:ext cx="0" cy="0"/>
+          <a:chOff x="0" y="0"/>
+          <a:chExt cx="0" cy="0"/>
+        </a:xfrm>
+      </p:grpSpPr>
+      <p:sp>
+        <p:nvSpPr>
+          <p:cNvPr id="2" name="Text 0"/>
+          <p:cNvSpPr/>
+          <p:nvPr>
+            <p:ph idx="100" type="title" hasCustomPrompt="1"/>
+          </p:nvPr>
+        </p:nvSpPr>
+        <p:spPr>
+          <a:xfrm>
+            <a:off x="548640" y="320040"/>
+            <a:ext cx="11064240" cy="777240"/>
+          </a:xfrm>
+          <a:prstGeom prst="rect">
+            <a:avLst/>
+          </a:prstGeom>
+          <a:noFill/>
+          <a:ln/>
+        </p:spPr>
+        <p:txBody>
+          <a:bodyPr wrap="square" lIns="0" tIns="0" rIns="0" bIns="0" rtlCol="0" anchor="ctr"/>
+          <a:lstStyle/>
+          <a:p>
+            <a:pPr algn="l" indent="0" marL="0">
+              <a:buNone/>
+            </a:pPr>
+            <a:r>
+              <a:rPr lang="en-US" sz="2800" b="1" dirty="0">
+                <a:solidFill>
+                  <a:schemeClr val="tx2"/>
+                </a:solidFill>
+              </a:rPr>
               <a:t>개선: 원본 노드는 그대로, 플래그로 하나씩 켜는 7구성</a:t>
             </a:r>
             <a:endParaRPr lang="en-US" sz="2800" dirty="0"/>
@@ -18929,7 +19756,7 @@
       </p:sp>
       <p:graphicFrame>
         <p:nvGraphicFramePr>
-          <p:cNvPr id="8" name="config-table"/>
+          <p:cNvPr id="9" name="config-table"/>
           <p:cNvGraphicFramePr>
             <a:graphicFrameLocks noGrp="1"/>
           </p:cNvGraphicFramePr>
@@ -22325,622 +23152,6 @@
             <a:pPr algn="r"/>
             <a:fld id="{F7021451-1387-4CA6-816F-3879F97B5CBC}" type="slidenum">
               <a:rPr b="0" lang="en-US"/>
-              <a:t>7</a:t>
-            </a:fld>
-            <a:endParaRPr lang="en-US"/>
-          </a:p>
-        </p:txBody>
-      </p:sp>
-    </p:spTree>
-  </p:cSld>
-  <p:clrMapOvr>
-    <a:masterClrMapping/>
-  </p:clrMapOvr>
-</p:sld>
-</file>
-
-<file path=ppt/slides/slide8.xml><?xml version="1.0" encoding="utf-8"?>
-<p:sld xmlns:a="http://schemas.openxmlformats.org/drawingml/2006/main" xmlns:r="http://schemas.openxmlformats.org/officeDocument/2006/relationships" xmlns:p="http://schemas.openxmlformats.org/presentationml/2006/main">
-  <p:cSld name="Slide 8">
-    <p:spTree>
-      <p:nvGrpSpPr>
-        <p:cNvPr id="1" name=""/>
-        <p:cNvGrpSpPr/>
-        <p:nvPr/>
-      </p:nvGrpSpPr>
-      <p:grpSpPr>
-        <a:xfrm>
-          <a:off x="0" y="0"/>
-          <a:ext cx="0" cy="0"/>
-          <a:chOff x="0" y="0"/>
-          <a:chExt cx="0" cy="0"/>
-        </a:xfrm>
-      </p:grpSpPr>
-      <p:sp>
-        <p:nvSpPr>
-          <p:cNvPr id="2" name="Text 0"/>
-          <p:cNvSpPr/>
-          <p:nvPr>
-            <p:ph idx="100" type="title" hasCustomPrompt="1"/>
-          </p:nvPr>
-        </p:nvSpPr>
-        <p:spPr>
-          <a:xfrm>
-            <a:off x="548640" y="320040"/>
-            <a:ext cx="11064240" cy="777240"/>
-          </a:xfrm>
-          <a:prstGeom prst="rect">
-            <a:avLst/>
-          </a:prstGeom>
-          <a:noFill/>
-          <a:ln/>
-        </p:spPr>
-        <p:txBody>
-          <a:bodyPr wrap="square" lIns="0" tIns="0" rIns="0" bIns="0" rtlCol="0" anchor="ctr"/>
-          <a:lstStyle/>
-          <a:p>
-            <a:pPr algn="l" indent="0" marL="0">
-              <a:buNone/>
-            </a:pPr>
-            <a:r>
-              <a:rPr lang="en-US" sz="2800" b="1" dirty="0">
-                <a:solidFill>
-                  <a:schemeClr val="tx2"/>
-                </a:solidFill>
-              </a:rPr>
-              <a:t>평가: 조정에 쓰지 않은 질의로, 반복해서, 짝지어 비교했다</a:t>
-            </a:r>
-            <a:endParaRPr lang="en-US" sz="2800" dirty="0"/>
-          </a:p>
-        </p:txBody>
-      </p:sp>
-      <p:sp>
-        <p:nvSpPr>
-          <p:cNvPr id="3" name="ev-0"/>
-          <p:cNvSpPr/>
-          <p:nvPr/>
-        </p:nvSpPr>
-        <p:spPr>
-          <a:xfrm>
-            <a:off x="548640" y="1325880"/>
-            <a:ext cx="5458968" cy="2148840"/>
-          </a:xfrm>
-          <a:prstGeom prst="roundRect">
-            <a:avLst>
-              <a:gd name="adj" fmla="val 5106"/>
-            </a:avLst>
-          </a:prstGeom>
-          <a:solidFill>
-            <a:schemeClr val="bg2"/>
-          </a:solidFill>
-          <a:ln w="12700">
-            <a:solidFill>
-              <a:schemeClr val="bg2"/>
-            </a:solidFill>
-            <a:prstDash val="solid"/>
-          </a:ln>
-        </p:spPr>
-      </p:sp>
-      <p:sp>
-        <p:nvSpPr>
-          <p:cNvPr id="4" name="Text 2"/>
-          <p:cNvSpPr txBox="1"/>
-          <p:nvPr/>
-        </p:nvSpPr>
-        <p:spPr>
-          <a:xfrm>
-            <a:off x="822960" y="1508760"/>
-            <a:ext cx="4937760" cy="411480"/>
-          </a:xfrm>
-          <a:prstGeom prst="rect">
-            <a:avLst/>
-          </a:prstGeom>
-          <a:noFill/>
-          <a:ln/>
-        </p:spPr>
-        <p:txBody>
-          <a:bodyPr wrap="square" lIns="0" tIns="0" rIns="0" bIns="0" rtlCol="0" anchor="ctr"/>
-          <a:lstStyle/>
-          <a:p>
-            <a:pPr indent="0" marL="0">
-              <a:buNone/>
-            </a:pPr>
-            <a:r>
-              <a:rPr lang="en-US" sz="1700" b="1" dirty="0">
-                <a:solidFill>
-                  <a:schemeClr val="tx2"/>
-                </a:solidFill>
-              </a:rPr>
-              <a:t>평가셋 60건</a:t>
-            </a:r>
-            <a:endParaRPr lang="en-US" sz="1700" dirty="0"/>
-          </a:p>
-        </p:txBody>
-      </p:sp>
-      <p:sp>
-        <p:nvSpPr>
-          <p:cNvPr id="5" name="Text 3"/>
-          <p:cNvSpPr txBox="1"/>
-          <p:nvPr/>
-        </p:nvSpPr>
-        <p:spPr>
-          <a:xfrm>
-            <a:off x="822960" y="2011680"/>
-            <a:ext cx="4937760" cy="1371600"/>
-          </a:xfrm>
-          <a:prstGeom prst="rect">
-            <a:avLst/>
-          </a:prstGeom>
-          <a:noFill/>
-          <a:ln/>
-        </p:spPr>
-        <p:txBody>
-          <a:bodyPr wrap="square" lIns="0" tIns="0" rIns="0" bIns="0" rtlCol="0" anchor="t"/>
-          <a:lstStyle/>
-          <a:p>
-            <a:pPr indent="0" marL="0">
-              <a:buNone/>
-            </a:pPr>
-            <a:r>
-              <a:rPr lang="en-US" sz="1350" dirty="0">
-                <a:solidFill>
-                  <a:schemeClr val="tx1"/>
-                </a:solidFill>
-              </a:rPr>
-              <a:t>dev 24건: v2 기준값(RAG 최소 유사도) 조정에만 사용</a:t>
-            </a:r>
-            <a:endParaRPr lang="en-US" sz="1350" dirty="0"/>
-          </a:p>
-          <a:p>
-            <a:pPr indent="0" marL="0">
-              <a:buNone/>
-            </a:pPr>
-            <a:r>
-              <a:rPr lang="en-US" sz="1350" dirty="0">
-                <a:solidFill>
-                  <a:schemeClr val="tx1"/>
-                </a:solidFill>
-              </a:rPr>
-              <a:t>holdout 36건: v2 구현 전에 고정해 커밋, 최종 보고에만 사용</a:t>
-            </a:r>
-            <a:endParaRPr lang="en-US" sz="1350" dirty="0"/>
-          </a:p>
-          <a:p>
-            <a:pPr indent="0" marL="0">
-              <a:buNone/>
-            </a:pPr>
-            <a:r>
-              <a:rPr lang="en-US" sz="1350" dirty="0">
-                <a:solidFill>
-                  <a:schemeClr val="tx1"/>
-                </a:solidFill>
-              </a:rPr>
-              <a:t>정상 30 · 형식 제약 8 · 복합 8 · 미등록 7 · 모호 7</a:t>
-            </a:r>
-            <a:endParaRPr lang="en-US" sz="1350" dirty="0"/>
-          </a:p>
-        </p:txBody>
-      </p:sp>
-      <p:sp>
-        <p:nvSpPr>
-          <p:cNvPr id="6" name="ev-1"/>
-          <p:cNvSpPr/>
-          <p:nvPr/>
-        </p:nvSpPr>
-        <p:spPr>
-          <a:xfrm>
-            <a:off x="6153912" y="1325880"/>
-            <a:ext cx="5458968" cy="2148840"/>
-          </a:xfrm>
-          <a:prstGeom prst="roundRect">
-            <a:avLst>
-              <a:gd name="adj" fmla="val 5106"/>
-            </a:avLst>
-          </a:prstGeom>
-          <a:solidFill>
-            <a:schemeClr val="bg2"/>
-          </a:solidFill>
-          <a:ln w="12700">
-            <a:solidFill>
-              <a:schemeClr val="bg2"/>
-            </a:solidFill>
-            <a:prstDash val="solid"/>
-          </a:ln>
-        </p:spPr>
-      </p:sp>
-      <p:sp>
-        <p:nvSpPr>
-          <p:cNvPr id="7" name="Text 5"/>
-          <p:cNvSpPr txBox="1"/>
-          <p:nvPr/>
-        </p:nvSpPr>
-        <p:spPr>
-          <a:xfrm>
-            <a:off x="6428232" y="1508760"/>
-            <a:ext cx="4937760" cy="411480"/>
-          </a:xfrm>
-          <a:prstGeom prst="rect">
-            <a:avLst/>
-          </a:prstGeom>
-          <a:noFill/>
-          <a:ln/>
-        </p:spPr>
-        <p:txBody>
-          <a:bodyPr wrap="square" lIns="0" tIns="0" rIns="0" bIns="0" rtlCol="0" anchor="ctr"/>
-          <a:lstStyle/>
-          <a:p>
-            <a:pPr indent="0" marL="0">
-              <a:buNone/>
-            </a:pPr>
-            <a:r>
-              <a:rPr lang="en-US" sz="1700" b="1" dirty="0">
-                <a:solidFill>
-                  <a:schemeClr val="tx2"/>
-                </a:solidFill>
-              </a:rPr>
-              <a:t>반복과 유의성</a:t>
-            </a:r>
-            <a:endParaRPr lang="en-US" sz="1700" dirty="0"/>
-          </a:p>
-        </p:txBody>
-      </p:sp>
-      <p:sp>
-        <p:nvSpPr>
-          <p:cNvPr id="8" name="Text 6"/>
-          <p:cNvSpPr txBox="1"/>
-          <p:nvPr/>
-        </p:nvSpPr>
-        <p:spPr>
-          <a:xfrm>
-            <a:off x="6428232" y="2011680"/>
-            <a:ext cx="4937760" cy="1371600"/>
-          </a:xfrm>
-          <a:prstGeom prst="rect">
-            <a:avLst/>
-          </a:prstGeom>
-          <a:noFill/>
-          <a:ln/>
-        </p:spPr>
-        <p:txBody>
-          <a:bodyPr wrap="square" lIns="0" tIns="0" rIns="0" bIns="0" rtlCol="0" anchor="t"/>
-          <a:lstStyle/>
-          <a:p>
-            <a:pPr indent="0" marL="0">
-              <a:buNone/>
-            </a:pPr>
-            <a:r>
-              <a:rPr lang="en-US" sz="1350" dirty="0">
-                <a:solidFill>
-                  <a:schemeClr val="tx1"/>
-                </a:solidFill>
-              </a:rPr>
-              <a:t>7구성 x 60건 x 3회 = 1,260회 실행</a:t>
-            </a:r>
-            <a:endParaRPr lang="en-US" sz="1350" dirty="0"/>
-          </a:p>
-          <a:p>
-            <a:pPr indent="0" marL="0">
-              <a:buNone/>
-            </a:pPr>
-            <a:r>
-              <a:rPr lang="en-US" sz="1350" dirty="0">
-                <a:solidFill>
-                  <a:schemeClr val="tx1"/>
-                </a:solidFill>
-              </a:rPr>
-              <a:t>반복 간 95% CI (t 분포)</a:t>
-            </a:r>
-            <a:endParaRPr lang="en-US" sz="1350" dirty="0"/>
-          </a:p>
-          <a:p>
-            <a:pPr indent="0" marL="0">
-              <a:buNone/>
-            </a:pPr>
-            <a:r>
-              <a:rPr lang="en-US" sz="1350" dirty="0">
-                <a:solidFill>
-                  <a:schemeClr val="tx1"/>
-                </a:solidFill>
-              </a:rPr>
-              <a:t>구성 간 차이는 질의 단위 paired bootstrap 2,000회</a:t>
-            </a:r>
-            <a:endParaRPr lang="en-US" sz="1350" dirty="0"/>
-          </a:p>
-        </p:txBody>
-      </p:sp>
-      <p:sp>
-        <p:nvSpPr>
-          <p:cNvPr id="9" name="ev-2"/>
-          <p:cNvSpPr/>
-          <p:nvPr/>
-        </p:nvSpPr>
-        <p:spPr>
-          <a:xfrm>
-            <a:off x="548640" y="3657600"/>
-            <a:ext cx="5458968" cy="2148840"/>
-          </a:xfrm>
-          <a:prstGeom prst="roundRect">
-            <a:avLst>
-              <a:gd name="adj" fmla="val 5106"/>
-            </a:avLst>
-          </a:prstGeom>
-          <a:solidFill>
-            <a:schemeClr val="bg2"/>
-          </a:solidFill>
-          <a:ln w="12700">
-            <a:solidFill>
-              <a:schemeClr val="bg2"/>
-            </a:solidFill>
-            <a:prstDash val="solid"/>
-          </a:ln>
-        </p:spPr>
-      </p:sp>
-      <p:sp>
-        <p:nvSpPr>
-          <p:cNvPr id="10" name="Text 8"/>
-          <p:cNvSpPr txBox="1"/>
-          <p:nvPr/>
-        </p:nvSpPr>
-        <p:spPr>
-          <a:xfrm>
-            <a:off x="822960" y="3840480"/>
-            <a:ext cx="4937760" cy="411480"/>
-          </a:xfrm>
-          <a:prstGeom prst="rect">
-            <a:avLst/>
-          </a:prstGeom>
-          <a:noFill/>
-          <a:ln/>
-        </p:spPr>
-        <p:txBody>
-          <a:bodyPr wrap="square" lIns="0" tIns="0" rIns="0" bIns="0" rtlCol="0" anchor="ctr"/>
-          <a:lstStyle/>
-          <a:p>
-            <a:pPr indent="0" marL="0">
-              <a:buNone/>
-            </a:pPr>
-            <a:r>
-              <a:rPr lang="en-US" sz="1700" b="1" dirty="0">
-                <a:solidFill>
-                  <a:schemeClr val="tx2"/>
-                </a:solidFill>
-              </a:rPr>
-              <a:t>측정 축 분리</a:t>
-            </a:r>
-            <a:endParaRPr lang="en-US" sz="1700" dirty="0"/>
-          </a:p>
-        </p:txBody>
-      </p:sp>
-      <p:sp>
-        <p:nvSpPr>
-          <p:cNvPr id="11" name="Text 9"/>
-          <p:cNvSpPr txBox="1"/>
-          <p:nvPr/>
-        </p:nvSpPr>
-        <p:spPr>
-          <a:xfrm>
-            <a:off x="822960" y="4343400"/>
-            <a:ext cx="4937760" cy="1371600"/>
-          </a:xfrm>
-          <a:prstGeom prst="rect">
-            <a:avLst/>
-          </a:prstGeom>
-          <a:noFill/>
-          <a:ln/>
-        </p:spPr>
-        <p:txBody>
-          <a:bodyPr wrap="square" lIns="0" tIns="0" rIns="0" bIns="0" rtlCol="0" anchor="t"/>
-          <a:lstStyle/>
-          <a:p>
-            <a:pPr indent="0" marL="0">
-              <a:buNone/>
-            </a:pPr>
-            <a:r>
-              <a:rPr lang="en-US" sz="1350" dirty="0">
-                <a:solidFill>
-                  <a:schemeClr val="tx1"/>
-                </a:solidFill>
-              </a:rPr>
-              <a:t>검색: Recall@k, 정답 런북 누락·혼입</a:t>
-            </a:r>
-            <a:endParaRPr lang="en-US" sz="1350" dirty="0"/>
-          </a:p>
-          <a:p>
-            <a:pPr indent="0" marL="0">
-              <a:buNone/>
-            </a:pPr>
-            <a:r>
-              <a:rPr lang="en-US" sz="1350" dirty="0">
-                <a:solidFill>
-                  <a:schemeClr val="tx1"/>
-                </a:solidFill>
-              </a:rPr>
-              <a:t>답변: 평가 Judge 4지표 + 런북 어구 포함(결정적)</a:t>
-            </a:r>
-            <a:endParaRPr lang="en-US" sz="1350" dirty="0"/>
-          </a:p>
-          <a:p>
-            <a:pPr indent="0" marL="0">
-              <a:buNone/>
-            </a:pPr>
-            <a:r>
-              <a:rPr lang="en-US" sz="1350" dirty="0">
-                <a:solidFill>
-                  <a:schemeClr val="tx1"/>
-                </a:solidFill>
-              </a:rPr>
-              <a:t>운영: 건당 비용, p50/p95 지연, 재작성, 동시성, 장애 주입</a:t>
-            </a:r>
-            <a:endParaRPr lang="en-US" sz="1350" dirty="0"/>
-          </a:p>
-        </p:txBody>
-      </p:sp>
-      <p:sp>
-        <p:nvSpPr>
-          <p:cNvPr id="12" name="ev-3"/>
-          <p:cNvSpPr/>
-          <p:nvPr/>
-        </p:nvSpPr>
-        <p:spPr>
-          <a:xfrm>
-            <a:off x="6153912" y="3657600"/>
-            <a:ext cx="5458968" cy="2148840"/>
-          </a:xfrm>
-          <a:prstGeom prst="roundRect">
-            <a:avLst>
-              <a:gd name="adj" fmla="val 5106"/>
-            </a:avLst>
-          </a:prstGeom>
-          <a:solidFill>
-            <a:schemeClr val="bg2"/>
-          </a:solidFill>
-          <a:ln w="12700">
-            <a:solidFill>
-              <a:schemeClr val="bg2"/>
-            </a:solidFill>
-            <a:prstDash val="solid"/>
-          </a:ln>
-        </p:spPr>
-      </p:sp>
-      <p:sp>
-        <p:nvSpPr>
-          <p:cNvPr id="13" name="Text 11"/>
-          <p:cNvSpPr txBox="1"/>
-          <p:nvPr/>
-        </p:nvSpPr>
-        <p:spPr>
-          <a:xfrm>
-            <a:off x="6428232" y="3840480"/>
-            <a:ext cx="4937760" cy="411480"/>
-          </a:xfrm>
-          <a:prstGeom prst="rect">
-            <a:avLst/>
-          </a:prstGeom>
-          <a:noFill/>
-          <a:ln/>
-        </p:spPr>
-        <p:txBody>
-          <a:bodyPr wrap="square" lIns="0" tIns="0" rIns="0" bIns="0" rtlCol="0" anchor="ctr"/>
-          <a:lstStyle/>
-          <a:p>
-            <a:pPr indent="0" marL="0">
-              <a:buNone/>
-            </a:pPr>
-            <a:r>
-              <a:rPr lang="en-US" sz="1700" b="1" dirty="0">
-                <a:solidFill>
-                  <a:schemeClr val="tx2"/>
-                </a:solidFill>
-              </a:rPr>
-              <a:t>평가자 검증</a:t>
-            </a:r>
-            <a:endParaRPr lang="en-US" sz="1700" dirty="0"/>
-          </a:p>
-        </p:txBody>
-      </p:sp>
-      <p:sp>
-        <p:nvSpPr>
-          <p:cNvPr id="14" name="Text 12"/>
-          <p:cNvSpPr txBox="1"/>
-          <p:nvPr/>
-        </p:nvSpPr>
-        <p:spPr>
-          <a:xfrm>
-            <a:off x="6428232" y="4343400"/>
-            <a:ext cx="4937760" cy="1371600"/>
-          </a:xfrm>
-          <a:prstGeom prst="rect">
-            <a:avLst/>
-          </a:prstGeom>
-          <a:noFill/>
-          <a:ln/>
-        </p:spPr>
-        <p:txBody>
-          <a:bodyPr wrap="square" lIns="0" tIns="0" rIns="0" bIns="0" rtlCol="0" anchor="t"/>
-          <a:lstStyle/>
-          <a:p>
-            <a:pPr indent="0" marL="0">
-              <a:buNone/>
-            </a:pPr>
-            <a:r>
-              <a:rPr lang="en-US" sz="1350" dirty="0">
-                <a:solidFill>
-                  <a:schemeClr val="tx1"/>
-                </a:solidFill>
-              </a:rPr>
-              <a:t>평가 Judge는 gpt-4o로 고정 (파이프라인 Judge gpt-4o-mini와 분리)</a:t>
-            </a:r>
-            <a:endParaRPr lang="en-US" sz="1350" dirty="0"/>
-          </a:p>
-          <a:p>
-            <a:pPr indent="0" marL="0">
-              <a:buNone/>
-            </a:pPr>
-            <a:r>
-              <a:rPr lang="en-US" sz="1350" dirty="0">
-                <a:solidFill>
-                  <a:schemeClr val="tx1"/>
-                </a:solidFill>
-              </a:rPr>
-              <a:t>독립 평가자(Claude, LLM) 블라인드 60건 → 지표별 kappa, 오판 유형</a:t>
-            </a:r>
-            <a:endParaRPr lang="en-US" sz="1350" dirty="0"/>
-          </a:p>
-          <a:p>
-            <a:pPr indent="0" marL="0">
-              <a:buNone/>
-            </a:pPr>
-            <a:r>
-              <a:rPr lang="en-US" sz="1350" dirty="0">
-                <a:solidFill>
-                  <a:schemeClr val="tx1"/>
-                </a:solidFill>
-              </a:rPr>
-              <a:t>사람 표본 20건 라벨은 아직 없음</a:t>
-            </a:r>
-            <a:endParaRPr lang="en-US" sz="1350" dirty="0"/>
-          </a:p>
-        </p:txBody>
-      </p:sp>
-      <p:sp>
-        <p:nvSpPr>
-          <p:cNvPr id="25" name="Slide Number Placeholder 0"/>
-          <p:cNvSpPr>
-            <a:spLocks noGrp="1"/>
-          </p:cNvSpPr>
-          <p:nvPr>
-            <p:ph type="sldNum" sz="quarter" idx="4294967295"/>
-          </p:nvPr>
-        </p:nvSpPr>
-        <p:spPr>
-          <a:xfrm>
-            <a:off x="11155680" y="6400800"/>
-            <a:ext cx="457200" cy="274320"/>
-          </a:xfrm>
-          <a:prstGeom prst="rect">
-            <a:avLst/>
-          </a:prstGeom>
-          <a:extLst>
-            <a:ext uri="{C572A759-6A51-4108-AA02-DFA0A04FC94B}">
-              <ma14:wrappingTextBoxFlag xmlns:ma14="http://schemas.microsoft.com/office/mac/drawingml/2011/main" val="0"/>
-            </a:ext>
-          </a:extLst>
-        </p:spPr>
-        <p:txBody>
-          <a:bodyPr/>
-          <a:lstStyle>
-            <a:lvl1pPr>
-              <a:defRPr sz="1000">
-                <a:solidFill>
-                  <a:schemeClr val="accent3"/>
-                </a:solidFill>
-              </a:defRPr>
-            </a:lvl1pPr>
-          </a:lstStyle>
-          <a:p>
-            <a:pPr algn="r"/>
-            <a:fld id="{F7021451-1387-4CA6-816F-3879F97B5CBC}" type="slidenum">
-              <a:rPr b="0" lang="en-US"/>
               <a:t>8</a:t>
             </a:fld>
             <a:endParaRPr lang="en-US"/>
@@ -23004,54 +23215,49 @@
                   <a:schemeClr val="tx2"/>
                 </a:solidFill>
               </a:rPr>
-              <a:t>Before/After 1: 누락은 RAG가, 무관 런북 혼입은 v2가 줄였다</a:t>
+              <a:t>평가: 조정에 쓰지 않은 질의로, 반복해서, 짝지어 비교했다</a:t>
             </a:r>
             <a:endParaRPr lang="en-US" sz="2800" dirty="0"/>
           </a:p>
         </p:txBody>
       </p:sp>
-      <p:graphicFrame>
-        <p:nvGraphicFramePr>
-          <p:cNvPr id="3" name="chart-miss" descr=""/>
-          <p:cNvGraphicFramePr/>
+      <p:sp>
+        <p:nvSpPr>
+          <p:cNvPr id="3" name="ev-0"/>
+          <p:cNvSpPr/>
           <p:nvPr/>
-        </p:nvGraphicFramePr>
-        <p:xfrm>
-          <a:off x="548640" y="1280160"/>
-          <a:ext cx="5486400" cy="4297680"/>
-        </p:xfrm>
-        <a:graphic xmlns:a="http://schemas.openxmlformats.org/drawingml/2006/main">
-          <a:graphicData uri="http://schemas.openxmlformats.org/drawingml/2006/chart">
-            <c:chart xmlns:c="http://schemas.openxmlformats.org/drawingml/2006/chart" r:id="rId1"/>
-          </a:graphicData>
-        </a:graphic>
-      </p:graphicFrame>
-      <p:graphicFrame>
-        <p:nvGraphicFramePr>
-          <p:cNvPr id="4" name="chart-wrong" descr=""/>
-          <p:cNvGraphicFramePr/>
-          <p:nvPr/>
-        </p:nvGraphicFramePr>
-        <p:xfrm>
-          <a:off x="6153912" y="1280160"/>
-          <a:ext cx="5486400" cy="4297680"/>
-        </p:xfrm>
-        <a:graphic xmlns:a="http://schemas.openxmlformats.org/drawingml/2006/main">
-          <a:graphicData uri="http://schemas.openxmlformats.org/drawingml/2006/chart">
-            <c:chart xmlns:c="http://schemas.openxmlformats.org/drawingml/2006/chart" r:id="rId2"/>
-          </a:graphicData>
-        </a:graphic>
-      </p:graphicFrame>
-      <p:sp>
-        <p:nvSpPr>
-          <p:cNvPr id="5" name="Text 1"/>
+        </p:nvSpPr>
+        <p:spPr>
+          <a:xfrm>
+            <a:off x="548640" y="1325880"/>
+            <a:ext cx="5458968" cy="2148840"/>
+          </a:xfrm>
+          <a:prstGeom prst="roundRect">
+            <a:avLst>
+              <a:gd name="adj" fmla="val 5106"/>
+            </a:avLst>
+          </a:prstGeom>
+          <a:solidFill>
+            <a:schemeClr val="bg2"/>
+          </a:solidFill>
+          <a:ln w="12700">
+            <a:solidFill>
+              <a:schemeClr val="bg2"/>
+            </a:solidFill>
+            <a:prstDash val="solid"/>
+          </a:ln>
+        </p:spPr>
+      </p:sp>
+      <p:sp>
+        <p:nvSpPr>
+          <p:cNvPr id="4" name="Text 2"/>
           <p:cNvSpPr txBox="1"/>
           <p:nvPr/>
         </p:nvSpPr>
         <p:spPr>
           <a:xfrm>
-            <a:off x="548640" y="5715000"/>
-            <a:ext cx="11064240" cy="274320"/>
+            <a:off x="822960" y="1508760"/>
+            <a:ext cx="4937760" cy="411480"/>
           </a:xfrm>
           <a:prstGeom prst="rect">
             <a:avLst/>
@@ -23067,14 +23273,459 @@
               <a:buNone/>
             </a:pPr>
             <a:r>
-              <a:rPr lang="en-US" sz="1050" dirty="0">
+              <a:rPr lang="en-US" sz="1700" b="1" dirty="0">
                 <a:solidFill>
-                  <a:schemeClr val="accent3"/>
+                  <a:schemeClr val="tx2"/>
                 </a:solidFill>
               </a:rPr>
-              <a:t>holdout, 3회 평균. 누락·혼입은 장애 경로 질의 기준. Recall@1·MRR은 gold 있는 holdout 질의 전체 기준: 33% → 52%, MRR 0.37 → 0.68. 누락 = 맞는 조치를 못 줄 위험, 혼입 = 잘못된 조치를 섞을 위험</a:t>
+              <a:t>평가셋 60건</a:t>
             </a:r>
-            <a:endParaRPr lang="en-US" sz="1050" dirty="0"/>
+            <a:endParaRPr lang="en-US" sz="1700" dirty="0"/>
+          </a:p>
+        </p:txBody>
+      </p:sp>
+      <p:sp>
+        <p:nvSpPr>
+          <p:cNvPr id="5" name="Text 3"/>
+          <p:cNvSpPr txBox="1"/>
+          <p:nvPr/>
+        </p:nvSpPr>
+        <p:spPr>
+          <a:xfrm>
+            <a:off x="822960" y="2011680"/>
+            <a:ext cx="4937760" cy="1371600"/>
+          </a:xfrm>
+          <a:prstGeom prst="rect">
+            <a:avLst/>
+          </a:prstGeom>
+          <a:noFill/>
+          <a:ln/>
+        </p:spPr>
+        <p:txBody>
+          <a:bodyPr wrap="square" lIns="0" tIns="0" rIns="0" bIns="0" rtlCol="0" anchor="t"/>
+          <a:lstStyle/>
+          <a:p>
+            <a:pPr indent="0" marL="0">
+              <a:buNone/>
+            </a:pPr>
+            <a:r>
+              <a:rPr lang="en-US" sz="1350" dirty="0">
+                <a:solidFill>
+                  <a:schemeClr val="tx1"/>
+                </a:solidFill>
+              </a:rPr>
+              <a:t>dev 24건: v2 기준값(RAG 최소 유사도) 조정에만 사용</a:t>
+            </a:r>
+            <a:endParaRPr lang="en-US" sz="1350" dirty="0"/>
+          </a:p>
+          <a:p>
+            <a:pPr indent="0" marL="0">
+              <a:buNone/>
+            </a:pPr>
+            <a:r>
+              <a:rPr lang="en-US" sz="1350" dirty="0">
+                <a:solidFill>
+                  <a:schemeClr val="tx1"/>
+                </a:solidFill>
+              </a:rPr>
+              <a:t>holdout 36건: v2 구현 전에 고정해 커밋, 최종 보고에만 사용</a:t>
+            </a:r>
+            <a:endParaRPr lang="en-US" sz="1350" dirty="0"/>
+          </a:p>
+          <a:p>
+            <a:pPr indent="0" marL="0">
+              <a:buNone/>
+            </a:pPr>
+            <a:r>
+              <a:rPr lang="en-US" sz="1350" dirty="0">
+                <a:solidFill>
+                  <a:schemeClr val="tx1"/>
+                </a:solidFill>
+              </a:rPr>
+              <a:t>정상 30 · 형식 제약 8 · 복합 8 · 미등록 7 · 모호 7</a:t>
+            </a:r>
+            <a:endParaRPr lang="en-US" sz="1350" dirty="0"/>
+          </a:p>
+        </p:txBody>
+      </p:sp>
+      <p:sp>
+        <p:nvSpPr>
+          <p:cNvPr id="6" name="ev-1"/>
+          <p:cNvSpPr/>
+          <p:nvPr/>
+        </p:nvSpPr>
+        <p:spPr>
+          <a:xfrm>
+            <a:off x="6153912" y="1325880"/>
+            <a:ext cx="5458968" cy="2148840"/>
+          </a:xfrm>
+          <a:prstGeom prst="roundRect">
+            <a:avLst>
+              <a:gd name="adj" fmla="val 5106"/>
+            </a:avLst>
+          </a:prstGeom>
+          <a:solidFill>
+            <a:schemeClr val="bg2"/>
+          </a:solidFill>
+          <a:ln w="12700">
+            <a:solidFill>
+              <a:schemeClr val="bg2"/>
+            </a:solidFill>
+            <a:prstDash val="solid"/>
+          </a:ln>
+        </p:spPr>
+      </p:sp>
+      <p:sp>
+        <p:nvSpPr>
+          <p:cNvPr id="7" name="Text 5"/>
+          <p:cNvSpPr txBox="1"/>
+          <p:nvPr/>
+        </p:nvSpPr>
+        <p:spPr>
+          <a:xfrm>
+            <a:off x="6428232" y="1508760"/>
+            <a:ext cx="4937760" cy="411480"/>
+          </a:xfrm>
+          <a:prstGeom prst="rect">
+            <a:avLst/>
+          </a:prstGeom>
+          <a:noFill/>
+          <a:ln/>
+        </p:spPr>
+        <p:txBody>
+          <a:bodyPr wrap="square" lIns="0" tIns="0" rIns="0" bIns="0" rtlCol="0" anchor="ctr"/>
+          <a:lstStyle/>
+          <a:p>
+            <a:pPr indent="0" marL="0">
+              <a:buNone/>
+            </a:pPr>
+            <a:r>
+              <a:rPr lang="en-US" sz="1700" b="1" dirty="0">
+                <a:solidFill>
+                  <a:schemeClr val="tx2"/>
+                </a:solidFill>
+              </a:rPr>
+              <a:t>반복과 유의성</a:t>
+            </a:r>
+            <a:endParaRPr lang="en-US" sz="1700" dirty="0"/>
+          </a:p>
+        </p:txBody>
+      </p:sp>
+      <p:sp>
+        <p:nvSpPr>
+          <p:cNvPr id="8" name="Text 6"/>
+          <p:cNvSpPr txBox="1"/>
+          <p:nvPr/>
+        </p:nvSpPr>
+        <p:spPr>
+          <a:xfrm>
+            <a:off x="6428232" y="2011680"/>
+            <a:ext cx="4937760" cy="1371600"/>
+          </a:xfrm>
+          <a:prstGeom prst="rect">
+            <a:avLst/>
+          </a:prstGeom>
+          <a:noFill/>
+          <a:ln/>
+        </p:spPr>
+        <p:txBody>
+          <a:bodyPr wrap="square" lIns="0" tIns="0" rIns="0" bIns="0" rtlCol="0" anchor="t"/>
+          <a:lstStyle/>
+          <a:p>
+            <a:pPr indent="0" marL="0">
+              <a:buNone/>
+            </a:pPr>
+            <a:r>
+              <a:rPr lang="en-US" sz="1350" dirty="0">
+                <a:solidFill>
+                  <a:schemeClr val="tx1"/>
+                </a:solidFill>
+              </a:rPr>
+              <a:t>7구성 x 60건 x 3회 = 1,260회 실행</a:t>
+            </a:r>
+            <a:endParaRPr lang="en-US" sz="1350" dirty="0"/>
+          </a:p>
+          <a:p>
+            <a:pPr indent="0" marL="0">
+              <a:buNone/>
+            </a:pPr>
+            <a:r>
+              <a:rPr lang="en-US" sz="1350" dirty="0">
+                <a:solidFill>
+                  <a:schemeClr val="tx1"/>
+                </a:solidFill>
+              </a:rPr>
+              <a:t>반복 간 95% CI (t 분포)</a:t>
+            </a:r>
+            <a:endParaRPr lang="en-US" sz="1350" dirty="0"/>
+          </a:p>
+          <a:p>
+            <a:pPr indent="0" marL="0">
+              <a:buNone/>
+            </a:pPr>
+            <a:r>
+              <a:rPr lang="en-US" sz="1350" dirty="0">
+                <a:solidFill>
+                  <a:schemeClr val="tx1"/>
+                </a:solidFill>
+              </a:rPr>
+              <a:t>구성 간 차이는 질의 단위 paired bootstrap 2,000회</a:t>
+            </a:r>
+            <a:endParaRPr lang="en-US" sz="1350" dirty="0"/>
+          </a:p>
+        </p:txBody>
+      </p:sp>
+      <p:sp>
+        <p:nvSpPr>
+          <p:cNvPr id="9" name="ev-2"/>
+          <p:cNvSpPr/>
+          <p:nvPr/>
+        </p:nvSpPr>
+        <p:spPr>
+          <a:xfrm>
+            <a:off x="548640" y="3657600"/>
+            <a:ext cx="5458968" cy="2148840"/>
+          </a:xfrm>
+          <a:prstGeom prst="roundRect">
+            <a:avLst>
+              <a:gd name="adj" fmla="val 5106"/>
+            </a:avLst>
+          </a:prstGeom>
+          <a:solidFill>
+            <a:schemeClr val="bg2"/>
+          </a:solidFill>
+          <a:ln w="12700">
+            <a:solidFill>
+              <a:schemeClr val="bg2"/>
+            </a:solidFill>
+            <a:prstDash val="solid"/>
+          </a:ln>
+        </p:spPr>
+      </p:sp>
+      <p:sp>
+        <p:nvSpPr>
+          <p:cNvPr id="10" name="Text 8"/>
+          <p:cNvSpPr txBox="1"/>
+          <p:nvPr/>
+        </p:nvSpPr>
+        <p:spPr>
+          <a:xfrm>
+            <a:off x="822960" y="3840480"/>
+            <a:ext cx="4937760" cy="411480"/>
+          </a:xfrm>
+          <a:prstGeom prst="rect">
+            <a:avLst/>
+          </a:prstGeom>
+          <a:noFill/>
+          <a:ln/>
+        </p:spPr>
+        <p:txBody>
+          <a:bodyPr wrap="square" lIns="0" tIns="0" rIns="0" bIns="0" rtlCol="0" anchor="ctr"/>
+          <a:lstStyle/>
+          <a:p>
+            <a:pPr indent="0" marL="0">
+              <a:buNone/>
+            </a:pPr>
+            <a:r>
+              <a:rPr lang="en-US" sz="1700" b="1" dirty="0">
+                <a:solidFill>
+                  <a:schemeClr val="tx2"/>
+                </a:solidFill>
+              </a:rPr>
+              <a:t>측정 축 분리</a:t>
+            </a:r>
+            <a:endParaRPr lang="en-US" sz="1700" dirty="0"/>
+          </a:p>
+        </p:txBody>
+      </p:sp>
+      <p:sp>
+        <p:nvSpPr>
+          <p:cNvPr id="11" name="Text 9"/>
+          <p:cNvSpPr txBox="1"/>
+          <p:nvPr/>
+        </p:nvSpPr>
+        <p:spPr>
+          <a:xfrm>
+            <a:off x="822960" y="4343400"/>
+            <a:ext cx="4937760" cy="1371600"/>
+          </a:xfrm>
+          <a:prstGeom prst="rect">
+            <a:avLst/>
+          </a:prstGeom>
+          <a:noFill/>
+          <a:ln/>
+        </p:spPr>
+        <p:txBody>
+          <a:bodyPr wrap="square" lIns="0" tIns="0" rIns="0" bIns="0" rtlCol="0" anchor="t"/>
+          <a:lstStyle/>
+          <a:p>
+            <a:pPr indent="0" marL="0">
+              <a:buNone/>
+            </a:pPr>
+            <a:r>
+              <a:rPr lang="en-US" sz="1350" dirty="0">
+                <a:solidFill>
+                  <a:schemeClr val="tx1"/>
+                </a:solidFill>
+              </a:rPr>
+              <a:t>검색: Recall@k, 정답 런북 누락·혼입</a:t>
+            </a:r>
+            <a:endParaRPr lang="en-US" sz="1350" dirty="0"/>
+          </a:p>
+          <a:p>
+            <a:pPr indent="0" marL="0">
+              <a:buNone/>
+            </a:pPr>
+            <a:r>
+              <a:rPr lang="en-US" sz="1350" dirty="0">
+                <a:solidFill>
+                  <a:schemeClr val="tx1"/>
+                </a:solidFill>
+              </a:rPr>
+              <a:t>답변: 평가 Judge 4지표 + 런북 어구 포함(결정적)</a:t>
+            </a:r>
+            <a:endParaRPr lang="en-US" sz="1350" dirty="0"/>
+          </a:p>
+          <a:p>
+            <a:pPr indent="0" marL="0">
+              <a:buNone/>
+            </a:pPr>
+            <a:r>
+              <a:rPr lang="en-US" sz="1350" dirty="0">
+                <a:solidFill>
+                  <a:schemeClr val="tx1"/>
+                </a:solidFill>
+              </a:rPr>
+              <a:t>운영: 건당 비용, p50/p95 지연, 재작성, 동시성, 장애 주입</a:t>
+            </a:r>
+            <a:endParaRPr lang="en-US" sz="1350" dirty="0"/>
+          </a:p>
+        </p:txBody>
+      </p:sp>
+      <p:sp>
+        <p:nvSpPr>
+          <p:cNvPr id="12" name="ev-3"/>
+          <p:cNvSpPr/>
+          <p:nvPr/>
+        </p:nvSpPr>
+        <p:spPr>
+          <a:xfrm>
+            <a:off x="6153912" y="3657600"/>
+            <a:ext cx="5458968" cy="2148840"/>
+          </a:xfrm>
+          <a:prstGeom prst="roundRect">
+            <a:avLst>
+              <a:gd name="adj" fmla="val 5106"/>
+            </a:avLst>
+          </a:prstGeom>
+          <a:solidFill>
+            <a:schemeClr val="bg2"/>
+          </a:solidFill>
+          <a:ln w="12700">
+            <a:solidFill>
+              <a:schemeClr val="bg2"/>
+            </a:solidFill>
+            <a:prstDash val="solid"/>
+          </a:ln>
+        </p:spPr>
+      </p:sp>
+      <p:sp>
+        <p:nvSpPr>
+          <p:cNvPr id="13" name="Text 11"/>
+          <p:cNvSpPr txBox="1"/>
+          <p:nvPr/>
+        </p:nvSpPr>
+        <p:spPr>
+          <a:xfrm>
+            <a:off x="6428232" y="3840480"/>
+            <a:ext cx="4937760" cy="411480"/>
+          </a:xfrm>
+          <a:prstGeom prst="rect">
+            <a:avLst/>
+          </a:prstGeom>
+          <a:noFill/>
+          <a:ln/>
+        </p:spPr>
+        <p:txBody>
+          <a:bodyPr wrap="square" lIns="0" tIns="0" rIns="0" bIns="0" rtlCol="0" anchor="ctr"/>
+          <a:lstStyle/>
+          <a:p>
+            <a:pPr indent="0" marL="0">
+              <a:buNone/>
+            </a:pPr>
+            <a:r>
+              <a:rPr lang="en-US" sz="1700" b="1" dirty="0">
+                <a:solidFill>
+                  <a:schemeClr val="tx2"/>
+                </a:solidFill>
+              </a:rPr>
+              <a:t>평가자 검증</a:t>
+            </a:r>
+            <a:endParaRPr lang="en-US" sz="1700" dirty="0"/>
+          </a:p>
+        </p:txBody>
+      </p:sp>
+      <p:sp>
+        <p:nvSpPr>
+          <p:cNvPr id="14" name="Text 12"/>
+          <p:cNvSpPr txBox="1"/>
+          <p:nvPr/>
+        </p:nvSpPr>
+        <p:spPr>
+          <a:xfrm>
+            <a:off x="6428232" y="4343400"/>
+            <a:ext cx="4937760" cy="1371600"/>
+          </a:xfrm>
+          <a:prstGeom prst="rect">
+            <a:avLst/>
+          </a:prstGeom>
+          <a:noFill/>
+          <a:ln/>
+        </p:spPr>
+        <p:txBody>
+          <a:bodyPr wrap="square" lIns="0" tIns="0" rIns="0" bIns="0" rtlCol="0" anchor="t"/>
+          <a:lstStyle/>
+          <a:p>
+            <a:pPr indent="0" marL="0">
+              <a:buNone/>
+            </a:pPr>
+            <a:r>
+              <a:rPr lang="en-US" sz="1350" dirty="0">
+                <a:solidFill>
+                  <a:schemeClr val="tx1"/>
+                </a:solidFill>
+              </a:rPr>
+              <a:t>평가 Judge는 gpt-4o로 고정 (파이프라인 Judge gpt-4o-mini와 분리)</a:t>
+            </a:r>
+            <a:endParaRPr lang="en-US" sz="1350" dirty="0"/>
+          </a:p>
+          <a:p>
+            <a:pPr indent="0" marL="0">
+              <a:buNone/>
+            </a:pPr>
+            <a:r>
+              <a:rPr lang="en-US" sz="1350" dirty="0">
+                <a:solidFill>
+                  <a:schemeClr val="tx1"/>
+                </a:solidFill>
+              </a:rPr>
+              <a:t>독립 평가자(Claude, LLM) 블라인드 60건 → 지표별 kappa, 오판 유형</a:t>
+            </a:r>
+            <a:endParaRPr lang="en-US" sz="1350" dirty="0"/>
+          </a:p>
+          <a:p>
+            <a:pPr indent="0" marL="0">
+              <a:buNone/>
+            </a:pPr>
+            <a:r>
+              <a:rPr lang="en-US" sz="1350" dirty="0">
+                <a:solidFill>
+                  <a:schemeClr val="tx1"/>
+                </a:solidFill>
+              </a:rPr>
+              <a:t>사람 표본 20건 라벨은 아직 없음</a:t>
+            </a:r>
+            <a:endParaRPr lang="en-US" sz="1350" dirty="0"/>
           </a:p>
         </p:txBody>
       </p:sp>

--- a/deck/incident-agent-ablation.pptx
+++ b/deck/incident-agent-ablation.pptx
@@ -124,36 +124,36 @@
   <p:extLst>
     <p:ext uri="{521415D9-36F7-43E2-AB2F-B90AF26B5E84}">
       <p14:sectionLst xmlns:p14="http://schemas.microsoft.com/office/powerpoint/2010/main">
-        <p14:section name="표지" id="{dc8b99c6-d615-b7b0-0993-87ad23a3e87a}">
+        <p14:section name="표지" id="{4365c6a4-0189-2cbc-0db5-5a8a4c37d0fe}">
           <p14:sldIdLst>
             <p14:sldId id="256"/>
           </p14:sldIdLst>
         </p14:section>
-        <p14:section name="요약" id="{67fc83d8-f2c5-0466-3607-637fa2f68f2e}">
+        <p14:section name="요약" id="{9273d741-01f2-ad45-d1a8-2cfdbbdce48c}">
           <p14:sldIdLst>
             <p14:sldId id="257"/>
             <p14:sldId id="258"/>
             <p14:sldId id="259"/>
           </p14:sldIdLst>
         </p14:section>
-        <p14:section name="문제" id="{0efcb65d-4533-99b4-be9a-925e55bd4925}">
+        <p14:section name="문제" id="{0d8e5597-441f-35fa-c6c1-2101b09cd101}">
           <p14:sldIdLst>
             <p14:sldId id="260"/>
             <p14:sldId id="261"/>
             <p14:sldId id="262"/>
           </p14:sldIdLst>
         </p14:section>
-        <p14:section name="개선" id="{93f01414-197f-87e9-a0d0-d7eb96d707a9}">
+        <p14:section name="개선" id="{b50b0e4a-091a-8b9e-9b97-d0e77bbfa91a}">
           <p14:sldIdLst>
             <p14:sldId id="263"/>
           </p14:sldIdLst>
         </p14:section>
-        <p14:section name="평가 설계" id="{1761399b-bf95-5633-2a7e-a5f150e50ff5}">
+        <p14:section name="평가 설계" id="{dc22f297-5d4f-6d23-3e36-0c32b6c93826}">
           <p14:sldIdLst>
             <p14:sldId id="264"/>
           </p14:sldIdLst>
         </p14:section>
-        <p14:section name="Before/After" id="{edd76eb1-0797-af7b-55bd-154e8ca88ade}">
+        <p14:section name="Before/After" id="{5f10685a-74c4-aa14-0161-966c1feb7600}">
           <p14:sldIdLst>
             <p14:sldId id="265"/>
             <p14:sldId id="266"/>
@@ -162,22 +162,22 @@
             <p14:sldId id="269"/>
           </p14:sldIdLst>
         </p14:section>
-        <p14:section name="평가자 검증" id="{0dbd85c4-9735-533b-d517-6884f6cea659}">
+        <p14:section name="평가자 검증" id="{d806e0a7-125b-3176-9369-ba0e8610dd91}">
           <p14:sldIdLst>
             <p14:sldId id="270"/>
           </p14:sldIdLst>
         </p14:section>
-        <p14:section name="시연" id="{bd8061bc-ebd2-19e3-7d16-e6590ef11772}">
+        <p14:section name="시연" id="{470a2e4f-8e7d-b8b3-27a1-59a42247a407}">
           <p14:sldIdLst>
             <p14:sldId id="271"/>
           </p14:sldIdLst>
         </p14:section>
-        <p14:section name="한계" id="{851cde9e-a030-c9be-2ce2-e3e7aad1d28a}">
+        <p14:section name="한계" id="{748247f8-8d7d-c9ef-7b0b-16fea090203e}">
           <p14:sldIdLst>
             <p14:sldId id="272"/>
           </p14:sldIdLst>
         </p14:section>
-        <p14:section name="마무리" id="{2d233bde-8772-1ffc-6666-f30dca9ed79c}">
+        <p14:section name="마무리" id="{12b3e427-ea92-94a3-8c6d-6b425ae1c045}">
           <p14:sldIdLst>
             <p14:sldId id="273"/>
           </p14:sldIdLst>
@@ -3005,7 +3005,7 @@
           <a:p>
             <a:r>
               <a:rPr lang="en-US" dirty="0"/>
-              <a:t>시장은 이미 AI SRE로 가고 있고 구조도 우리와 같습니다. 그런데 공개된 수치는 대부분 업체 주장이고, 효과를 부품별로 잰 공개 사례는 찾지 못했습니다. 이 과제는 그 빈칸을 채웠습니다.</a:t>
+              <a:t>시장은 AI SRE로 가고 있고, 런북 근거와 MCP 연동이 흔합니다. 그런데 공개된 수치는 대부분 업체 주장이고, 조사한 국내 기업 사례에서는 부품별 효과를 잰 공개 자료를 찾지 못했습니다. 이 과제는 합성 평가셋과 AI 평가자라는 한계 안에서 부품별 기여를 분리해 보였습니다.</a:t>
             </a:r>
             <a:endParaRPr lang="en-US" dirty="0"/>
           </a:p>
@@ -16515,7 +16515,7 @@
                   <a:schemeClr val="tx1"/>
                 </a:solidFill>
               </a:rPr>
-              <a:t>최근 중대 장애 비용이 10만 달러를 넘었다는 응답 (Uptime Institute 2025). 절차 미준수 장애도 늘었다</a:t>
+              <a:t>최근 중대 장애 비용이 10만 달러를 넘었다는 응답 (Uptime Institute 2025). 같은 보고서에서 절차 미준수 장애도 늘었다</a:t>
             </a:r>
             <a:endParaRPr lang="en-US" sz="1350" dirty="0"/>
           </a:p>
@@ -16614,7 +16614,7 @@
                   <a:schemeClr val="tx1"/>
                 </a:solidFill>
               </a:rPr>
-              <a:t>국외 정식 출시 AI SRE: PagerDuty·Datadog·Azure·AWS·Grafana. 국내도 SK AX·삼성계정·롯데ON·현대오토에버·GS리테일</a:t>
+              <a:t>확인한 국외 정식 출시 AI SRE: PagerDuty·Datadog·Azure·AWS·Grafana. 국내도 SK AX·삼성계정·롯데ON·GS리테일 등</a:t>
             </a:r>
             <a:endParaRPr lang="en-US" sz="1350" dirty="0"/>
           </a:p>
@@ -16713,7 +16713,7 @@
                   <a:schemeClr val="tx1"/>
                 </a:solidFill>
               </a:rPr>
-              <a:t>조사 범위의 국내 공개 사례 중 고정 평가셋·Ablation 공개. 국외 수치도 대부분 '최대 몇 %' 업체 주장</a:t>
+              <a:t>조사한 국내 기업·제품 공개 사례 중 고정 평가셋·Ablation 공개. 국외 수치도 대부분 '최대 몇 %' 업체 주장</a:t>
             </a:r>
             <a:endParaRPr lang="en-US" sz="1350" dirty="0"/>
           </a:p>
@@ -16779,7 +16779,7 @@
                   <a:schemeClr val="tx1"/>
                 </a:solidFill>
               </a:rPr>
-              <a:t>현업 구조는 우리와 같다: 런북 근거 + MCP 도구 연동 + 조치 전 사람 승인</a:t>
+              <a:t>런북·과거 장애 근거, MCP 도구 연동이 흔하다. 실행을 맡기는 정도는 제품마다 다르다 (우리는 제안만)</a:t>
             </a:r>
             <a:endParaRPr lang="en-US" sz="1400" dirty="0"/>
           </a:p>
@@ -16797,7 +16797,7 @@
                   <a:schemeClr val="tx1"/>
                 </a:solidFill>
               </a:rPr>
-              <a:t>Datadog: 기능 하나가 일부 조사는 개선하고 다른 조사는 나쁘게 만든 사례 공개 → 부품을 하나씩 켜고 끄며 재야 하는 이유</a:t>
+              <a:t>Datadog: 기능 하나가 무관한 신호를 끌어와 다른 조사를 나쁘게 만든 사례 공개 → 부품을 하나씩 켜고 끄며 재야 하는 이유</a:t>
             </a:r>
             <a:endParaRPr lang="en-US" sz="1400" dirty="0"/>
           </a:p>
@@ -16815,7 +16815,7 @@
                   <a:schemeClr val="tx1"/>
                 </a:solidFill>
               </a:rPr>
-              <a:t>연구: SOP를 넣자 RCA 정확도 35.5% → 64.0% (Flow-of-Action, WWW'25) · 외부 피드백 없는 자기교정은 효과 없음 (Huang 외, ICLR'24)</a:t>
+              <a:t>연구: SOP 기반 멀티에이전트가 ReAct 대비 RCA 정확도 35.5% → 64.0% (Flow-of-Action) · 추론 과제에서 외부 피드백 없는 자기교정은 효과 없음 (Huang 외, ICLR'24)</a:t>
             </a:r>
             <a:endParaRPr lang="en-US" sz="1400" dirty="0"/>
           </a:p>
@@ -16833,7 +16833,7 @@
                   <a:schemeClr val="tx1"/>
                 </a:solidFill>
               </a:rPr>
-              <a:t>국내 연구: RCA 에이전트 실패 1위는 데이터 해석 환각 71.2% (오케스트로·한양대, ASPLOS'26 AIOps 워크숍)</a:t>
+              <a:t>국내 연구: RCA 에이전트 실패 1위는 데이터 해석 환각 71.2% (오케스트로·한양대, ASPLOS'26 AIOps 워크숍, 보도 기준)</a:t>
             </a:r>
             <a:endParaRPr lang="en-US" sz="1400" dirty="0"/>
           </a:p>
@@ -16869,7 +16869,7 @@
                   <a:schemeClr val="accent3"/>
                 </a:solidFill>
               </a:rPr>
-              <a:t>출처 전체: docs/research/00_요약_실태현황.md (국외 18개 제품·국내 19건·논문 38건, 2026-10-22 확인, 업체 수치는 업체 주장)</a:t>
+              <a:t>출처 전체: docs/research/00_요약_실태현황.md (국외 18개 제품·국내 20건·논문 37건, 2026-10-22 확인, 업체 수치는 업체 주장)</a:t>
             </a:r>
             <a:endParaRPr lang="en-US" sz="1050" dirty="0"/>
           </a:p>

--- a/deck/incident-agent-ablation.pptx
+++ b/deck/incident-agent-ablation.pptx
@@ -124,36 +124,36 @@
   <p:extLst>
     <p:ext uri="{521415D9-36F7-43E2-AB2F-B90AF26B5E84}">
       <p14:sectionLst xmlns:p14="http://schemas.microsoft.com/office/powerpoint/2010/main">
-        <p14:section name="표지" id="{4365c6a4-0189-2cbc-0db5-5a8a4c37d0fe}">
+        <p14:section name="표지" id="{cb703ed0-e368-367a-ed5d-5da66a6751f1}">
           <p14:sldIdLst>
             <p14:sldId id="256"/>
           </p14:sldIdLst>
         </p14:section>
-        <p14:section name="요약" id="{9273d741-01f2-ad45-d1a8-2cfdbbdce48c}">
+        <p14:section name="요약" id="{5d3a84db-093f-033c-bb10-0d332a27469a}">
           <p14:sldIdLst>
             <p14:sldId id="257"/>
             <p14:sldId id="258"/>
             <p14:sldId id="259"/>
           </p14:sldIdLst>
         </p14:section>
-        <p14:section name="문제" id="{0d8e5597-441f-35fa-c6c1-2101b09cd101}">
+        <p14:section name="문제" id="{14da6d29-f2f1-0419-fbb9-764071b85fcd}">
           <p14:sldIdLst>
             <p14:sldId id="260"/>
             <p14:sldId id="261"/>
             <p14:sldId id="262"/>
           </p14:sldIdLst>
         </p14:section>
-        <p14:section name="개선" id="{b50b0e4a-091a-8b9e-9b97-d0e77bbfa91a}">
+        <p14:section name="개선" id="{7dd2ddb3-3f72-5f48-ad17-4113f163d6af}">
           <p14:sldIdLst>
             <p14:sldId id="263"/>
           </p14:sldIdLst>
         </p14:section>
-        <p14:section name="평가 설계" id="{dc22f297-5d4f-6d23-3e36-0c32b6c93826}">
+        <p14:section name="평가 설계" id="{1f9e9f43-4ead-79ed-8ede-f3ea5b628198}">
           <p14:sldIdLst>
             <p14:sldId id="264"/>
           </p14:sldIdLst>
         </p14:section>
-        <p14:section name="Before/After" id="{5f10685a-74c4-aa14-0161-966c1feb7600}">
+        <p14:section name="Before/After" id="{3205e74a-3a34-d5b6-d100-d3074eb4174c}">
           <p14:sldIdLst>
             <p14:sldId id="265"/>
             <p14:sldId id="266"/>
@@ -162,22 +162,22 @@
             <p14:sldId id="269"/>
           </p14:sldIdLst>
         </p14:section>
-        <p14:section name="평가자 검증" id="{d806e0a7-125b-3176-9369-ba0e8610dd91}">
+        <p14:section name="평가자 검증" id="{3f0189bb-5fe6-165d-6f3c-4b9b79d1c2df}">
           <p14:sldIdLst>
             <p14:sldId id="270"/>
           </p14:sldIdLst>
         </p14:section>
-        <p14:section name="시연" id="{470a2e4f-8e7d-b8b3-27a1-59a42247a407}">
+        <p14:section name="시연" id="{82fa8e94-933d-2eb2-638a-703a4b60cabc}">
           <p14:sldIdLst>
             <p14:sldId id="271"/>
           </p14:sldIdLst>
         </p14:section>
-        <p14:section name="한계" id="{748247f8-8d7d-c9ef-7b0b-16fea090203e}">
+        <p14:section name="한계" id="{a2bba64d-d1b5-87ed-4fcb-fab3dab16ef8}">
           <p14:sldIdLst>
             <p14:sldId id="272"/>
           </p14:sldIdLst>
         </p14:section>
-        <p14:section name="마무리" id="{12b3e427-ea92-94a3-8c6d-6b425ae1c045}">
+        <p14:section name="마무리" id="{2199741f-2f5e-d308-499d-fca8e514ef46}">
           <p14:sldIdLst>
             <p14:sldId id="273"/>
           </p14:sldIdLst>
@@ -5786,7 +5786,7 @@
                             <a:srgbClr val="1A2230"/>
                           </a:solidFill>
                         </a:rPr>
-                        <a:t>+2.3초 ★</a:t>
+                        <a:t>+2.7초 ★</a:t>
                       </a:r>
                       <a:endParaRPr lang="en-US" sz="1250" dirty="0"/>
                     </a:p>
@@ -6609,12 +6609,12 @@
                         <a:buNone/>
                       </a:pPr>
                       <a:r>
-                        <a:rPr lang="en-US" sz="1250" b="1" dirty="0">
+                        <a:rPr lang="en-US" sz="1250" dirty="0">
                           <a:solidFill>
                             <a:srgbClr val="1A2230"/>
                           </a:solidFill>
                         </a:rPr>
-                        <a:t>-0.7초 ★</a:t>
+                        <a:t>+0.1초</a:t>
                       </a:r>
                       <a:endParaRPr lang="en-US" sz="1250" dirty="0"/>
                     </a:p>
@@ -6656,9 +6656,6 @@
                       <a:headEnd type="none" w="med" len="med"/>
                       <a:tailEnd type="none" w="med" len="med"/>
                     </a:lnB>
-                    <a:solidFill>
-                      <a:srgbClr val="D7EFE6"/>
-                    </a:solidFill>
                   </a:tcPr>
                 </a:tc>
               </a:tr>
@@ -7028,7 +7025,7 @@
                             <a:srgbClr val="1A2230"/>
                           </a:solidFill>
                         </a:rPr>
-                        <a:t>+0.1초</a:t>
+                        <a:t>+0.0초</a:t>
                       </a:r>
                       <a:endParaRPr lang="en-US" sz="1250" dirty="0"/>
                     </a:p>
@@ -7439,7 +7436,7 @@
                             <a:srgbClr val="1A2230"/>
                           </a:solidFill>
                         </a:rPr>
-                        <a:t>-0.9초 ★</a:t>
+                        <a:t>+0.3초 ★</a:t>
                       </a:r>
                       <a:endParaRPr lang="en-US" sz="1250" dirty="0"/>
                     </a:p>
@@ -7482,7 +7479,7 @@
                       <a:tailEnd type="none" w="med" len="med"/>
                     </a:lnB>
                     <a:solidFill>
-                      <a:srgbClr val="D7EFE6"/>
+                      <a:srgbClr val="FBE3D3"/>
                     </a:solidFill>
                   </a:tcPr>
                 </a:tc>
@@ -7865,7 +7862,7 @@
                             <a:srgbClr val="1A2230"/>
                           </a:solidFill>
                         </a:rPr>
-                        <a:t>+1.4초 ★</a:t>
+                        <a:t>+2.5초 ★</a:t>
                       </a:r>
                       <a:endParaRPr lang="en-US" sz="1250" dirty="0"/>
                     </a:p>
@@ -7947,7 +7944,7 @@
                   <a:schemeClr val="tx1"/>
                 </a:solidFill>
               </a:rPr>
-              <a:t>★ = 95% 신뢰구간이 0을 포함하지 않음 (holdout 36건, 질의 단위 paired bootstrap 2,000회). 초록 = 좋아짐, 주황 = 나빠짐. 표시 없는 칸은 차이가 있다고 말할 수 없음. 캐스케이드·v2 위 비용·전체 행의 지연은 재측정 부하(2프로세스 vs 7프로세스) 차이가 섞였을 수 있음.</a:t>
+              <a:t>★ = 95% 신뢰구간이 0을 포함하지 않음 (holdout 36건, 질의 단위 paired bootstrap 2,000회). 초록 = 좋아짐, 주황 = 나빠짐. 표시 없는 칸은 차이가 있다고 말할 수 없음. 지연은 7구성을 같은 부하로 다시 잰 값(평가 Judge 생략, scripts/run_latency_ctrl.sh).</a:t>
             </a:r>
             <a:endParaRPr lang="en-US" sz="1150" dirty="0"/>
           </a:p>
@@ -8982,7 +8979,7 @@
                             <a:srgbClr val="1A2230"/>
                           </a:solidFill>
                         </a:rPr>
-                        <a:t>8.3초</a:t>
+                        <a:t>8.6초</a:t>
                       </a:r>
                       <a:endParaRPr lang="en-US" sz="1300" dirty="0"/>
                     </a:p>
@@ -9448,7 +9445,7 @@
                             <a:srgbClr val="1A2230"/>
                           </a:solidFill>
                         </a:rPr>
-                        <a:t>8.9초</a:t>
+                        <a:t>9.2초</a:t>
                       </a:r>
                       <a:endParaRPr lang="en-US" sz="1300" dirty="0"/>
                     </a:p>
@@ -9914,7 +9911,7 @@
                             <a:srgbClr val="1A2230"/>
                           </a:solidFill>
                         </a:rPr>
-                        <a:t>17.1초</a:t>
+                        <a:t>16.1초</a:t>
                       </a:r>
                       <a:endParaRPr lang="en-US" sz="1300" dirty="0"/>
                     </a:p>
@@ -10380,7 +10377,7 @@
                             <a:srgbClr val="1A2230"/>
                           </a:solidFill>
                         </a:rPr>
-                        <a:t>12.0초</a:t>
+                        <a:t>12.3초</a:t>
                       </a:r>
                       <a:endParaRPr lang="en-US" sz="1300" dirty="0"/>
                     </a:p>
@@ -10846,7 +10843,7 @@
                             <a:srgbClr val="1A2230"/>
                           </a:solidFill>
                         </a:rPr>
-                        <a:t>10.6초</a:t>
+                        <a:t>12.2초</a:t>
                       </a:r>
                       <a:endParaRPr lang="en-US" sz="1300" dirty="0"/>
                     </a:p>
@@ -11312,7 +11309,7 @@
                             <a:srgbClr val="1A2230"/>
                           </a:solidFill>
                         </a:rPr>
-                        <a:t>11.8초</a:t>
+                        <a:t>12.1초</a:t>
                       </a:r>
                       <a:endParaRPr lang="en-US" sz="1300" dirty="0"/>
                     </a:p>
@@ -11778,7 +11775,7 @@
                             <a:srgbClr val="1A2230"/>
                           </a:solidFill>
                         </a:rPr>
-                        <a:t>9.8초</a:t>
+                        <a:t>12.1초</a:t>
                       </a:r>
                       <a:endParaRPr lang="en-US" sz="1300" dirty="0"/>
                     </a:p>
@@ -11990,7 +11987,7 @@
                   <a:schemeClr val="accent3"/>
                 </a:solidFill>
               </a:rPr>
-              <a:t>holdout 36건, 3회 평균. 비용은 OpenAI 공개 단가 x 실측 토큰 추정치 (평가 Judge 제외). 지연: 5구성은 7프로세스 동시 부하, +비용·final은 캐시 버그 수정 뒤 2프로세스로 재측정 → 두 구성의 지연 차이엔 부하 차이가 섞였을 수 있음</a:t>
+              <a:t>holdout 36건, 3회 평균. 비용은 OpenAI 공개 단가 x 실측 토큰 추정치 (평가 Judge 제외). p95 지연은 7구성을 같은 부하(동시 7프로세스 x 2)로 다시 잰 값</a:t>
             </a:r>
             <a:endParaRPr lang="en-US" sz="1050" dirty="0"/>
           </a:p>
@@ -17316,7 +17313,7 @@
                   <a:schemeClr val="tx1"/>
                 </a:solidFill>
               </a:rPr>
-              <a:t>지연은 +2.3초 (유의)</a:t>
+              <a:t>지연은 +2.7초 (유의)</a:t>
             </a:r>
             <a:endParaRPr lang="en-US" sz="1350" dirty="0"/>
           </a:p>

--- a/deck/incident-agent-ablation.pptx
+++ b/deck/incident-agent-ablation.pptx
@@ -124,36 +124,36 @@
   <p:extLst>
     <p:ext uri="{521415D9-36F7-43E2-AB2F-B90AF26B5E84}">
       <p14:sectionLst xmlns:p14="http://schemas.microsoft.com/office/powerpoint/2010/main">
-        <p14:section name="표지" id="{cb703ed0-e368-367a-ed5d-5da66a6751f1}">
+        <p14:section name="표지" id="{083c3193-b15f-0789-91e3-f6a56e2358d0}">
           <p14:sldIdLst>
             <p14:sldId id="256"/>
           </p14:sldIdLst>
         </p14:section>
-        <p14:section name="요약" id="{5d3a84db-093f-033c-bb10-0d332a27469a}">
+        <p14:section name="요약" id="{4e3c16ff-c70d-7306-71f7-16575315ebe7}">
           <p14:sldIdLst>
             <p14:sldId id="257"/>
             <p14:sldId id="258"/>
             <p14:sldId id="259"/>
           </p14:sldIdLst>
         </p14:section>
-        <p14:section name="문제" id="{14da6d29-f2f1-0419-fbb9-764071b85fcd}">
+        <p14:section name="문제" id="{c98d9fce-80c0-44f6-0913-71960e332e40}">
           <p14:sldIdLst>
             <p14:sldId id="260"/>
             <p14:sldId id="261"/>
             <p14:sldId id="262"/>
           </p14:sldIdLst>
         </p14:section>
-        <p14:section name="개선" id="{7dd2ddb3-3f72-5f48-ad17-4113f163d6af}">
+        <p14:section name="개선" id="{bed266ee-f70c-848d-c7a4-09b0bb6f579d}">
           <p14:sldIdLst>
             <p14:sldId id="263"/>
           </p14:sldIdLst>
         </p14:section>
-        <p14:section name="평가 설계" id="{1f9e9f43-4ead-79ed-8ede-f3ea5b628198}">
+        <p14:section name="평가 설계" id="{bcf31b6d-8d98-07f9-8ed8-09ba76e5e396}">
           <p14:sldIdLst>
             <p14:sldId id="264"/>
           </p14:sldIdLst>
         </p14:section>
-        <p14:section name="Before/After" id="{3205e74a-3a34-d5b6-d100-d3074eb4174c}">
+        <p14:section name="Before/After" id="{d32f0add-03b5-9f5a-82c6-385f817c7c60}">
           <p14:sldIdLst>
             <p14:sldId id="265"/>
             <p14:sldId id="266"/>
@@ -162,22 +162,22 @@
             <p14:sldId id="269"/>
           </p14:sldIdLst>
         </p14:section>
-        <p14:section name="평가자 검증" id="{3f0189bb-5fe6-165d-6f3c-4b9b79d1c2df}">
+        <p14:section name="평가자 검증" id="{e348aebc-dae6-cce2-eac3-48d67d1bab57}">
           <p14:sldIdLst>
             <p14:sldId id="270"/>
           </p14:sldIdLst>
         </p14:section>
-        <p14:section name="시연" id="{82fa8e94-933d-2eb2-638a-703a4b60cabc}">
+        <p14:section name="시연" id="{edcba01b-149f-1639-d1f0-fb283230ffd9}">
           <p14:sldIdLst>
             <p14:sldId id="271"/>
           </p14:sldIdLst>
         </p14:section>
-        <p14:section name="한계" id="{a2bba64d-d1b5-87ed-4fcb-fab3dab16ef8}">
+        <p14:section name="한계" id="{f88d8eb1-ccd7-109f-7a03-9d523704a1ee}">
           <p14:sldIdLst>
             <p14:sldId id="272"/>
           </p14:sldIdLst>
         </p14:section>
-        <p14:section name="마무리" id="{2199741f-2f5e-d308-499d-fca8e514ef46}">
+        <p14:section name="마무리" id="{d267c7f3-b72c-0230-3d6d-dfb32153b43b}">
           <p14:sldIdLst>
             <p14:sldId id="273"/>
           </p14:sldIdLst>
@@ -4531,7 +4531,21 @@
                   <a:schemeClr val="tx2"/>
                 </a:solidFill>
               </a:rPr>
-              <a:t>Before/After 2: 개선별 기여도 — 같은 질의끼리 짝지어 비교했다</a:t>
+              <a:t>Before/After 2: 개선별 기여도</a:t>
+            </a:r>
+            <a:endParaRPr lang="en-US" sz="2800" dirty="0"/>
+          </a:p>
+          <a:p>
+            <a:pPr algn="l" indent="0" marL="0">
+              <a:buNone/>
+            </a:pPr>
+            <a:r>
+              <a:rPr lang="en-US" sz="2800" b="1" dirty="0">
+                <a:solidFill>
+                  <a:schemeClr val="tx2"/>
+                </a:solidFill>
+              </a:rPr>
+              <a:t>같은 질의끼리 짝지어 비교했다</a:t>
             </a:r>
             <a:endParaRPr lang="en-US" sz="2800" dirty="0"/>
           </a:p>
@@ -8088,7 +8102,21 @@
                   <a:schemeClr val="tx2"/>
                 </a:solidFill>
               </a:rPr>
-              <a:t>Before/After 3: 품질을 얻은 대가 — 트레이드오프 한 장</a:t>
+              <a:t>Before/After 3: 품질을 얻은 대가</a:t>
+            </a:r>
+            <a:endParaRPr lang="en-US" sz="2800" dirty="0"/>
+          </a:p>
+          <a:p>
+            <a:pPr algn="l" indent="0" marL="0">
+              <a:buNone/>
+            </a:pPr>
+            <a:r>
+              <a:rPr lang="en-US" sz="2800" b="1" dirty="0">
+                <a:solidFill>
+                  <a:schemeClr val="tx2"/>
+                </a:solidFill>
+              </a:rPr>
+              <a:t>트레이드오프 한 장</a:t>
             </a:r>
             <a:endParaRPr lang="en-US" sz="2800" dirty="0"/>
           </a:p>
